--- a/Records/Capstone Progress.pptx
+++ b/Records/Capstone Progress.pptx
@@ -5,19 +5,21 @@
     <p:sldMasterId id="2147483648" r:id="rId1"/>
   </p:sldMasterIdLst>
   <p:notesMasterIdLst>
-    <p:notesMasterId r:id="rId12"/>
+    <p:notesMasterId r:id="rId14"/>
   </p:notesMasterIdLst>
   <p:sldIdLst>
     <p:sldId id="256" r:id="rId2"/>
     <p:sldId id="257" r:id="rId3"/>
-    <p:sldId id="264" r:id="rId4"/>
-    <p:sldId id="261" r:id="rId5"/>
-    <p:sldId id="262" r:id="rId6"/>
-    <p:sldId id="258" r:id="rId7"/>
-    <p:sldId id="266" r:id="rId8"/>
-    <p:sldId id="265" r:id="rId9"/>
-    <p:sldId id="268" r:id="rId10"/>
-    <p:sldId id="267" r:id="rId11"/>
+    <p:sldId id="269" r:id="rId4"/>
+    <p:sldId id="270" r:id="rId5"/>
+    <p:sldId id="264" r:id="rId6"/>
+    <p:sldId id="261" r:id="rId7"/>
+    <p:sldId id="262" r:id="rId8"/>
+    <p:sldId id="258" r:id="rId9"/>
+    <p:sldId id="266" r:id="rId10"/>
+    <p:sldId id="265" r:id="rId11"/>
+    <p:sldId id="268" r:id="rId12"/>
+    <p:sldId id="267" r:id="rId13"/>
   </p:sldIdLst>
   <p:sldSz cx="12192000" cy="6858000"/>
   <p:notesSz cx="6858000" cy="9144000"/>
@@ -127,6 +129,8 @@
         <p14:section name="Week 1" id="{7A9EE9F0-9EA2-FD4F-95A0-5FB502EDB152}">
           <p14:sldIdLst>
             <p14:sldId id="257"/>
+            <p14:sldId id="269"/>
+            <p14:sldId id="270"/>
             <p14:sldId id="264"/>
             <p14:sldId id="261"/>
             <p14:sldId id="262"/>
@@ -149,7 +153,7 @@
 <file path=ppt/revisionInfo.xml><?xml version="1.0" encoding="utf-8"?>
 <p1510:revInfo xmlns:a="http://schemas.openxmlformats.org/drawingml/2006/main" xmlns:r="http://schemas.openxmlformats.org/officeDocument/2006/relationships" xmlns:p1510="http://schemas.microsoft.com/office/powerpoint/2015/10/main">
   <p1510:revLst>
-    <p1510:client id="{F82CF162-E4EB-A648-BB70-BCFC2B7265E3}" v="35" dt="2026-05-22T13:40:37.287"/>
+    <p1510:client id="{F82CF162-E4EB-A648-BB70-BCFC2B7265E3}" v="250" dt="2026-06-08T11:56:01.911"/>
   </p1510:revLst>
 </p1510:revInfo>
 </file>
@@ -158,23 +162,1285 @@
 <pc:chgInfo xmlns:a="http://schemas.openxmlformats.org/drawingml/2006/main" xmlns:r="http://schemas.openxmlformats.org/officeDocument/2006/relationships" xmlns:ac="http://schemas.microsoft.com/office/drawing/2013/main/command" xmlns:pc="http://schemas.microsoft.com/office/powerpoint/2013/main/command">
   <pc:docChgLst>
     <pc:chgData name="耀泉 马" userId="19e30af8d5659de2" providerId="LiveId" clId="{C3594856-CEDA-5129-B2AF-7962E3CA4CA3}"/>
-    <pc:docChg chg="custSel modSld">
-      <pc:chgData name="耀泉 马" userId="19e30af8d5659de2" providerId="LiveId" clId="{C3594856-CEDA-5129-B2AF-7962E3CA4CA3}" dt="2026-05-22T13:40:39.181" v="17" actId="27636"/>
+    <pc:docChg chg="undo custSel addSld modSld modSection">
+      <pc:chgData name="耀泉 马" userId="19e30af8d5659de2" providerId="LiveId" clId="{C3594856-CEDA-5129-B2AF-7962E3CA4CA3}" dt="2026-06-08T12:06:20.160" v="2486" actId="20577"/>
       <pc:docMkLst>
         <pc:docMk/>
       </pc:docMkLst>
       <pc:sldChg chg="modSp mod">
-        <pc:chgData name="耀泉 马" userId="19e30af8d5659de2" providerId="LiveId" clId="{C3594856-CEDA-5129-B2AF-7962E3CA4CA3}" dt="2026-05-22T13:40:39.181" v="17" actId="27636"/>
+        <pc:chgData name="耀泉 马" userId="19e30af8d5659de2" providerId="LiveId" clId="{C3594856-CEDA-5129-B2AF-7962E3CA4CA3}" dt="2026-06-08T11:50:47.862" v="2380" actId="27636"/>
         <pc:sldMkLst>
           <pc:docMk/>
           <pc:sldMk cId="1853872987" sldId="268"/>
         </pc:sldMkLst>
         <pc:spChg chg="mod">
-          <ac:chgData name="耀泉 马" userId="19e30af8d5659de2" providerId="LiveId" clId="{C3594856-CEDA-5129-B2AF-7962E3CA4CA3}" dt="2026-05-22T13:40:39.181" v="17" actId="27636"/>
+          <ac:chgData name="耀泉 马" userId="19e30af8d5659de2" providerId="LiveId" clId="{C3594856-CEDA-5129-B2AF-7962E3CA4CA3}" dt="2026-06-08T11:50:47.862" v="2380" actId="27636"/>
           <ac:spMkLst>
             <pc:docMk/>
             <pc:sldMk cId="1853872987" sldId="268"/>
             <ac:spMk id="3" creationId="{CF3649C6-2E5F-3C42-FBEB-C028BFCC91CA}"/>
+          </ac:spMkLst>
+        </pc:spChg>
+      </pc:sldChg>
+      <pc:sldChg chg="addSp delSp modSp new mod modNotesTx">
+        <pc:chgData name="耀泉 马" userId="19e30af8d5659de2" providerId="LiveId" clId="{C3594856-CEDA-5129-B2AF-7962E3CA4CA3}" dt="2026-06-08T12:06:20.160" v="2486" actId="20577"/>
+        <pc:sldMkLst>
+          <pc:docMk/>
+          <pc:sldMk cId="2520208814" sldId="269"/>
+        </pc:sldMkLst>
+        <pc:spChg chg="del mod">
+          <ac:chgData name="耀泉 马" userId="19e30af8d5659de2" providerId="LiveId" clId="{C3594856-CEDA-5129-B2AF-7962E3CA4CA3}" dt="2026-06-07T02:41:39.704" v="1745" actId="478"/>
+          <ac:spMkLst>
+            <pc:docMk/>
+            <pc:sldMk cId="2520208814" sldId="269"/>
+            <ac:spMk id="2" creationId="{BCC767AD-7E90-EB9D-83AD-FA3A0ECB32A6}"/>
+          </ac:spMkLst>
+        </pc:spChg>
+        <pc:spChg chg="del">
+          <ac:chgData name="耀泉 马" userId="19e30af8d5659de2" providerId="LiveId" clId="{C3594856-CEDA-5129-B2AF-7962E3CA4CA3}" dt="2026-06-07T01:07:58.978" v="90" actId="12084"/>
+          <ac:spMkLst>
+            <pc:docMk/>
+            <pc:sldMk cId="2520208814" sldId="269"/>
+            <ac:spMk id="3" creationId="{DEF5A666-1642-C1EB-30D5-07F4CCC43CEC}"/>
+          </ac:spMkLst>
+        </pc:spChg>
+        <pc:spChg chg="add del mod">
+          <ac:chgData name="耀泉 马" userId="19e30af8d5659de2" providerId="LiveId" clId="{C3594856-CEDA-5129-B2AF-7962E3CA4CA3}" dt="2026-06-07T01:12:09.207" v="239" actId="478"/>
+          <ac:spMkLst>
+            <pc:docMk/>
+            <pc:sldMk cId="2520208814" sldId="269"/>
+            <ac:spMk id="7" creationId="{049DB8AB-E5C7-038A-DB97-4F97C13D1D2C}"/>
+          </ac:spMkLst>
+        </pc:spChg>
+        <pc:spChg chg="del">
+          <ac:chgData name="耀泉 马" userId="19e30af8d5659de2" providerId="LiveId" clId="{C3594856-CEDA-5129-B2AF-7962E3CA4CA3}" dt="2026-06-07T01:12:54.778" v="256" actId="478"/>
+          <ac:spMkLst>
+            <pc:docMk/>
+            <pc:sldMk cId="2520208814" sldId="269"/>
+            <ac:spMk id="9" creationId="{E2B76107-8300-58DC-9428-6050DD8EB212}"/>
+          </ac:spMkLst>
+        </pc:spChg>
+        <pc:spChg chg="del mod">
+          <ac:chgData name="耀泉 马" userId="19e30af8d5659de2" providerId="LiveId" clId="{C3594856-CEDA-5129-B2AF-7962E3CA4CA3}" dt="2026-06-07T01:12:48.990" v="253" actId="478"/>
+          <ac:spMkLst>
+            <pc:docMk/>
+            <pc:sldMk cId="2520208814" sldId="269"/>
+            <ac:spMk id="10" creationId="{7FF50067-F11E-D873-D0CB-14FDBCEBC913}"/>
+          </ac:spMkLst>
+        </pc:spChg>
+        <pc:spChg chg="add del mod">
+          <ac:chgData name="耀泉 马" userId="19e30af8d5659de2" providerId="LiveId" clId="{C3594856-CEDA-5129-B2AF-7962E3CA4CA3}" dt="2026-06-07T01:14:30.442" v="330" actId="14100"/>
+          <ac:spMkLst>
+            <pc:docMk/>
+            <pc:sldMk cId="2520208814" sldId="269"/>
+            <ac:spMk id="11" creationId="{E134ACFB-9049-2720-9A75-B9CF6AC8B617}"/>
+          </ac:spMkLst>
+        </pc:spChg>
+        <pc:spChg chg="mod">
+          <ac:chgData name="耀泉 马" userId="19e30af8d5659de2" providerId="LiveId" clId="{C3594856-CEDA-5129-B2AF-7962E3CA4CA3}" dt="2026-06-07T01:17:28.875" v="408" actId="1076"/>
+          <ac:spMkLst>
+            <pc:docMk/>
+            <pc:sldMk cId="2520208814" sldId="269"/>
+            <ac:spMk id="12" creationId="{320D9532-89EC-BA4B-559F-9D83636E1DF0}"/>
+          </ac:spMkLst>
+        </pc:spChg>
+        <pc:spChg chg="mod">
+          <ac:chgData name="耀泉 马" userId="19e30af8d5659de2" providerId="LiveId" clId="{C3594856-CEDA-5129-B2AF-7962E3CA4CA3}" dt="2026-06-07T01:18:51.729" v="427" actId="20577"/>
+          <ac:spMkLst>
+            <pc:docMk/>
+            <pc:sldMk cId="2520208814" sldId="269"/>
+            <ac:spMk id="14" creationId="{37D517C3-C4B7-0B4A-35F7-2CA71C723948}"/>
+          </ac:spMkLst>
+        </pc:spChg>
+        <pc:spChg chg="del">
+          <ac:chgData name="耀泉 马" userId="19e30af8d5659de2" providerId="LiveId" clId="{C3594856-CEDA-5129-B2AF-7962E3CA4CA3}" dt="2026-06-07T01:16:14.132" v="392" actId="478"/>
+          <ac:spMkLst>
+            <pc:docMk/>
+            <pc:sldMk cId="2520208814" sldId="269"/>
+            <ac:spMk id="16" creationId="{3166A62B-E84E-65D4-D7A3-A097BF4E276A}"/>
+          </ac:spMkLst>
+        </pc:spChg>
+        <pc:spChg chg="mod">
+          <ac:chgData name="耀泉 马" userId="19e30af8d5659de2" providerId="LiveId" clId="{C3594856-CEDA-5129-B2AF-7962E3CA4CA3}" dt="2026-06-07T01:18:22.483" v="419" actId="20577"/>
+          <ac:spMkLst>
+            <pc:docMk/>
+            <pc:sldMk cId="2520208814" sldId="269"/>
+            <ac:spMk id="17" creationId="{1A216507-24C5-3F7F-413B-2677D6406B7B}"/>
+          </ac:spMkLst>
+        </pc:spChg>
+        <pc:spChg chg="del">
+          <ac:chgData name="耀泉 马" userId="19e30af8d5659de2" providerId="LiveId" clId="{C3594856-CEDA-5129-B2AF-7962E3CA4CA3}" dt="2026-06-07T01:18:40.276" v="425" actId="478"/>
+          <ac:spMkLst>
+            <pc:docMk/>
+            <pc:sldMk cId="2520208814" sldId="269"/>
+            <ac:spMk id="18" creationId="{7FA41BB2-E872-4622-B577-4AEF93B40ED5}"/>
+          </ac:spMkLst>
+        </pc:spChg>
+        <pc:spChg chg="del">
+          <ac:chgData name="耀泉 马" userId="19e30af8d5659de2" providerId="LiveId" clId="{C3594856-CEDA-5129-B2AF-7962E3CA4CA3}" dt="2026-06-07T01:18:37.581" v="424" actId="478"/>
+          <ac:spMkLst>
+            <pc:docMk/>
+            <pc:sldMk cId="2520208814" sldId="269"/>
+            <ac:spMk id="19" creationId="{409D8784-B010-5CE5-62CF-75C8B5B7C28D}"/>
+          </ac:spMkLst>
+        </pc:spChg>
+        <pc:spChg chg="del">
+          <ac:chgData name="耀泉 马" userId="19e30af8d5659de2" providerId="LiveId" clId="{C3594856-CEDA-5129-B2AF-7962E3CA4CA3}" dt="2026-06-07T01:18:19.991" v="418" actId="478"/>
+          <ac:spMkLst>
+            <pc:docMk/>
+            <pc:sldMk cId="2520208814" sldId="269"/>
+            <ac:spMk id="20" creationId="{B6670F6E-87E8-9CDE-88CA-3E826686A5F2}"/>
+          </ac:spMkLst>
+        </pc:spChg>
+        <pc:spChg chg="del mod">
+          <ac:chgData name="耀泉 马" userId="19e30af8d5659de2" providerId="LiveId" clId="{C3594856-CEDA-5129-B2AF-7962E3CA4CA3}" dt="2026-06-07T01:18:32.291" v="422" actId="478"/>
+          <ac:spMkLst>
+            <pc:docMk/>
+            <pc:sldMk cId="2520208814" sldId="269"/>
+            <ac:spMk id="21" creationId="{123E0DB2-3CB9-38F4-6124-86A5606BF4A0}"/>
+          </ac:spMkLst>
+        </pc:spChg>
+        <pc:spChg chg="del">
+          <ac:chgData name="耀泉 马" userId="19e30af8d5659de2" providerId="LiveId" clId="{C3594856-CEDA-5129-B2AF-7962E3CA4CA3}" dt="2026-06-07T01:18:49.720" v="426" actId="478"/>
+          <ac:spMkLst>
+            <pc:docMk/>
+            <pc:sldMk cId="2520208814" sldId="269"/>
+            <ac:spMk id="22" creationId="{261FFAD7-2A1F-DCDF-8EA3-F78D07CCADA4}"/>
+          </ac:spMkLst>
+        </pc:spChg>
+        <pc:spChg chg="del">
+          <ac:chgData name="耀泉 马" userId="19e30af8d5659de2" providerId="LiveId" clId="{C3594856-CEDA-5129-B2AF-7962E3CA4CA3}" dt="2026-06-07T01:18:28.815" v="421" actId="478"/>
+          <ac:spMkLst>
+            <pc:docMk/>
+            <pc:sldMk cId="2520208814" sldId="269"/>
+            <ac:spMk id="23" creationId="{6AD59424-05D2-C293-EA26-09ECFFAF1BFF}"/>
+          </ac:spMkLst>
+        </pc:spChg>
+        <pc:spChg chg="del">
+          <ac:chgData name="耀泉 马" userId="19e30af8d5659de2" providerId="LiveId" clId="{C3594856-CEDA-5129-B2AF-7962E3CA4CA3}" dt="2026-06-07T01:18:17.800" v="417" actId="478"/>
+          <ac:spMkLst>
+            <pc:docMk/>
+            <pc:sldMk cId="2520208814" sldId="269"/>
+            <ac:spMk id="24" creationId="{D518107D-805B-D267-BDB6-8E129BA883B9}"/>
+          </ac:spMkLst>
+        </pc:spChg>
+        <pc:spChg chg="mod">
+          <ac:chgData name="耀泉 马" userId="19e30af8d5659de2" providerId="LiveId" clId="{C3594856-CEDA-5129-B2AF-7962E3CA4CA3}" dt="2026-06-07T01:18:26.664" v="420" actId="20577"/>
+          <ac:spMkLst>
+            <pc:docMk/>
+            <pc:sldMk cId="2520208814" sldId="269"/>
+            <ac:spMk id="25" creationId="{748A32F2-C437-E888-92C8-096A3BA10FE6}"/>
+          </ac:spMkLst>
+        </pc:spChg>
+        <pc:spChg chg="mod">
+          <ac:chgData name="耀泉 马" userId="19e30af8d5659de2" providerId="LiveId" clId="{C3594856-CEDA-5129-B2AF-7962E3CA4CA3}" dt="2026-06-07T01:15:23.259" v="374" actId="1076"/>
+          <ac:spMkLst>
+            <pc:docMk/>
+            <pc:sldMk cId="2520208814" sldId="269"/>
+            <ac:spMk id="27" creationId="{29F9B12B-B66D-7EBC-E52C-5AF32253F011}"/>
+          </ac:spMkLst>
+        </pc:spChg>
+        <pc:spChg chg="mod">
+          <ac:chgData name="耀泉 马" userId="19e30af8d5659de2" providerId="LiveId" clId="{C3594856-CEDA-5129-B2AF-7962E3CA4CA3}" dt="2026-06-07T01:16:58.206" v="393" actId="14100"/>
+          <ac:spMkLst>
+            <pc:docMk/>
+            <pc:sldMk cId="2520208814" sldId="269"/>
+            <ac:spMk id="28" creationId="{74246191-218B-59D5-28B9-08C5A553E4AB}"/>
+          </ac:spMkLst>
+        </pc:spChg>
+        <pc:spChg chg="del">
+          <ac:chgData name="耀泉 马" userId="19e30af8d5659de2" providerId="LiveId" clId="{C3594856-CEDA-5129-B2AF-7962E3CA4CA3}" dt="2026-06-07T01:14:22.378" v="328" actId="478"/>
+          <ac:spMkLst>
+            <pc:docMk/>
+            <pc:sldMk cId="2520208814" sldId="269"/>
+            <ac:spMk id="30" creationId="{6038256C-1AA6-EC63-E62F-F74233830A7B}"/>
+          </ac:spMkLst>
+        </pc:spChg>
+        <pc:spChg chg="del">
+          <ac:chgData name="耀泉 马" userId="19e30af8d5659de2" providerId="LiveId" clId="{C3594856-CEDA-5129-B2AF-7962E3CA4CA3}" dt="2026-06-07T01:14:15.569" v="326" actId="478"/>
+          <ac:spMkLst>
+            <pc:docMk/>
+            <pc:sldMk cId="2520208814" sldId="269"/>
+            <ac:spMk id="31" creationId="{DBFAC039-037D-4C96-486D-3F770BA9A34D}"/>
+          </ac:spMkLst>
+        </pc:spChg>
+        <pc:spChg chg="mod">
+          <ac:chgData name="耀泉 马" userId="19e30af8d5659de2" providerId="LiveId" clId="{C3594856-CEDA-5129-B2AF-7962E3CA4CA3}" dt="2026-06-07T01:15:17.560" v="373" actId="1076"/>
+          <ac:spMkLst>
+            <pc:docMk/>
+            <pc:sldMk cId="2520208814" sldId="269"/>
+            <ac:spMk id="32" creationId="{56267EBA-95C0-4816-3015-1D4382446585}"/>
+          </ac:spMkLst>
+        </pc:spChg>
+        <pc:spChg chg="del mod">
+          <ac:chgData name="耀泉 马" userId="19e30af8d5659de2" providerId="LiveId" clId="{C3594856-CEDA-5129-B2AF-7962E3CA4CA3}" dt="2026-06-07T01:16:04.735" v="390" actId="478"/>
+          <ac:spMkLst>
+            <pc:docMk/>
+            <pc:sldMk cId="2520208814" sldId="269"/>
+            <ac:spMk id="35" creationId="{2D8480C1-2F70-F60A-67AC-42721230C14D}"/>
+          </ac:spMkLst>
+        </pc:spChg>
+        <pc:spChg chg="del mod">
+          <ac:chgData name="耀泉 马" userId="19e30af8d5659de2" providerId="LiveId" clId="{C3594856-CEDA-5129-B2AF-7962E3CA4CA3}" dt="2026-06-07T01:15:59.630" v="388" actId="478"/>
+          <ac:spMkLst>
+            <pc:docMk/>
+            <pc:sldMk cId="2520208814" sldId="269"/>
+            <ac:spMk id="36" creationId="{5EA74C87-CAEE-242B-6C4B-04FC944D4389}"/>
+          </ac:spMkLst>
+        </pc:spChg>
+        <pc:spChg chg="del">
+          <ac:chgData name="耀泉 马" userId="19e30af8d5659de2" providerId="LiveId" clId="{C3594856-CEDA-5129-B2AF-7962E3CA4CA3}" dt="2026-06-07T01:16:08.460" v="391" actId="478"/>
+          <ac:spMkLst>
+            <pc:docMk/>
+            <pc:sldMk cId="2520208814" sldId="269"/>
+            <ac:spMk id="37" creationId="{C0B8F56B-4C30-BABE-5A32-8039D71FA5AA}"/>
+          </ac:spMkLst>
+        </pc:spChg>
+        <pc:spChg chg="del mod">
+          <ac:chgData name="耀泉 马" userId="19e30af8d5659de2" providerId="LiveId" clId="{C3594856-CEDA-5129-B2AF-7962E3CA4CA3}" dt="2026-06-07T01:15:55.415" v="383" actId="478"/>
+          <ac:spMkLst>
+            <pc:docMk/>
+            <pc:sldMk cId="2520208814" sldId="269"/>
+            <ac:spMk id="38" creationId="{3E4A6964-D361-683B-7155-74E3765A06E3}"/>
+          </ac:spMkLst>
+        </pc:spChg>
+        <pc:spChg chg="del">
+          <ac:chgData name="耀泉 马" userId="19e30af8d5659de2" providerId="LiveId" clId="{C3594856-CEDA-5129-B2AF-7962E3CA4CA3}" dt="2026-06-07T01:15:37.408" v="377" actId="478"/>
+          <ac:spMkLst>
+            <pc:docMk/>
+            <pc:sldMk cId="2520208814" sldId="269"/>
+            <ac:spMk id="39" creationId="{AC711F8C-08A9-803C-F987-AC59E00B852F}"/>
+          </ac:spMkLst>
+        </pc:spChg>
+        <pc:spChg chg="del">
+          <ac:chgData name="耀泉 马" userId="19e30af8d5659de2" providerId="LiveId" clId="{C3594856-CEDA-5129-B2AF-7962E3CA4CA3}" dt="2026-06-07T01:15:43.017" v="379" actId="478"/>
+          <ac:spMkLst>
+            <pc:docMk/>
+            <pc:sldMk cId="2520208814" sldId="269"/>
+            <ac:spMk id="40" creationId="{FA6ED6E1-07C5-ED54-CB01-B349016B8303}"/>
+          </ac:spMkLst>
+        </pc:spChg>
+        <pc:spChg chg="del">
+          <ac:chgData name="耀泉 马" userId="19e30af8d5659de2" providerId="LiveId" clId="{C3594856-CEDA-5129-B2AF-7962E3CA4CA3}" dt="2026-06-07T01:14:17.967" v="327" actId="478"/>
+          <ac:spMkLst>
+            <pc:docMk/>
+            <pc:sldMk cId="2520208814" sldId="269"/>
+            <ac:spMk id="41" creationId="{F07996E1-2B27-1384-7797-6F407E762D4B}"/>
+          </ac:spMkLst>
+        </pc:spChg>
+        <pc:spChg chg="del">
+          <ac:chgData name="耀泉 马" userId="19e30af8d5659de2" providerId="LiveId" clId="{C3594856-CEDA-5129-B2AF-7962E3CA4CA3}" dt="2026-06-07T01:14:25.440" v="329" actId="478"/>
+          <ac:spMkLst>
+            <pc:docMk/>
+            <pc:sldMk cId="2520208814" sldId="269"/>
+            <ac:spMk id="43" creationId="{794A7D20-DF9C-902B-76DE-4C2549AD4CD2}"/>
+          </ac:spMkLst>
+        </pc:spChg>
+        <pc:spChg chg="del mod">
+          <ac:chgData name="耀泉 马" userId="19e30af8d5659de2" providerId="LiveId" clId="{C3594856-CEDA-5129-B2AF-7962E3CA4CA3}" dt="2026-06-07T01:12:58.017" v="257" actId="478"/>
+          <ac:spMkLst>
+            <pc:docMk/>
+            <pc:sldMk cId="2520208814" sldId="269"/>
+            <ac:spMk id="44" creationId="{A9620F29-A9F3-DC17-CC59-3E0C902A4E16}"/>
+          </ac:spMkLst>
+        </pc:spChg>
+        <pc:spChg chg="del">
+          <ac:chgData name="耀泉 马" userId="19e30af8d5659de2" providerId="LiveId" clId="{C3594856-CEDA-5129-B2AF-7962E3CA4CA3}" dt="2026-06-07T01:14:12.420" v="325" actId="478"/>
+          <ac:spMkLst>
+            <pc:docMk/>
+            <pc:sldMk cId="2520208814" sldId="269"/>
+            <ac:spMk id="45" creationId="{DFCCC239-6909-EAE5-83C4-939F094757F3}"/>
+          </ac:spMkLst>
+        </pc:spChg>
+        <pc:spChg chg="mod">
+          <ac:chgData name="耀泉 马" userId="19e30af8d5659de2" providerId="LiveId" clId="{C3594856-CEDA-5129-B2AF-7962E3CA4CA3}" dt="2026-06-07T01:17:17.585" v="398" actId="14100"/>
+          <ac:spMkLst>
+            <pc:docMk/>
+            <pc:sldMk cId="2520208814" sldId="269"/>
+            <ac:spMk id="48" creationId="{D30444A5-0C0D-9572-79AF-A77539276A4E}"/>
+          </ac:spMkLst>
+        </pc:spChg>
+        <pc:spChg chg="mod">
+          <ac:chgData name="耀泉 马" userId="19e30af8d5659de2" providerId="LiveId" clId="{C3594856-CEDA-5129-B2AF-7962E3CA4CA3}" dt="2026-06-07T01:13:07.652" v="264" actId="20577"/>
+          <ac:spMkLst>
+            <pc:docMk/>
+            <pc:sldMk cId="2520208814" sldId="269"/>
+            <ac:spMk id="49" creationId="{2B64B246-4645-6E34-859D-931C92127139}"/>
+          </ac:spMkLst>
+        </pc:spChg>
+        <pc:spChg chg="mod">
+          <ac:chgData name="耀泉 马" userId="19e30af8d5659de2" providerId="LiveId" clId="{C3594856-CEDA-5129-B2AF-7962E3CA4CA3}" dt="2026-06-07T01:17:22.955" v="407" actId="1038"/>
+          <ac:spMkLst>
+            <pc:docMk/>
+            <pc:sldMk cId="2520208814" sldId="269"/>
+            <ac:spMk id="50" creationId="{81950795-4B63-A759-31AB-8073B5454FC5}"/>
+          </ac:spMkLst>
+        </pc:spChg>
+        <pc:spChg chg="del">
+          <ac:chgData name="耀泉 马" userId="19e30af8d5659de2" providerId="LiveId" clId="{C3594856-CEDA-5129-B2AF-7962E3CA4CA3}" dt="2026-06-07T01:17:11.979" v="397" actId="478"/>
+          <ac:spMkLst>
+            <pc:docMk/>
+            <pc:sldMk cId="2520208814" sldId="269"/>
+            <ac:spMk id="52" creationId="{33DECD78-01BE-A57C-A23E-925D19391546}"/>
+          </ac:spMkLst>
+        </pc:spChg>
+        <pc:spChg chg="del mod">
+          <ac:chgData name="耀泉 马" userId="19e30af8d5659de2" providerId="LiveId" clId="{C3594856-CEDA-5129-B2AF-7962E3CA4CA3}" dt="2026-06-07T01:17:09.281" v="396" actId="478"/>
+          <ac:spMkLst>
+            <pc:docMk/>
+            <pc:sldMk cId="2520208814" sldId="269"/>
+            <ac:spMk id="53" creationId="{01769014-EA9A-B290-0AF3-4194959F3DC1}"/>
+          </ac:spMkLst>
+        </pc:spChg>
+        <pc:spChg chg="del">
+          <ac:chgData name="耀泉 马" userId="19e30af8d5659de2" providerId="LiveId" clId="{C3594856-CEDA-5129-B2AF-7962E3CA4CA3}" dt="2026-06-07T01:17:05.993" v="395" actId="478"/>
+          <ac:spMkLst>
+            <pc:docMk/>
+            <pc:sldMk cId="2520208814" sldId="269"/>
+            <ac:spMk id="54" creationId="{6935DBBE-C5E2-EB1D-4460-32090FFF38AA}"/>
+          </ac:spMkLst>
+        </pc:spChg>
+        <pc:spChg chg="del">
+          <ac:chgData name="耀泉 马" userId="19e30af8d5659de2" providerId="LiveId" clId="{C3594856-CEDA-5129-B2AF-7962E3CA4CA3}" dt="2026-06-07T01:14:44.499" v="333" actId="478"/>
+          <ac:spMkLst>
+            <pc:docMk/>
+            <pc:sldMk cId="2520208814" sldId="269"/>
+            <ac:spMk id="56" creationId="{0102828A-1ABA-01F6-3905-5612AC871E7B}"/>
+          </ac:spMkLst>
+        </pc:spChg>
+        <pc:spChg chg="del">
+          <ac:chgData name="耀泉 马" userId="19e30af8d5659de2" providerId="LiveId" clId="{C3594856-CEDA-5129-B2AF-7962E3CA4CA3}" dt="2026-06-07T01:14:49.409" v="334" actId="478"/>
+          <ac:spMkLst>
+            <pc:docMk/>
+            <pc:sldMk cId="2520208814" sldId="269"/>
+            <ac:spMk id="57" creationId="{0896D3B1-1149-7AAF-D435-F0B0D8CF3398}"/>
+          </ac:spMkLst>
+        </pc:spChg>
+        <pc:spChg chg="mod">
+          <ac:chgData name="耀泉 马" userId="19e30af8d5659de2" providerId="LiveId" clId="{C3594856-CEDA-5129-B2AF-7962E3CA4CA3}" dt="2026-06-07T01:13:57.085" v="322" actId="20577"/>
+          <ac:spMkLst>
+            <pc:docMk/>
+            <pc:sldMk cId="2520208814" sldId="269"/>
+            <ac:spMk id="58" creationId="{5094ABE6-D8ED-C8AF-2B47-DD28512A002D}"/>
+          </ac:spMkLst>
+        </pc:spChg>
+        <pc:spChg chg="del">
+          <ac:chgData name="耀泉 马" userId="19e30af8d5659de2" providerId="LiveId" clId="{C3594856-CEDA-5129-B2AF-7962E3CA4CA3}" dt="2026-06-07T01:14:58.409" v="336" actId="478"/>
+          <ac:spMkLst>
+            <pc:docMk/>
+            <pc:sldMk cId="2520208814" sldId="269"/>
+            <ac:spMk id="59" creationId="{AF90B0BA-60B3-5CB4-BECE-914D5BE2F8AC}"/>
+          </ac:spMkLst>
+        </pc:spChg>
+        <pc:spChg chg="del mod">
+          <ac:chgData name="耀泉 马" userId="19e30af8d5659de2" providerId="LiveId" clId="{C3594856-CEDA-5129-B2AF-7962E3CA4CA3}" dt="2026-06-07T01:14:03.929" v="324" actId="478"/>
+          <ac:spMkLst>
+            <pc:docMk/>
+            <pc:sldMk cId="2520208814" sldId="269"/>
+            <ac:spMk id="60" creationId="{A9AF9BD4-3B79-37A5-CE55-2097D3AF9D15}"/>
+          </ac:spMkLst>
+        </pc:spChg>
+        <pc:spChg chg="del">
+          <ac:chgData name="耀泉 马" userId="19e30af8d5659de2" providerId="LiveId" clId="{C3594856-CEDA-5129-B2AF-7962E3CA4CA3}" dt="2026-06-07T01:12:05.072" v="238" actId="478"/>
+          <ac:spMkLst>
+            <pc:docMk/>
+            <pc:sldMk cId="2520208814" sldId="269"/>
+            <ac:spMk id="62" creationId="{D6DC862B-8BBF-064B-38E9-780524B56975}"/>
+          </ac:spMkLst>
+        </pc:spChg>
+        <pc:spChg chg="del">
+          <ac:chgData name="耀泉 马" userId="19e30af8d5659de2" providerId="LiveId" clId="{C3594856-CEDA-5129-B2AF-7962E3CA4CA3}" dt="2026-06-07T01:13:49.928" v="320" actId="478"/>
+          <ac:spMkLst>
+            <pc:docMk/>
+            <pc:sldMk cId="2520208814" sldId="269"/>
+            <ac:spMk id="63" creationId="{AFED54B0-1F83-12CB-2A23-6B30E45ADF1F}"/>
+          </ac:spMkLst>
+        </pc:spChg>
+        <pc:spChg chg="del">
+          <ac:chgData name="耀泉 马" userId="19e30af8d5659de2" providerId="LiveId" clId="{C3594856-CEDA-5129-B2AF-7962E3CA4CA3}" dt="2026-06-07T01:17:52.056" v="409" actId="478"/>
+          <ac:spMkLst>
+            <pc:docMk/>
+            <pc:sldMk cId="2520208814" sldId="269"/>
+            <ac:spMk id="65" creationId="{4271E24D-6AB6-3146-A581-6087DCCBE395}"/>
+          </ac:spMkLst>
+        </pc:spChg>
+        <pc:spChg chg="del">
+          <ac:chgData name="耀泉 马" userId="19e30af8d5659de2" providerId="LiveId" clId="{C3594856-CEDA-5129-B2AF-7962E3CA4CA3}" dt="2026-06-07T01:17:54.554" v="410" actId="478"/>
+          <ac:spMkLst>
+            <pc:docMk/>
+            <pc:sldMk cId="2520208814" sldId="269"/>
+            <ac:spMk id="66" creationId="{86188467-631E-1B66-9CD6-0ED414DC85D3}"/>
+          </ac:spMkLst>
+        </pc:spChg>
+        <pc:spChg chg="del mod">
+          <ac:chgData name="耀泉 马" userId="19e30af8d5659de2" providerId="LiveId" clId="{C3594856-CEDA-5129-B2AF-7962E3CA4CA3}" dt="2026-06-07T01:17:56.470" v="411" actId="478"/>
+          <ac:spMkLst>
+            <pc:docMk/>
+            <pc:sldMk cId="2520208814" sldId="269"/>
+            <ac:spMk id="67" creationId="{CEEF7DB0-2392-E1B6-8F1F-00EA3F217D8D}"/>
+          </ac:spMkLst>
+        </pc:spChg>
+        <pc:spChg chg="del">
+          <ac:chgData name="耀泉 马" userId="19e30af8d5659de2" providerId="LiveId" clId="{C3594856-CEDA-5129-B2AF-7962E3CA4CA3}" dt="2026-06-07T01:19:16.366" v="432" actId="478"/>
+          <ac:spMkLst>
+            <pc:docMk/>
+            <pc:sldMk cId="2520208814" sldId="269"/>
+            <ac:spMk id="68" creationId="{8B0A2D90-9369-6B8F-100A-9206A9B48037}"/>
+          </ac:spMkLst>
+        </pc:spChg>
+        <pc:spChg chg="del">
+          <ac:chgData name="耀泉 马" userId="19e30af8d5659de2" providerId="LiveId" clId="{C3594856-CEDA-5129-B2AF-7962E3CA4CA3}" dt="2026-06-07T01:17:58.750" v="412" actId="478"/>
+          <ac:spMkLst>
+            <pc:docMk/>
+            <pc:sldMk cId="2520208814" sldId="269"/>
+            <ac:spMk id="69" creationId="{A1BB5EDA-4895-0186-CB1D-0F7E2373C77A}"/>
+          </ac:spMkLst>
+        </pc:spChg>
+        <pc:spChg chg="del">
+          <ac:chgData name="耀泉 马" userId="19e30af8d5659de2" providerId="LiveId" clId="{C3594856-CEDA-5129-B2AF-7962E3CA4CA3}" dt="2026-06-07T01:19:14.527" v="431" actId="478"/>
+          <ac:spMkLst>
+            <pc:docMk/>
+            <pc:sldMk cId="2520208814" sldId="269"/>
+            <ac:spMk id="70" creationId="{60180368-CD56-CB83-7922-29E2A47D4804}"/>
+          </ac:spMkLst>
+        </pc:spChg>
+        <pc:spChg chg="del">
+          <ac:chgData name="耀泉 马" userId="19e30af8d5659de2" providerId="LiveId" clId="{C3594856-CEDA-5129-B2AF-7962E3CA4CA3}" dt="2026-06-07T01:19:49.546" v="447" actId="478"/>
+          <ac:spMkLst>
+            <pc:docMk/>
+            <pc:sldMk cId="2520208814" sldId="269"/>
+            <ac:spMk id="71" creationId="{53BA7428-E984-4AD8-D8D2-AD7B91FA1D06}"/>
+          </ac:spMkLst>
+        </pc:spChg>
+        <pc:spChg chg="del">
+          <ac:chgData name="耀泉 马" userId="19e30af8d5659de2" providerId="LiveId" clId="{C3594856-CEDA-5129-B2AF-7962E3CA4CA3}" dt="2026-06-07T01:19:31.326" v="438" actId="478"/>
+          <ac:spMkLst>
+            <pc:docMk/>
+            <pc:sldMk cId="2520208814" sldId="269"/>
+            <ac:spMk id="72" creationId="{79F86404-B8AD-EE35-3235-D16229B4BF14}"/>
+          </ac:spMkLst>
+        </pc:spChg>
+        <pc:spChg chg="del">
+          <ac:chgData name="耀泉 马" userId="19e30af8d5659de2" providerId="LiveId" clId="{C3594856-CEDA-5129-B2AF-7962E3CA4CA3}" dt="2026-06-07T01:19:23.133" v="435" actId="478"/>
+          <ac:spMkLst>
+            <pc:docMk/>
+            <pc:sldMk cId="2520208814" sldId="269"/>
+            <ac:spMk id="73" creationId="{A3A97317-70F9-267D-11B7-101FC6E403CC}"/>
+          </ac:spMkLst>
+        </pc:spChg>
+        <pc:spChg chg="add mod">
+          <ac:chgData name="耀泉 马" userId="19e30af8d5659de2" providerId="LiveId" clId="{C3594856-CEDA-5129-B2AF-7962E3CA4CA3}" dt="2026-06-07T01:54:34.586" v="888" actId="1037"/>
+          <ac:spMkLst>
+            <pc:docMk/>
+            <pc:sldMk cId="2520208814" sldId="269"/>
+            <ac:spMk id="94" creationId="{E6FD5FE4-87AE-7C7D-3732-307D2C1DA2B0}"/>
+          </ac:spMkLst>
+        </pc:spChg>
+        <pc:spChg chg="add mod">
+          <ac:chgData name="耀泉 马" userId="19e30af8d5659de2" providerId="LiveId" clId="{C3594856-CEDA-5129-B2AF-7962E3CA4CA3}" dt="2026-06-07T02:07:18.742" v="1099" actId="1037"/>
+          <ac:spMkLst>
+            <pc:docMk/>
+            <pc:sldMk cId="2520208814" sldId="269"/>
+            <ac:spMk id="96" creationId="{BCCF3236-A221-B990-DA6A-474540A36AC7}"/>
+          </ac:spMkLst>
+        </pc:spChg>
+        <pc:spChg chg="add del mod">
+          <ac:chgData name="耀泉 马" userId="19e30af8d5659de2" providerId="LiveId" clId="{C3594856-CEDA-5129-B2AF-7962E3CA4CA3}" dt="2026-06-07T01:48:12.386" v="727" actId="478"/>
+          <ac:spMkLst>
+            <pc:docMk/>
+            <pc:sldMk cId="2520208814" sldId="269"/>
+            <ac:spMk id="97" creationId="{AB118745-72FF-1B22-069A-AEED64F92244}"/>
+          </ac:spMkLst>
+        </pc:spChg>
+        <pc:spChg chg="add mod">
+          <ac:chgData name="耀泉 马" userId="19e30af8d5659de2" providerId="LiveId" clId="{C3594856-CEDA-5129-B2AF-7962E3CA4CA3}" dt="2026-06-07T02:19:36.862" v="1369" actId="207"/>
+          <ac:spMkLst>
+            <pc:docMk/>
+            <pc:sldMk cId="2520208814" sldId="269"/>
+            <ac:spMk id="98" creationId="{5B80560D-7226-7073-5026-287D56BD0A19}"/>
+          </ac:spMkLst>
+        </pc:spChg>
+        <pc:spChg chg="add mod">
+          <ac:chgData name="耀泉 马" userId="19e30af8d5659de2" providerId="LiveId" clId="{C3594856-CEDA-5129-B2AF-7962E3CA4CA3}" dt="2026-06-07T02:36:23.837" v="1700" actId="14100"/>
+          <ac:spMkLst>
+            <pc:docMk/>
+            <pc:sldMk cId="2520208814" sldId="269"/>
+            <ac:spMk id="99" creationId="{29298D02-0D7B-A3E5-8525-20BA77383CAE}"/>
+          </ac:spMkLst>
+        </pc:spChg>
+        <pc:spChg chg="add mod">
+          <ac:chgData name="耀泉 马" userId="19e30af8d5659de2" providerId="LiveId" clId="{C3594856-CEDA-5129-B2AF-7962E3CA4CA3}" dt="2026-06-07T02:47:12.667" v="1849" actId="1036"/>
+          <ac:spMkLst>
+            <pc:docMk/>
+            <pc:sldMk cId="2520208814" sldId="269"/>
+            <ac:spMk id="100" creationId="{C898C339-698F-CEBE-1C2E-2BA2CBA0426C}"/>
+          </ac:spMkLst>
+        </pc:spChg>
+        <pc:spChg chg="add mod">
+          <ac:chgData name="耀泉 马" userId="19e30af8d5659de2" providerId="LiveId" clId="{C3594856-CEDA-5129-B2AF-7962E3CA4CA3}" dt="2026-06-07T02:07:13.002" v="1082" actId="14100"/>
+          <ac:spMkLst>
+            <pc:docMk/>
+            <pc:sldMk cId="2520208814" sldId="269"/>
+            <ac:spMk id="108" creationId="{07CA554A-2E36-44E7-2695-33EC01B84569}"/>
+          </ac:spMkLst>
+        </pc:spChg>
+        <pc:spChg chg="add mod">
+          <ac:chgData name="耀泉 马" userId="19e30af8d5659de2" providerId="LiveId" clId="{C3594856-CEDA-5129-B2AF-7962E3CA4CA3}" dt="2026-06-07T02:07:23.053" v="1100" actId="1076"/>
+          <ac:spMkLst>
+            <pc:docMk/>
+            <pc:sldMk cId="2520208814" sldId="269"/>
+            <ac:spMk id="109" creationId="{8992D15B-AAEE-242C-B6AC-9AB31962A241}"/>
+          </ac:spMkLst>
+        </pc:spChg>
+        <pc:spChg chg="add mod">
+          <ac:chgData name="耀泉 马" userId="19e30af8d5659de2" providerId="LiveId" clId="{C3594856-CEDA-5129-B2AF-7962E3CA4CA3}" dt="2026-06-07T02:47:39.635" v="1867" actId="1076"/>
+          <ac:spMkLst>
+            <pc:docMk/>
+            <pc:sldMk cId="2520208814" sldId="269"/>
+            <ac:spMk id="110" creationId="{7EBC1A99-CCAC-5D05-EE4D-75D7F43BB26C}"/>
+          </ac:spMkLst>
+        </pc:spChg>
+        <pc:spChg chg="add mod">
+          <ac:chgData name="耀泉 马" userId="19e30af8d5659de2" providerId="LiveId" clId="{C3594856-CEDA-5129-B2AF-7962E3CA4CA3}" dt="2026-06-07T02:47:26.018" v="1853" actId="1076"/>
+          <ac:spMkLst>
+            <pc:docMk/>
+            <pc:sldMk cId="2520208814" sldId="269"/>
+            <ac:spMk id="111" creationId="{615B0621-85FA-801B-74E5-9ED5E3E83454}"/>
+          </ac:spMkLst>
+        </pc:spChg>
+        <pc:spChg chg="add mod">
+          <ac:chgData name="耀泉 马" userId="19e30af8d5659de2" providerId="LiveId" clId="{C3594856-CEDA-5129-B2AF-7962E3CA4CA3}" dt="2026-06-07T01:54:49.338" v="890" actId="1076"/>
+          <ac:spMkLst>
+            <pc:docMk/>
+            <pc:sldMk cId="2520208814" sldId="269"/>
+            <ac:spMk id="112" creationId="{83AA4F44-F259-B634-F88D-F1C904477A0F}"/>
+          </ac:spMkLst>
+        </pc:spChg>
+        <pc:spChg chg="add mod">
+          <ac:chgData name="耀泉 马" userId="19e30af8d5659de2" providerId="LiveId" clId="{C3594856-CEDA-5129-B2AF-7962E3CA4CA3}" dt="2026-06-07T01:57:21.046" v="931" actId="1037"/>
+          <ac:spMkLst>
+            <pc:docMk/>
+            <pc:sldMk cId="2520208814" sldId="269"/>
+            <ac:spMk id="114" creationId="{87B42F7E-263E-0B6A-902D-F0F9D3DF2A46}"/>
+          </ac:spMkLst>
+        </pc:spChg>
+        <pc:spChg chg="add mod">
+          <ac:chgData name="耀泉 马" userId="19e30af8d5659de2" providerId="LiveId" clId="{C3594856-CEDA-5129-B2AF-7962E3CA4CA3}" dt="2026-06-07T02:00:38.377" v="1004" actId="1076"/>
+          <ac:spMkLst>
+            <pc:docMk/>
+            <pc:sldMk cId="2520208814" sldId="269"/>
+            <ac:spMk id="116" creationId="{63997B99-74B0-040E-B52E-D4343DB5A519}"/>
+          </ac:spMkLst>
+        </pc:spChg>
+        <pc:spChg chg="add del">
+          <ac:chgData name="耀泉 马" userId="19e30af8d5659de2" providerId="LiveId" clId="{C3594856-CEDA-5129-B2AF-7962E3CA4CA3}" dt="2026-06-07T02:00:56.027" v="1018" actId="11529"/>
+          <ac:spMkLst>
+            <pc:docMk/>
+            <pc:sldMk cId="2520208814" sldId="269"/>
+            <ac:spMk id="118" creationId="{08940780-DD07-F3E5-9169-0599D5BC004E}"/>
+          </ac:spMkLst>
+        </pc:spChg>
+        <pc:spChg chg="add mod">
+          <ac:chgData name="耀泉 马" userId="19e30af8d5659de2" providerId="LiveId" clId="{C3594856-CEDA-5129-B2AF-7962E3CA4CA3}" dt="2026-06-07T02:01:32.275" v="1031" actId="1037"/>
+          <ac:spMkLst>
+            <pc:docMk/>
+            <pc:sldMk cId="2520208814" sldId="269"/>
+            <ac:spMk id="119" creationId="{4736DC92-8B38-D0DB-E31C-F99C86253667}"/>
+          </ac:spMkLst>
+        </pc:spChg>
+        <pc:spChg chg="add mod">
+          <ac:chgData name="耀泉 马" userId="19e30af8d5659de2" providerId="LiveId" clId="{C3594856-CEDA-5129-B2AF-7962E3CA4CA3}" dt="2026-06-07T02:47:35.815" v="1865" actId="1037"/>
+          <ac:spMkLst>
+            <pc:docMk/>
+            <pc:sldMk cId="2520208814" sldId="269"/>
+            <ac:spMk id="137" creationId="{26040C58-425C-5001-889E-177C33309617}"/>
+          </ac:spMkLst>
+        </pc:spChg>
+        <pc:spChg chg="add mod">
+          <ac:chgData name="耀泉 马" userId="19e30af8d5659de2" providerId="LiveId" clId="{C3594856-CEDA-5129-B2AF-7962E3CA4CA3}" dt="2026-06-07T02:47:35.815" v="1865" actId="1037"/>
+          <ac:spMkLst>
+            <pc:docMk/>
+            <pc:sldMk cId="2520208814" sldId="269"/>
+            <ac:spMk id="141" creationId="{E58912BB-F314-8295-1A6C-5CB7AAC9F65F}"/>
+          </ac:spMkLst>
+        </pc:spChg>
+        <pc:spChg chg="add mod">
+          <ac:chgData name="耀泉 马" userId="19e30af8d5659de2" providerId="LiveId" clId="{C3594856-CEDA-5129-B2AF-7962E3CA4CA3}" dt="2026-06-07T02:48:05.615" v="1870" actId="1076"/>
+          <ac:spMkLst>
+            <pc:docMk/>
+            <pc:sldMk cId="2520208814" sldId="269"/>
+            <ac:spMk id="142" creationId="{161178A5-B23A-8F83-2A37-25756566DBCF}"/>
+          </ac:spMkLst>
+        </pc:spChg>
+        <pc:spChg chg="add mod">
+          <ac:chgData name="耀泉 马" userId="19e30af8d5659de2" providerId="LiveId" clId="{C3594856-CEDA-5129-B2AF-7962E3CA4CA3}" dt="2026-06-07T02:47:35.815" v="1865" actId="1037"/>
+          <ac:spMkLst>
+            <pc:docMk/>
+            <pc:sldMk cId="2520208814" sldId="269"/>
+            <ac:spMk id="143" creationId="{06C00B86-FCCF-0594-552F-1B2AA1C69644}"/>
+          </ac:spMkLst>
+        </pc:spChg>
+        <pc:spChg chg="add mod">
+          <ac:chgData name="耀泉 马" userId="19e30af8d5659de2" providerId="LiveId" clId="{C3594856-CEDA-5129-B2AF-7962E3CA4CA3}" dt="2026-06-07T02:47:21.095" v="1852" actId="14100"/>
+          <ac:spMkLst>
+            <pc:docMk/>
+            <pc:sldMk cId="2520208814" sldId="269"/>
+            <ac:spMk id="144" creationId="{2CD0A8B5-A948-56DE-4F7B-338BE23AE60D}"/>
+          </ac:spMkLst>
+        </pc:spChg>
+        <pc:spChg chg="add mod">
+          <ac:chgData name="耀泉 马" userId="19e30af8d5659de2" providerId="LiveId" clId="{C3594856-CEDA-5129-B2AF-7962E3CA4CA3}" dt="2026-06-07T02:43:49.939" v="1787" actId="1076"/>
+          <ac:spMkLst>
+            <pc:docMk/>
+            <pc:sldMk cId="2520208814" sldId="269"/>
+            <ac:spMk id="145" creationId="{F469385C-D6E3-CE87-4D9A-592AAFD329E4}"/>
+          </ac:spMkLst>
+        </pc:spChg>
+        <pc:spChg chg="add mod">
+          <ac:chgData name="耀泉 马" userId="19e30af8d5659de2" providerId="LiveId" clId="{C3594856-CEDA-5129-B2AF-7962E3CA4CA3}" dt="2026-06-07T02:47:43.744" v="1868" actId="1076"/>
+          <ac:spMkLst>
+            <pc:docMk/>
+            <pc:sldMk cId="2520208814" sldId="269"/>
+            <ac:spMk id="147" creationId="{FA9691AB-BFEC-1BE3-5A87-305AF1D91BB3}"/>
+          </ac:spMkLst>
+        </pc:spChg>
+        <pc:spChg chg="add del mod">
+          <ac:chgData name="耀泉 马" userId="19e30af8d5659de2" providerId="LiveId" clId="{C3594856-CEDA-5129-B2AF-7962E3CA4CA3}" dt="2026-06-07T02:27:34.392" v="1516"/>
+          <ac:spMkLst>
+            <pc:docMk/>
+            <pc:sldMk cId="2520208814" sldId="269"/>
+            <ac:spMk id="148" creationId="{C405711E-75F7-0788-AED1-1C6AC0478B93}"/>
+          </ac:spMkLst>
+        </pc:spChg>
+        <pc:spChg chg="add del mod">
+          <ac:chgData name="耀泉 马" userId="19e30af8d5659de2" providerId="LiveId" clId="{C3594856-CEDA-5129-B2AF-7962E3CA4CA3}" dt="2026-06-07T02:29:20.391" v="1534"/>
+          <ac:spMkLst>
+            <pc:docMk/>
+            <pc:sldMk cId="2520208814" sldId="269"/>
+            <ac:spMk id="149" creationId="{47A81744-2230-B7A8-D80B-7CE3C37685C9}"/>
+          </ac:spMkLst>
+        </pc:spChg>
+        <pc:spChg chg="add mod">
+          <ac:chgData name="耀泉 马" userId="19e30af8d5659de2" providerId="LiveId" clId="{C3594856-CEDA-5129-B2AF-7962E3CA4CA3}" dt="2026-06-08T11:19:32.858" v="1915" actId="1037"/>
+          <ac:spMkLst>
+            <pc:docMk/>
+            <pc:sldMk cId="2520208814" sldId="269"/>
+            <ac:spMk id="150" creationId="{5E1C9B84-61FD-6346-1911-F5229E8BA03F}"/>
+          </ac:spMkLst>
+        </pc:spChg>
+        <pc:spChg chg="add del">
+          <ac:chgData name="耀泉 马" userId="19e30af8d5659de2" providerId="LiveId" clId="{C3594856-CEDA-5129-B2AF-7962E3CA4CA3}" dt="2026-06-07T02:19:22.922" v="1368" actId="11529"/>
+          <ac:spMkLst>
+            <pc:docMk/>
+            <pc:sldMk cId="2520208814" sldId="269"/>
+            <ac:spMk id="151" creationId="{6061118C-A3A0-9348-C885-E7C2B1612B8D}"/>
+          </ac:spMkLst>
+        </pc:spChg>
+        <pc:spChg chg="add del mod">
+          <ac:chgData name="耀泉 马" userId="19e30af8d5659de2" providerId="LiveId" clId="{C3594856-CEDA-5129-B2AF-7962E3CA4CA3}" dt="2026-06-07T02:24:52.226" v="1483"/>
+          <ac:spMkLst>
+            <pc:docMk/>
+            <pc:sldMk cId="2520208814" sldId="269"/>
+            <ac:spMk id="153" creationId="{1E81414C-2F79-878F-CDBC-BE2C16D0F406}"/>
+          </ac:spMkLst>
+        </pc:spChg>
+        <pc:spChg chg="add mod">
+          <ac:chgData name="耀泉 马" userId="19e30af8d5659de2" providerId="LiveId" clId="{C3594856-CEDA-5129-B2AF-7962E3CA4CA3}" dt="2026-06-08T11:19:32.858" v="1915" actId="1037"/>
+          <ac:spMkLst>
+            <pc:docMk/>
+            <pc:sldMk cId="2520208814" sldId="269"/>
+            <ac:spMk id="155" creationId="{A612EF7E-0F09-5D74-B404-DAD3FB3A3D85}"/>
+          </ac:spMkLst>
+        </pc:spChg>
+        <pc:spChg chg="add mod">
+          <ac:chgData name="耀泉 马" userId="19e30af8d5659de2" providerId="LiveId" clId="{C3594856-CEDA-5129-B2AF-7962E3CA4CA3}" dt="2026-06-08T11:19:32.858" v="1915" actId="1037"/>
+          <ac:spMkLst>
+            <pc:docMk/>
+            <pc:sldMk cId="2520208814" sldId="269"/>
+            <ac:spMk id="156" creationId="{A7CCDA6B-8DAC-6779-0300-D1ABD7723CD6}"/>
+          </ac:spMkLst>
+        </pc:spChg>
+        <pc:spChg chg="add mod">
+          <ac:chgData name="耀泉 马" userId="19e30af8d5659de2" providerId="LiveId" clId="{C3594856-CEDA-5129-B2AF-7962E3CA4CA3}" dt="2026-06-08T11:19:32.858" v="1915" actId="1037"/>
+          <ac:spMkLst>
+            <pc:docMk/>
+            <pc:sldMk cId="2520208814" sldId="269"/>
+            <ac:spMk id="157" creationId="{5C1EE247-48DB-9F98-AC2E-0AD24F1C6681}"/>
+          </ac:spMkLst>
+        </pc:spChg>
+        <pc:spChg chg="add mod">
+          <ac:chgData name="耀泉 马" userId="19e30af8d5659de2" providerId="LiveId" clId="{C3594856-CEDA-5129-B2AF-7962E3CA4CA3}" dt="2026-06-08T11:19:32.858" v="1915" actId="1037"/>
+          <ac:spMkLst>
+            <pc:docMk/>
+            <pc:sldMk cId="2520208814" sldId="269"/>
+            <ac:spMk id="158" creationId="{AEC27C49-4E47-3B27-07CC-C452DF03CD96}"/>
+          </ac:spMkLst>
+        </pc:spChg>
+        <pc:spChg chg="add mod">
+          <ac:chgData name="耀泉 马" userId="19e30af8d5659de2" providerId="LiveId" clId="{C3594856-CEDA-5129-B2AF-7962E3CA4CA3}" dt="2026-06-08T11:19:32.858" v="1915" actId="1037"/>
+          <ac:spMkLst>
+            <pc:docMk/>
+            <pc:sldMk cId="2520208814" sldId="269"/>
+            <ac:spMk id="159" creationId="{4241A81B-9F61-A630-8B8A-BE611C0C9531}"/>
+          </ac:spMkLst>
+        </pc:spChg>
+        <pc:spChg chg="add mod">
+          <ac:chgData name="耀泉 马" userId="19e30af8d5659de2" providerId="LiveId" clId="{C3594856-CEDA-5129-B2AF-7962E3CA4CA3}" dt="2026-06-08T11:19:32.858" v="1915" actId="1037"/>
+          <ac:spMkLst>
+            <pc:docMk/>
+            <pc:sldMk cId="2520208814" sldId="269"/>
+            <ac:spMk id="160" creationId="{C66CD70B-3997-E535-C310-3F86D9F14847}"/>
+          </ac:spMkLst>
+        </pc:spChg>
+        <pc:spChg chg="add del mod">
+          <ac:chgData name="耀泉 马" userId="19e30af8d5659de2" providerId="LiveId" clId="{C3594856-CEDA-5129-B2AF-7962E3CA4CA3}" dt="2026-06-07T02:41:42.692" v="1746" actId="478"/>
+          <ac:spMkLst>
+            <pc:docMk/>
+            <pc:sldMk cId="2520208814" sldId="269"/>
+            <ac:spMk id="189" creationId="{B756FF63-97EF-C700-8CB4-07D97C8176E8}"/>
+          </ac:spMkLst>
+        </pc:spChg>
+        <pc:spChg chg="add mod">
+          <ac:chgData name="耀泉 马" userId="19e30af8d5659de2" providerId="LiveId" clId="{C3594856-CEDA-5129-B2AF-7962E3CA4CA3}" dt="2026-06-08T11:19:32.858" v="1915" actId="1037"/>
+          <ac:spMkLst>
+            <pc:docMk/>
+            <pc:sldMk cId="2520208814" sldId="269"/>
+            <ac:spMk id="194" creationId="{EB88069A-90E2-5118-D313-922CE526AB5A}"/>
+          </ac:spMkLst>
+        </pc:spChg>
+        <pc:spChg chg="add mod">
+          <ac:chgData name="耀泉 马" userId="19e30af8d5659de2" providerId="LiveId" clId="{C3594856-CEDA-5129-B2AF-7962E3CA4CA3}" dt="2026-06-07T02:48:51.993" v="1888" actId="1038"/>
+          <ac:spMkLst>
+            <pc:docMk/>
+            <pc:sldMk cId="2520208814" sldId="269"/>
+            <ac:spMk id="196" creationId="{440EBA3A-420D-42CD-11AE-51A627FB67B3}"/>
+          </ac:spMkLst>
+        </pc:spChg>
+        <pc:grpChg chg="add del mod">
+          <ac:chgData name="耀泉 马" userId="19e30af8d5659de2" providerId="LiveId" clId="{C3594856-CEDA-5129-B2AF-7962E3CA4CA3}" dt="2026-06-07T01:26:46.652" v="453" actId="478"/>
+          <ac:grpSpMkLst>
+            <pc:docMk/>
+            <pc:sldMk cId="2520208814" sldId="269"/>
+            <ac:grpSpMk id="8" creationId="{56173242-3AD7-3B66-D3BB-A87996625E5B}"/>
+          </ac:grpSpMkLst>
+        </pc:grpChg>
+        <pc:grpChg chg="del">
+          <ac:chgData name="耀泉 马" userId="19e30af8d5659de2" providerId="LiveId" clId="{C3594856-CEDA-5129-B2AF-7962E3CA4CA3}" dt="2026-06-07T01:19:49.546" v="447" actId="478"/>
+          <ac:grpSpMkLst>
+            <pc:docMk/>
+            <pc:sldMk cId="2520208814" sldId="269"/>
+            <ac:grpSpMk id="55" creationId="{E15138D2-E3A9-89E1-2DFA-A32C39D67D78}"/>
+          </ac:grpSpMkLst>
+        </pc:grpChg>
+        <pc:graphicFrameChg chg="add del mod">
+          <ac:chgData name="耀泉 马" userId="19e30af8d5659de2" providerId="LiveId" clId="{C3594856-CEDA-5129-B2AF-7962E3CA4CA3}" dt="2026-06-07T01:11:30.534" v="236" actId="478"/>
+          <ac:graphicFrameMkLst>
+            <pc:docMk/>
+            <pc:sldMk cId="2520208814" sldId="269"/>
+            <ac:graphicFrameMk id="4" creationId="{5B6B0BB7-FBEA-8EE6-DD80-132153975AF2}"/>
+          </ac:graphicFrameMkLst>
+        </pc:graphicFrameChg>
+        <pc:graphicFrameChg chg="add del mod modGraphic">
+          <ac:chgData name="耀泉 马" userId="19e30af8d5659de2" providerId="LiveId" clId="{C3594856-CEDA-5129-B2AF-7962E3CA4CA3}" dt="2026-06-07T01:11:24.323" v="234" actId="478"/>
+          <ac:graphicFrameMkLst>
+            <pc:docMk/>
+            <pc:sldMk cId="2520208814" sldId="269"/>
+            <ac:graphicFrameMk id="5" creationId="{2928D54D-3CDE-2DEA-F430-35032174F501}"/>
+          </ac:graphicFrameMkLst>
+        </pc:graphicFrameChg>
+        <pc:graphicFrameChg chg="add mod modGraphic">
+          <ac:chgData name="耀泉 马" userId="19e30af8d5659de2" providerId="LiveId" clId="{C3594856-CEDA-5129-B2AF-7962E3CA4CA3}" dt="2026-06-07T02:45:30.965" v="1804" actId="1037"/>
+          <ac:graphicFrameMkLst>
+            <pc:docMk/>
+            <pc:sldMk cId="2520208814" sldId="269"/>
+            <ac:graphicFrameMk id="152" creationId="{0080C852-815E-28FA-BD57-6ED5B1124453}"/>
+          </ac:graphicFrameMkLst>
+        </pc:graphicFrameChg>
+        <pc:graphicFrameChg chg="add mod modGraphic">
+          <ac:chgData name="耀泉 马" userId="19e30af8d5659de2" providerId="LiveId" clId="{C3594856-CEDA-5129-B2AF-7962E3CA4CA3}" dt="2026-06-08T11:19:32.858" v="1915" actId="1037"/>
+          <ac:graphicFrameMkLst>
+            <pc:docMk/>
+            <pc:sldMk cId="2520208814" sldId="269"/>
+            <ac:graphicFrameMk id="154" creationId="{EF3B6D86-8E31-5C3E-0ED5-A569A931B746}"/>
+          </ac:graphicFrameMkLst>
+        </pc:graphicFrameChg>
+        <pc:picChg chg="del">
+          <ac:chgData name="耀泉 马" userId="19e30af8d5659de2" providerId="LiveId" clId="{C3594856-CEDA-5129-B2AF-7962E3CA4CA3}" dt="2026-06-07T01:18:34.664" v="423" actId="478"/>
+          <ac:picMkLst>
+            <pc:docMk/>
+            <pc:sldMk cId="2520208814" sldId="269"/>
+            <ac:picMk id="26" creationId="{E5D8F420-FB3E-7737-A4AD-659C1CF09B1E}"/>
+          </ac:picMkLst>
+        </pc:picChg>
+        <pc:picChg chg="del">
+          <ac:chgData name="耀泉 马" userId="19e30af8d5659de2" providerId="LiveId" clId="{C3594856-CEDA-5129-B2AF-7962E3CA4CA3}" dt="2026-06-07T01:15:34.015" v="376" actId="478"/>
+          <ac:picMkLst>
+            <pc:docMk/>
+            <pc:sldMk cId="2520208814" sldId="269"/>
+            <ac:picMk id="46" creationId="{BF57E9F2-5BA7-45BB-7D7D-4CB72E7B4F37}"/>
+          </ac:picMkLst>
+        </pc:picChg>
+        <pc:picChg chg="del">
+          <ac:chgData name="耀泉 马" userId="19e30af8d5659de2" providerId="LiveId" clId="{C3594856-CEDA-5129-B2AF-7962E3CA4CA3}" dt="2026-06-07T01:15:25.282" v="375" actId="478"/>
+          <ac:picMkLst>
+            <pc:docMk/>
+            <pc:sldMk cId="2520208814" sldId="269"/>
+            <ac:picMk id="47" creationId="{4365D22C-340F-8D0D-ED0A-74A3CF9A4F85}"/>
+          </ac:picMkLst>
+        </pc:picChg>
+        <pc:picChg chg="del">
+          <ac:chgData name="耀泉 马" userId="19e30af8d5659de2" providerId="LiveId" clId="{C3594856-CEDA-5129-B2AF-7962E3CA4CA3}" dt="2026-06-07T01:17:03.217" v="394" actId="478"/>
+          <ac:picMkLst>
+            <pc:docMk/>
+            <pc:sldMk cId="2520208814" sldId="269"/>
+            <ac:picMk id="51" creationId="{615F9052-F794-FD8B-E5D5-7E3D258B6BD3}"/>
+          </ac:picMkLst>
+        </pc:picChg>
+        <pc:picChg chg="add del mod">
+          <ac:chgData name="耀泉 马" userId="19e30af8d5659de2" providerId="LiveId" clId="{C3594856-CEDA-5129-B2AF-7962E3CA4CA3}" dt="2026-06-07T01:48:12.386" v="727" actId="478"/>
+          <ac:picMkLst>
+            <pc:docMk/>
+            <pc:sldMk cId="2520208814" sldId="269"/>
+            <ac:picMk id="93" creationId="{EA4DEB63-1826-165F-F41C-01FBAF30F2B8}"/>
+          </ac:picMkLst>
+        </pc:picChg>
+        <pc:picChg chg="add mod">
+          <ac:chgData name="耀泉 马" userId="19e30af8d5659de2" providerId="LiveId" clId="{C3594856-CEDA-5129-B2AF-7962E3CA4CA3}" dt="2026-06-07T02:07:18.742" v="1099" actId="1037"/>
+          <ac:picMkLst>
+            <pc:docMk/>
+            <pc:sldMk cId="2520208814" sldId="269"/>
+            <ac:picMk id="95" creationId="{82701329-01B4-6241-5F8E-FF1FCD188986}"/>
+          </ac:picMkLst>
+        </pc:picChg>
+        <pc:picChg chg="add del mod">
+          <ac:chgData name="耀泉 马" userId="19e30af8d5659de2" providerId="LiveId" clId="{C3594856-CEDA-5129-B2AF-7962E3CA4CA3}" dt="2026-06-07T01:46:08.398" v="676" actId="478"/>
+          <ac:picMkLst>
+            <pc:docMk/>
+            <pc:sldMk cId="2520208814" sldId="269"/>
+            <ac:picMk id="101" creationId="{571CEA0A-852E-2108-0325-883447906971}"/>
+          </ac:picMkLst>
+        </pc:picChg>
+        <pc:picChg chg="add mod">
+          <ac:chgData name="耀泉 马" userId="19e30af8d5659de2" providerId="LiveId" clId="{C3594856-CEDA-5129-B2AF-7962E3CA4CA3}" dt="2026-06-07T01:45:18.600" v="655" actId="1076"/>
+          <ac:picMkLst>
+            <pc:docMk/>
+            <pc:sldMk cId="2520208814" sldId="269"/>
+            <ac:picMk id="102" creationId="{D66065B5-2D9E-B963-0D12-6BED18CE7CA5}"/>
+          </ac:picMkLst>
+        </pc:picChg>
+        <pc:picChg chg="add del mod">
+          <ac:chgData name="耀泉 马" userId="19e30af8d5659de2" providerId="LiveId" clId="{C3594856-CEDA-5129-B2AF-7962E3CA4CA3}" dt="2026-06-07T01:48:12.386" v="727" actId="478"/>
+          <ac:picMkLst>
+            <pc:docMk/>
+            <pc:sldMk cId="2520208814" sldId="269"/>
+            <ac:picMk id="103" creationId="{745F0BBF-6FE3-8251-896F-C6661763F96F}"/>
+          </ac:picMkLst>
+        </pc:picChg>
+        <pc:picChg chg="add del mod">
+          <ac:chgData name="耀泉 马" userId="19e30af8d5659de2" providerId="LiveId" clId="{C3594856-CEDA-5129-B2AF-7962E3CA4CA3}" dt="2026-06-07T01:48:12.386" v="727" actId="478"/>
+          <ac:picMkLst>
+            <pc:docMk/>
+            <pc:sldMk cId="2520208814" sldId="269"/>
+            <ac:picMk id="104" creationId="{2E582F0C-81B5-A3D4-EBEF-2B809FE30441}"/>
+          </ac:picMkLst>
+        </pc:picChg>
+        <pc:picChg chg="add del mod">
+          <ac:chgData name="耀泉 马" userId="19e30af8d5659de2" providerId="LiveId" clId="{C3594856-CEDA-5129-B2AF-7962E3CA4CA3}" dt="2026-06-07T01:48:50.249" v="735" actId="478"/>
+          <ac:picMkLst>
+            <pc:docMk/>
+            <pc:sldMk cId="2520208814" sldId="269"/>
+            <ac:picMk id="105" creationId="{1D227258-198B-7DC5-E103-E13D45667456}"/>
+          </ac:picMkLst>
+        </pc:picChg>
+        <pc:picChg chg="add mod">
+          <ac:chgData name="耀泉 马" userId="19e30af8d5659de2" providerId="LiveId" clId="{C3594856-CEDA-5129-B2AF-7962E3CA4CA3}" dt="2026-06-07T01:48:36.154" v="732"/>
+          <ac:picMkLst>
+            <pc:docMk/>
+            <pc:sldMk cId="2520208814" sldId="269"/>
+            <ac:picMk id="106" creationId="{8DD8623C-8725-5F90-2CBA-0CAD6ADB6A47}"/>
+          </ac:picMkLst>
+        </pc:picChg>
+        <pc:picChg chg="add del mod">
+          <ac:chgData name="耀泉 马" userId="19e30af8d5659de2" providerId="LiveId" clId="{C3594856-CEDA-5129-B2AF-7962E3CA4CA3}" dt="2026-06-08T11:54:34.605" v="2456" actId="478"/>
+          <ac:picMkLst>
+            <pc:docMk/>
+            <pc:sldMk cId="2520208814" sldId="269"/>
+            <ac:picMk id="107" creationId="{0F517775-637E-42C1-4E6E-2AD529EF40C2}"/>
+          </ac:picMkLst>
+        </pc:picChg>
+        <pc:picChg chg="add mod">
+          <ac:chgData name="耀泉 马" userId="19e30af8d5659de2" providerId="LiveId" clId="{C3594856-CEDA-5129-B2AF-7962E3CA4CA3}" dt="2026-06-07T01:57:21.046" v="931" actId="1037"/>
+          <ac:picMkLst>
+            <pc:docMk/>
+            <pc:sldMk cId="2520208814" sldId="269"/>
+            <ac:picMk id="113" creationId="{D5163FF7-519D-44CF-1598-5A0EB9CADE24}"/>
+          </ac:picMkLst>
+        </pc:picChg>
+        <pc:picChg chg="add mod">
+          <ac:chgData name="耀泉 马" userId="19e30af8d5659de2" providerId="LiveId" clId="{C3594856-CEDA-5129-B2AF-7962E3CA4CA3}" dt="2026-06-07T02:00:44.265" v="1015" actId="1038"/>
+          <ac:picMkLst>
+            <pc:docMk/>
+            <pc:sldMk cId="2520208814" sldId="269"/>
+            <ac:picMk id="115" creationId="{9B55552B-CAB8-2416-3762-9F2DCD18B72A}"/>
+          </ac:picMkLst>
+        </pc:picChg>
+        <pc:picChg chg="add mod">
+          <ac:chgData name="耀泉 马" userId="19e30af8d5659de2" providerId="LiveId" clId="{C3594856-CEDA-5129-B2AF-7962E3CA4CA3}" dt="2026-06-07T02:01:35.420" v="1034" actId="1036"/>
+          <ac:picMkLst>
+            <pc:docMk/>
+            <pc:sldMk cId="2520208814" sldId="269"/>
+            <ac:picMk id="117" creationId="{45F576A8-E3A8-218C-7459-267BFDCF0EE9}"/>
+          </ac:picMkLst>
+        </pc:picChg>
+        <pc:picChg chg="add mod">
+          <ac:chgData name="耀泉 马" userId="19e30af8d5659de2" providerId="LiveId" clId="{C3594856-CEDA-5129-B2AF-7962E3CA4CA3}" dt="2026-06-07T02:47:35.815" v="1865" actId="1037"/>
+          <ac:picMkLst>
+            <pc:docMk/>
+            <pc:sldMk cId="2520208814" sldId="269"/>
+            <ac:picMk id="134" creationId="{2DAB9230-1751-37DD-D964-89DF8CDC4E30}"/>
+          </ac:picMkLst>
+        </pc:picChg>
+        <pc:picChg chg="add del mod">
+          <ac:chgData name="耀泉 马" userId="19e30af8d5659de2" providerId="LiveId" clId="{C3594856-CEDA-5129-B2AF-7962E3CA4CA3}" dt="2026-06-07T02:09:43.883" v="1159" actId="478"/>
+          <ac:picMkLst>
+            <pc:docMk/>
+            <pc:sldMk cId="2520208814" sldId="269"/>
+            <ac:picMk id="139" creationId="{F8DFAC13-58B6-EDBA-A79F-A6ABDEF71F3C}"/>
+          </ac:picMkLst>
+        </pc:picChg>
+        <pc:picChg chg="add mod">
+          <ac:chgData name="耀泉 马" userId="19e30af8d5659de2" providerId="LiveId" clId="{C3594856-CEDA-5129-B2AF-7962E3CA4CA3}" dt="2026-06-07T02:47:35.815" v="1865" actId="1037"/>
+          <ac:picMkLst>
+            <pc:docMk/>
+            <pc:sldMk cId="2520208814" sldId="269"/>
+            <ac:picMk id="140" creationId="{6E89CF31-E937-A397-F470-C1752B36E861}"/>
+          </ac:picMkLst>
+        </pc:picChg>
+        <pc:picChg chg="add mod">
+          <ac:chgData name="耀泉 马" userId="19e30af8d5659de2" providerId="LiveId" clId="{C3594856-CEDA-5129-B2AF-7962E3CA4CA3}" dt="2026-06-07T02:47:35.815" v="1865" actId="1037"/>
+          <ac:picMkLst>
+            <pc:docMk/>
+            <pc:sldMk cId="2520208814" sldId="269"/>
+            <ac:picMk id="146" creationId="{7F2E7E1C-E5E6-1474-01F5-6F1BF7F9E19A}"/>
+          </ac:picMkLst>
+        </pc:picChg>
+        <pc:picChg chg="add del mod">
+          <ac:chgData name="耀泉 马" userId="19e30af8d5659de2" providerId="LiveId" clId="{C3594856-CEDA-5129-B2AF-7962E3CA4CA3}" dt="2026-06-07T02:37:54.524" v="1706" actId="21"/>
+          <ac:picMkLst>
+            <pc:docMk/>
+            <pc:sldMk cId="2520208814" sldId="269"/>
+            <ac:picMk id="182" creationId="{40882A68-2EE8-A861-D167-D6EEB221357D}"/>
+          </ac:picMkLst>
+        </pc:picChg>
+        <pc:picChg chg="add del mod">
+          <ac:chgData name="耀泉 马" userId="19e30af8d5659de2" providerId="LiveId" clId="{C3594856-CEDA-5129-B2AF-7962E3CA4CA3}" dt="2026-06-07T02:38:55.580" v="1732" actId="478"/>
+          <ac:picMkLst>
+            <pc:docMk/>
+            <pc:sldMk cId="2520208814" sldId="269"/>
+            <ac:picMk id="183" creationId="{FD81E25B-86F4-20F9-AA31-42FB13D9AC0D}"/>
+          </ac:picMkLst>
+        </pc:picChg>
+        <pc:picChg chg="add del mod">
+          <ac:chgData name="耀泉 马" userId="19e30af8d5659de2" providerId="LiveId" clId="{C3594856-CEDA-5129-B2AF-7962E3CA4CA3}" dt="2026-06-07T02:39:26.050" v="1738" actId="478"/>
+          <ac:picMkLst>
+            <pc:docMk/>
+            <pc:sldMk cId="2520208814" sldId="269"/>
+            <ac:picMk id="184" creationId="{87B21D8F-B278-E462-385C-7DE24E6E1875}"/>
+          </ac:picMkLst>
+        </pc:picChg>
+        <pc:picChg chg="add mod">
+          <ac:chgData name="耀泉 马" userId="19e30af8d5659de2" providerId="LiveId" clId="{C3594856-CEDA-5129-B2AF-7962E3CA4CA3}" dt="2026-06-08T11:19:32.858" v="1915" actId="1037"/>
+          <ac:picMkLst>
+            <pc:docMk/>
+            <pc:sldMk cId="2520208814" sldId="269"/>
+            <ac:picMk id="193" creationId="{99DD3463-D326-EDC4-6B2D-66ED68428137}"/>
+          </ac:picMkLst>
+        </pc:picChg>
+        <pc:picChg chg="add mod">
+          <ac:chgData name="耀泉 马" userId="19e30af8d5659de2" providerId="LiveId" clId="{C3594856-CEDA-5129-B2AF-7962E3CA4CA3}" dt="2026-06-08T11:56:14.558" v="2464" actId="1038"/>
+          <ac:picMkLst>
+            <pc:docMk/>
+            <pc:sldMk cId="2520208814" sldId="269"/>
+            <ac:picMk id="201" creationId="{62C01BB3-5A0C-8440-3C05-FF765BBA333D}"/>
+          </ac:picMkLst>
+        </pc:picChg>
+        <pc:cxnChg chg="del mod">
+          <ac:chgData name="耀泉 马" userId="19e30af8d5659de2" providerId="LiveId" clId="{C3594856-CEDA-5129-B2AF-7962E3CA4CA3}" dt="2026-06-07T01:14:41.063" v="332" actId="478"/>
+          <ac:cxnSpMkLst>
+            <pc:docMk/>
+            <pc:sldMk cId="2520208814" sldId="269"/>
+            <ac:cxnSpMk id="13" creationId="{7ACD903B-21BA-97EE-EABF-B3168785FB7C}"/>
+          </ac:cxnSpMkLst>
+        </pc:cxnChg>
+        <pc:cxnChg chg="mod">
+          <ac:chgData name="耀泉 马" userId="19e30af8d5659de2" providerId="LiveId" clId="{C3594856-CEDA-5129-B2AF-7962E3CA4CA3}" dt="2026-06-07T01:26:46.652" v="453" actId="478"/>
+          <ac:cxnSpMkLst>
+            <pc:docMk/>
+            <pc:sldMk cId="2520208814" sldId="269"/>
+            <ac:cxnSpMk id="15" creationId="{FD22FA78-DA31-217E-037A-E068CC9AAF8C}"/>
+          </ac:cxnSpMkLst>
+        </pc:cxnChg>
+        <pc:cxnChg chg="del mod">
+          <ac:chgData name="耀泉 马" userId="19e30af8d5659de2" providerId="LiveId" clId="{C3594856-CEDA-5129-B2AF-7962E3CA4CA3}" dt="2026-06-07T01:13:54.866" v="321" actId="478"/>
+          <ac:cxnSpMkLst>
+            <pc:docMk/>
+            <pc:sldMk cId="2520208814" sldId="269"/>
+            <ac:cxnSpMk id="29" creationId="{B3FCE33F-86E1-E1EA-A2C9-F0658312029C}"/>
+          </ac:cxnSpMkLst>
+        </pc:cxnChg>
+        <pc:cxnChg chg="del">
+          <ac:chgData name="耀泉 马" userId="19e30af8d5659de2" providerId="LiveId" clId="{C3594856-CEDA-5129-B2AF-7962E3CA4CA3}" dt="2026-06-07T01:15:45.441" v="380" actId="478"/>
+          <ac:cxnSpMkLst>
+            <pc:docMk/>
+            <pc:sldMk cId="2520208814" sldId="269"/>
+            <ac:cxnSpMk id="33" creationId="{F8BCBE92-A8F9-DFCB-2FFB-F0D6DDE6FD81}"/>
+          </ac:cxnSpMkLst>
+        </pc:cxnChg>
+        <pc:cxnChg chg="del">
+          <ac:chgData name="耀泉 马" userId="19e30af8d5659de2" providerId="LiveId" clId="{C3594856-CEDA-5129-B2AF-7962E3CA4CA3}" dt="2026-06-07T01:15:40.401" v="378" actId="478"/>
+          <ac:cxnSpMkLst>
+            <pc:docMk/>
+            <pc:sldMk cId="2520208814" sldId="269"/>
+            <ac:cxnSpMk id="34" creationId="{7639873A-CF4C-BCE4-2FE9-1FE277E5B342}"/>
+          </ac:cxnSpMkLst>
+        </pc:cxnChg>
+        <pc:cxnChg chg="mod">
+          <ac:chgData name="耀泉 马" userId="19e30af8d5659de2" providerId="LiveId" clId="{C3594856-CEDA-5129-B2AF-7962E3CA4CA3}" dt="2026-06-07T01:26:46.652" v="453" actId="478"/>
+          <ac:cxnSpMkLst>
+            <pc:docMk/>
+            <pc:sldMk cId="2520208814" sldId="269"/>
+            <ac:cxnSpMk id="42" creationId="{B4CF4947-0752-02AD-3A06-377C33767180}"/>
+          </ac:cxnSpMkLst>
+        </pc:cxnChg>
+        <pc:cxnChg chg="del mod">
+          <ac:chgData name="耀泉 马" userId="19e30af8d5659de2" providerId="LiveId" clId="{C3594856-CEDA-5129-B2AF-7962E3CA4CA3}" dt="2026-06-07T01:14:54.230" v="335" actId="478"/>
+          <ac:cxnSpMkLst>
+            <pc:docMk/>
+            <pc:sldMk cId="2520208814" sldId="269"/>
+            <ac:cxnSpMk id="61" creationId="{CC4706D3-E092-9C02-6BCD-3AB6ABEE6E84}"/>
+          </ac:cxnSpMkLst>
+        </pc:cxnChg>
+        <pc:cxnChg chg="del mod">
+          <ac:chgData name="耀泉 马" userId="19e30af8d5659de2" providerId="LiveId" clId="{C3594856-CEDA-5129-B2AF-7962E3CA4CA3}" dt="2026-06-07T01:19:43.538" v="444" actId="478"/>
+          <ac:cxnSpMkLst>
+            <pc:docMk/>
+            <pc:sldMk cId="2520208814" sldId="269"/>
+            <ac:cxnSpMk id="64" creationId="{382702C2-2CDB-4771-1336-0E8713A33CD5}"/>
+          </ac:cxnSpMkLst>
+        </pc:cxnChg>
+        <pc:cxnChg chg="del mod">
+          <ac:chgData name="耀泉 马" userId="19e30af8d5659de2" providerId="LiveId" clId="{C3594856-CEDA-5129-B2AF-7962E3CA4CA3}" dt="2026-06-07T01:19:35.946" v="440" actId="478"/>
+          <ac:cxnSpMkLst>
+            <pc:docMk/>
+            <pc:sldMk cId="2520208814" sldId="269"/>
+            <ac:cxnSpMk id="74" creationId="{E8FBFE81-70F8-175E-3BC0-A7B1233BFC1E}"/>
+          </ac:cxnSpMkLst>
+        </pc:cxnChg>
+        <pc:cxnChg chg="del mod">
+          <ac:chgData name="耀泉 马" userId="19e30af8d5659de2" providerId="LiveId" clId="{C3594856-CEDA-5129-B2AF-7962E3CA4CA3}" dt="2026-06-07T01:19:41.492" v="443" actId="478"/>
+          <ac:cxnSpMkLst>
+            <pc:docMk/>
+            <pc:sldMk cId="2520208814" sldId="269"/>
+            <ac:cxnSpMk id="75" creationId="{3819459E-D986-0A2F-414C-1889C0CF94AF}"/>
+          </ac:cxnSpMkLst>
+        </pc:cxnChg>
+        <pc:cxnChg chg="del mod">
+          <ac:chgData name="耀泉 马" userId="19e30af8d5659de2" providerId="LiveId" clId="{C3594856-CEDA-5129-B2AF-7962E3CA4CA3}" dt="2026-06-07T01:19:39.272" v="442" actId="478"/>
+          <ac:cxnSpMkLst>
+            <pc:docMk/>
+            <pc:sldMk cId="2520208814" sldId="269"/>
+            <ac:cxnSpMk id="76" creationId="{A220E286-8A25-2AB8-9DE3-903BC8089ABA}"/>
+          </ac:cxnSpMkLst>
+        </pc:cxnChg>
+        <pc:cxnChg chg="del mod">
+          <ac:chgData name="耀泉 马" userId="19e30af8d5659de2" providerId="LiveId" clId="{C3594856-CEDA-5129-B2AF-7962E3CA4CA3}" dt="2026-06-07T01:19:12.748" v="430" actId="478"/>
+          <ac:cxnSpMkLst>
+            <pc:docMk/>
+            <pc:sldMk cId="2520208814" sldId="269"/>
+            <ac:cxnSpMk id="77" creationId="{A277A3ED-7A00-B57F-B04B-2345BA13DCC9}"/>
+          </ac:cxnSpMkLst>
+        </pc:cxnChg>
+        <pc:cxnChg chg="del mod">
+          <ac:chgData name="耀泉 马" userId="19e30af8d5659de2" providerId="LiveId" clId="{C3594856-CEDA-5129-B2AF-7962E3CA4CA3}" dt="2026-06-07T01:19:37.471" v="441" actId="478"/>
+          <ac:cxnSpMkLst>
+            <pc:docMk/>
+            <pc:sldMk cId="2520208814" sldId="269"/>
+            <ac:cxnSpMk id="78" creationId="{07D400AA-85C9-7012-4267-4993D3712CF4}"/>
+          </ac:cxnSpMkLst>
+        </pc:cxnChg>
+        <pc:cxnChg chg="del mod">
+          <ac:chgData name="耀泉 马" userId="19e30af8d5659de2" providerId="LiveId" clId="{C3594856-CEDA-5129-B2AF-7962E3CA4CA3}" dt="2026-06-07T01:19:10.800" v="429" actId="478"/>
+          <ac:cxnSpMkLst>
+            <pc:docMk/>
+            <pc:sldMk cId="2520208814" sldId="269"/>
+            <ac:cxnSpMk id="79" creationId="{77DC90FE-44B9-76A9-201C-24D8366D7301}"/>
+          </ac:cxnSpMkLst>
+        </pc:cxnChg>
+        <pc:cxnChg chg="del mod">
+          <ac:chgData name="耀泉 马" userId="19e30af8d5659de2" providerId="LiveId" clId="{C3594856-CEDA-5129-B2AF-7962E3CA4CA3}" dt="2026-06-07T01:19:09.252" v="428" actId="478"/>
+          <ac:cxnSpMkLst>
+            <pc:docMk/>
+            <pc:sldMk cId="2520208814" sldId="269"/>
+            <ac:cxnSpMk id="80" creationId="{E75BE376-4EF2-B1B3-711F-D7C83D81B0CB}"/>
+          </ac:cxnSpMkLst>
+        </pc:cxnChg>
+        <pc:cxnChg chg="del mod">
+          <ac:chgData name="耀泉 马" userId="19e30af8d5659de2" providerId="LiveId" clId="{C3594856-CEDA-5129-B2AF-7962E3CA4CA3}" dt="2026-06-07T01:19:45.364" v="445" actId="478"/>
+          <ac:cxnSpMkLst>
+            <pc:docMk/>
+            <pc:sldMk cId="2520208814" sldId="269"/>
+            <ac:cxnSpMk id="81" creationId="{4A3FCCBA-AE50-A4B6-064A-7315804673A4}"/>
+          </ac:cxnSpMkLst>
+        </pc:cxnChg>
+        <pc:cxnChg chg="del mod">
+          <ac:chgData name="耀泉 马" userId="19e30af8d5659de2" providerId="LiveId" clId="{C3594856-CEDA-5129-B2AF-7962E3CA4CA3}" dt="2026-06-07T01:19:47.588" v="446" actId="478"/>
+          <ac:cxnSpMkLst>
+            <pc:docMk/>
+            <pc:sldMk cId="2520208814" sldId="269"/>
+            <ac:cxnSpMk id="82" creationId="{C28CC107-5984-5507-81FD-AB73C2766424}"/>
+          </ac:cxnSpMkLst>
+        </pc:cxnChg>
+        <pc:cxnChg chg="del mod">
+          <ac:chgData name="耀泉 马" userId="19e30af8d5659de2" providerId="LiveId" clId="{C3594856-CEDA-5129-B2AF-7962E3CA4CA3}" dt="2026-06-07T01:18:00.488" v="413" actId="478"/>
+          <ac:cxnSpMkLst>
+            <pc:docMk/>
+            <pc:sldMk cId="2520208814" sldId="269"/>
+            <ac:cxnSpMk id="83" creationId="{DEA19FDE-467F-A2BE-AF7B-83F11E8ACB8B}"/>
+          </ac:cxnSpMkLst>
+        </pc:cxnChg>
+        <pc:cxnChg chg="del mod">
+          <ac:chgData name="耀泉 马" userId="19e30af8d5659de2" providerId="LiveId" clId="{C3594856-CEDA-5129-B2AF-7962E3CA4CA3}" dt="2026-06-07T01:18:09.450" v="414" actId="478"/>
+          <ac:cxnSpMkLst>
+            <pc:docMk/>
+            <pc:sldMk cId="2520208814" sldId="269"/>
+            <ac:cxnSpMk id="84" creationId="{9527FC46-D92A-1AAD-34F3-3260EA580A0D}"/>
+          </ac:cxnSpMkLst>
+        </pc:cxnChg>
+        <pc:cxnChg chg="del mod">
+          <ac:chgData name="耀泉 马" userId="19e30af8d5659de2" providerId="LiveId" clId="{C3594856-CEDA-5129-B2AF-7962E3CA4CA3}" dt="2026-06-07T01:19:33.572" v="439" actId="478"/>
+          <ac:cxnSpMkLst>
+            <pc:docMk/>
+            <pc:sldMk cId="2520208814" sldId="269"/>
+            <ac:cxnSpMk id="85" creationId="{3DA36749-5F28-4AF7-7DB6-77DEDEE3F9B3}"/>
+          </ac:cxnSpMkLst>
+        </pc:cxnChg>
+        <pc:cxnChg chg="del mod">
+          <ac:chgData name="耀泉 马" userId="19e30af8d5659de2" providerId="LiveId" clId="{C3594856-CEDA-5129-B2AF-7962E3CA4CA3}" dt="2026-06-07T01:19:19.830" v="434" actId="478"/>
+          <ac:cxnSpMkLst>
+            <pc:docMk/>
+            <pc:sldMk cId="2520208814" sldId="269"/>
+            <ac:cxnSpMk id="86" creationId="{9B830142-BE6D-5503-DD93-CB80AAD761C2}"/>
+          </ac:cxnSpMkLst>
+        </pc:cxnChg>
+        <pc:cxnChg chg="del mod">
+          <ac:chgData name="耀泉 马" userId="19e30af8d5659de2" providerId="LiveId" clId="{C3594856-CEDA-5129-B2AF-7962E3CA4CA3}" dt="2026-06-07T01:19:28.199" v="437" actId="478"/>
+          <ac:cxnSpMkLst>
+            <pc:docMk/>
+            <pc:sldMk cId="2520208814" sldId="269"/>
+            <ac:cxnSpMk id="87" creationId="{60FE3F6B-089F-8123-AA8F-796BA2217EE8}"/>
+          </ac:cxnSpMkLst>
+        </pc:cxnChg>
+        <pc:cxnChg chg="del mod">
+          <ac:chgData name="耀泉 马" userId="19e30af8d5659de2" providerId="LiveId" clId="{C3594856-CEDA-5129-B2AF-7962E3CA4CA3}" dt="2026-06-07T01:19:25.834" v="436" actId="478"/>
+          <ac:cxnSpMkLst>
+            <pc:docMk/>
+            <pc:sldMk cId="2520208814" sldId="269"/>
+            <ac:cxnSpMk id="88" creationId="{6BC2FA4D-97FE-C343-E917-90E0782B4B65}"/>
+          </ac:cxnSpMkLst>
+        </pc:cxnChg>
+        <pc:cxnChg chg="del mod">
+          <ac:chgData name="耀泉 马" userId="19e30af8d5659de2" providerId="LiveId" clId="{C3594856-CEDA-5129-B2AF-7962E3CA4CA3}" dt="2026-06-07T01:19:51.219" v="448" actId="478"/>
+          <ac:cxnSpMkLst>
+            <pc:docMk/>
+            <pc:sldMk cId="2520208814" sldId="269"/>
+            <ac:cxnSpMk id="89" creationId="{37CF053A-30AC-1660-2A80-F65B9E7FB0F3}"/>
+          </ac:cxnSpMkLst>
+        </pc:cxnChg>
+        <pc:cxnChg chg="del mod">
+          <ac:chgData name="耀泉 马" userId="19e30af8d5659de2" providerId="LiveId" clId="{C3594856-CEDA-5129-B2AF-7962E3CA4CA3}" dt="2026-06-07T01:19:18.218" v="433" actId="478"/>
+          <ac:cxnSpMkLst>
+            <pc:docMk/>
+            <pc:sldMk cId="2520208814" sldId="269"/>
+            <ac:cxnSpMk id="90" creationId="{F819A026-0D79-C479-077B-59696BF30B75}"/>
+          </ac:cxnSpMkLst>
+        </pc:cxnChg>
+        <pc:cxnChg chg="add mod">
+          <ac:chgData name="耀泉 马" userId="19e30af8d5659de2" providerId="LiveId" clId="{C3594856-CEDA-5129-B2AF-7962E3CA4CA3}" dt="2026-06-07T02:04:43.577" v="1061" actId="1076"/>
+          <ac:cxnSpMkLst>
+            <pc:docMk/>
+            <pc:sldMk cId="2520208814" sldId="269"/>
+            <ac:cxnSpMk id="120" creationId="{D0C5BE6A-7E89-A6DF-0FD0-09B95779C23C}"/>
+          </ac:cxnSpMkLst>
+        </pc:cxnChg>
+        <pc:cxnChg chg="add del mod">
+          <ac:chgData name="耀泉 马" userId="19e30af8d5659de2" providerId="LiveId" clId="{C3594856-CEDA-5129-B2AF-7962E3CA4CA3}" dt="2026-06-07T02:05:01.563" v="1063" actId="11529"/>
+          <ac:cxnSpMkLst>
+            <pc:docMk/>
+            <pc:sldMk cId="2520208814" sldId="269"/>
+            <ac:cxnSpMk id="125" creationId="{A667DA85-BDEC-ECB5-8511-9BB59C362BE5}"/>
+          </ac:cxnSpMkLst>
+        </pc:cxnChg>
+        <pc:cxnChg chg="add mod">
+          <ac:chgData name="耀泉 马" userId="19e30af8d5659de2" providerId="LiveId" clId="{C3594856-CEDA-5129-B2AF-7962E3CA4CA3}" dt="2026-06-07T02:47:57.255" v="1869" actId="14100"/>
+          <ac:cxnSpMkLst>
+            <pc:docMk/>
+            <pc:sldMk cId="2520208814" sldId="269"/>
+            <ac:cxnSpMk id="127" creationId="{0573E0EC-E657-6C44-D713-95C27F9BA53D}"/>
+          </ac:cxnSpMkLst>
+        </pc:cxnChg>
+        <pc:cxnChg chg="add mod">
+          <ac:chgData name="耀泉 马" userId="19e30af8d5659de2" providerId="LiveId" clId="{C3594856-CEDA-5129-B2AF-7962E3CA4CA3}" dt="2026-06-07T02:45:30.965" v="1804" actId="1037"/>
+          <ac:cxnSpMkLst>
+            <pc:docMk/>
+            <pc:sldMk cId="2520208814" sldId="269"/>
+            <ac:cxnSpMk id="162" creationId="{D93B7D9E-76CF-5319-CE81-FFD6AF7E5FD1}"/>
+          </ac:cxnSpMkLst>
+        </pc:cxnChg>
+        <pc:cxnChg chg="add mod">
+          <ac:chgData name="耀泉 马" userId="19e30af8d5659de2" providerId="LiveId" clId="{C3594856-CEDA-5129-B2AF-7962E3CA4CA3}" dt="2026-06-07T02:34:03.936" v="1665" actId="1076"/>
+          <ac:cxnSpMkLst>
+            <pc:docMk/>
+            <pc:sldMk cId="2520208814" sldId="269"/>
+            <ac:cxnSpMk id="166" creationId="{ED6B62CE-4155-9CC1-0C5B-3795A4A8B34E}"/>
+          </ac:cxnSpMkLst>
+        </pc:cxnChg>
+        <pc:cxnChg chg="add mod">
+          <ac:chgData name="耀泉 马" userId="19e30af8d5659de2" providerId="LiveId" clId="{C3594856-CEDA-5129-B2AF-7962E3CA4CA3}" dt="2026-06-07T02:34:26.020" v="1670" actId="14100"/>
+          <ac:cxnSpMkLst>
+            <pc:docMk/>
+            <pc:sldMk cId="2520208814" sldId="269"/>
+            <ac:cxnSpMk id="177" creationId="{A86CC193-B28C-E2EA-FDE9-7A26A33C729F}"/>
+          </ac:cxnSpMkLst>
+        </pc:cxnChg>
+        <pc:cxnChg chg="add mod">
+          <ac:chgData name="耀泉 马" userId="19e30af8d5659de2" providerId="LiveId" clId="{C3594856-CEDA-5129-B2AF-7962E3CA4CA3}" dt="2026-06-07T02:34:57.888" v="1678" actId="14100"/>
+          <ac:cxnSpMkLst>
+            <pc:docMk/>
+            <pc:sldMk cId="2520208814" sldId="269"/>
+            <ac:cxnSpMk id="179" creationId="{05619EB8-5FC9-BC3E-C27F-1BEBC37C0D34}"/>
+          </ac:cxnSpMkLst>
+        </pc:cxnChg>
+      </pc:sldChg>
+      <pc:sldChg chg="modSp new mod">
+        <pc:chgData name="耀泉 马" userId="19e30af8d5659de2" providerId="LiveId" clId="{C3594856-CEDA-5129-B2AF-7962E3CA4CA3}" dt="2026-06-08T11:53:58.077" v="2455" actId="20578"/>
+        <pc:sldMkLst>
+          <pc:docMk/>
+          <pc:sldMk cId="582110372" sldId="270"/>
+        </pc:sldMkLst>
+        <pc:spChg chg="mod">
+          <ac:chgData name="耀泉 马" userId="19e30af8d5659de2" providerId="LiveId" clId="{C3594856-CEDA-5129-B2AF-7962E3CA4CA3}" dt="2026-06-08T11:39:06.777" v="1942" actId="20577"/>
+          <ac:spMkLst>
+            <pc:docMk/>
+            <pc:sldMk cId="582110372" sldId="270"/>
+            <ac:spMk id="2" creationId="{F9AB6D9C-F7FF-AE3E-645D-471C1C9E7E98}"/>
+          </ac:spMkLst>
+        </pc:spChg>
+        <pc:spChg chg="mod">
+          <ac:chgData name="耀泉 马" userId="19e30af8d5659de2" providerId="LiveId" clId="{C3594856-CEDA-5129-B2AF-7962E3CA4CA3}" dt="2026-06-08T11:53:58.077" v="2455" actId="20578"/>
+          <ac:spMkLst>
+            <pc:docMk/>
+            <pc:sldMk cId="582110372" sldId="270"/>
+            <ac:spMk id="3" creationId="{A49C73BD-704C-815A-3932-EA5429BDE1A4}"/>
           </ac:spMkLst>
         </pc:spChg>
       </pc:sldChg>
@@ -265,7 +1531,7 @@
           <a:p>
             <a:fld id="{8BCF708F-C5DA-2442-B459-317C43B6759F}" type="datetimeFigureOut">
               <a:rPr lang="en-US" smtClean="0"/>
-              <a:t>5/22/26</a:t>
+              <a:t>6/7/26</a:t>
             </a:fld>
             <a:endParaRPr lang="en-US"/>
           </a:p>
@@ -662,406 +1928,18 @@
           <a:lstStyle/>
           <a:p>
             <a:r>
-              <a:rPr lang="en-GB" dirty="0"/>
-              <a:t>Embedded Systems Authentication and Encryption Using Strong PUF </a:t>
-            </a:r>
-            <a:r>
-              <a:rPr lang="en-GB" dirty="0" err="1"/>
-              <a:t>Modeling</a:t>
-            </a:r>
-            <a:r>
-              <a:rPr lang="en-GB" dirty="0"/>
-              <a:t> </a:t>
+              <a:rPr lang="en-US" altLang="zh-CN" dirty="0"/>
+              <a:t>BERT</a:t>
+            </a:r>
+            <a:r>
+              <a:rPr lang="zh-CN" altLang="en-US" dirty="0"/>
+              <a:t> </a:t>
+            </a:r>
+            <a:r>
+              <a:rPr lang="en-US" altLang="zh-CN"/>
+              <a:t>score</a:t>
             </a:r>
             <a:endParaRPr lang="en-US" dirty="0"/>
-          </a:p>
-          <a:p>
-            <a:r>
-              <a:rPr lang="en-US" dirty="0"/>
-              <a:t>https://</a:t>
-            </a:r>
-            <a:r>
-              <a:rPr lang="en-US" dirty="0" err="1"/>
-              <a:t>ieeexplore.ieee.org</a:t>
-            </a:r>
-            <a:r>
-              <a:rPr lang="en-US" dirty="0"/>
-              <a:t>/abstract/document/9043104?casa_token=TzGmEqi4czcAAAAA:FP9-Idn1xMF5z_j2kDuLO-pOOLk1aUnqQG75sw8GjfFpAKonMz5raTOEofeSaK4YYtV8hXbb</a:t>
-            </a:r>
-          </a:p>
-          <a:p>
-            <a:endParaRPr lang="en-US" dirty="0"/>
-          </a:p>
-          <a:p>
-            <a:r>
-              <a:rPr lang="en-US" dirty="0"/>
-              <a:t>server-side authentication</a:t>
-            </a:r>
-          </a:p>
-          <a:p>
-            <a:r>
-              <a:rPr lang="en-US" dirty="0"/>
-              <a:t>client-side authentication</a:t>
-            </a:r>
-            <a:r>
-              <a:rPr lang="zh-CN" altLang="en-US" dirty="0"/>
-              <a:t> </a:t>
-            </a:r>
-            <a:r>
-              <a:rPr lang="en-US" altLang="zh-CN" dirty="0"/>
-              <a:t>–</a:t>
-            </a:r>
-            <a:r>
-              <a:rPr lang="zh-CN" altLang="en-US" dirty="0"/>
-              <a:t> </a:t>
-            </a:r>
-            <a:r>
-              <a:rPr lang="en-US" altLang="zh-CN" dirty="0"/>
-              <a:t>lack</a:t>
-            </a:r>
-            <a:r>
-              <a:rPr lang="zh-CN" altLang="en-US" dirty="0"/>
-              <a:t> </a:t>
-            </a:r>
-            <a:r>
-              <a:rPr lang="en-US" altLang="zh-CN" dirty="0"/>
-              <a:t>of</a:t>
-            </a:r>
-            <a:r>
-              <a:rPr lang="zh-CN" altLang="en-US" dirty="0"/>
-              <a:t> </a:t>
-            </a:r>
-            <a:r>
-              <a:rPr lang="en-US" altLang="zh-CN" dirty="0"/>
-              <a:t>computational</a:t>
-            </a:r>
-            <a:r>
-              <a:rPr lang="zh-CN" altLang="en-US" dirty="0"/>
-              <a:t> </a:t>
-            </a:r>
-            <a:r>
-              <a:rPr lang="en-US" altLang="zh-CN" dirty="0"/>
-              <a:t>resources.</a:t>
-            </a:r>
-            <a:endParaRPr lang="en-US" dirty="0"/>
-          </a:p>
-          <a:p>
-            <a:endParaRPr lang="en-GB" sz="1200" b="0" i="0" kern="1200" dirty="0">
-              <a:solidFill>
-                <a:schemeClr val="tx1"/>
-              </a:solidFill>
-              <a:effectLst/>
-              <a:latin typeface="+mn-lt"/>
-              <a:ea typeface="+mn-ea"/>
-              <a:cs typeface="+mn-cs"/>
-            </a:endParaRPr>
-          </a:p>
-          <a:p>
-            <a:endParaRPr lang="en-GB" sz="1200" b="0" i="0" kern="1200" dirty="0">
-              <a:solidFill>
-                <a:schemeClr val="tx1"/>
-              </a:solidFill>
-              <a:effectLst/>
-              <a:latin typeface="+mn-lt"/>
-              <a:ea typeface="+mn-ea"/>
-              <a:cs typeface="+mn-cs"/>
-            </a:endParaRPr>
-          </a:p>
-          <a:p>
-            <a:r>
-              <a:rPr lang="en-GB" sz="1200" b="0" i="0" kern="1200" dirty="0">
-                <a:solidFill>
-                  <a:schemeClr val="tx1"/>
-                </a:solidFill>
-                <a:effectLst/>
-                <a:latin typeface="+mn-lt"/>
-                <a:ea typeface="+mn-ea"/>
-                <a:cs typeface="+mn-cs"/>
-              </a:rPr>
-              <a:t>ChaCha20-Poly1305 authenticated encryption for high-speed embedded IoT applications</a:t>
-            </a:r>
-          </a:p>
-          <a:p>
-            <a:r>
-              <a:rPr lang="en-GB" sz="1200" b="0" i="0" kern="1200" dirty="0">
-                <a:solidFill>
-                  <a:schemeClr val="tx1"/>
-                </a:solidFill>
-                <a:effectLst/>
-                <a:latin typeface="+mn-lt"/>
-                <a:ea typeface="+mn-ea"/>
-                <a:cs typeface="+mn-cs"/>
-              </a:rPr>
-              <a:t>https://</a:t>
-            </a:r>
-            <a:r>
-              <a:rPr lang="en-GB" sz="1200" b="0" i="0" kern="1200" dirty="0" err="1">
-                <a:solidFill>
-                  <a:schemeClr val="tx1"/>
-                </a:solidFill>
-                <a:effectLst/>
-                <a:latin typeface="+mn-lt"/>
-                <a:ea typeface="+mn-ea"/>
-                <a:cs typeface="+mn-cs"/>
-              </a:rPr>
-              <a:t>ieeexplore.ieee.org</a:t>
-            </a:r>
-            <a:r>
-              <a:rPr lang="en-GB" sz="1200" b="0" i="0" kern="1200" dirty="0">
-                <a:solidFill>
-                  <a:schemeClr val="tx1"/>
-                </a:solidFill>
-                <a:effectLst/>
-                <a:latin typeface="+mn-lt"/>
-                <a:ea typeface="+mn-ea"/>
-                <a:cs typeface="+mn-cs"/>
-              </a:rPr>
-              <a:t>/document/7927078</a:t>
-            </a:r>
-          </a:p>
-          <a:p>
-            <a:br>
-              <a:rPr lang="en-GB" dirty="0"/>
-            </a:br>
-            <a:r>
-              <a:rPr lang="en-GB" sz="1200" b="1" i="0" kern="1200" dirty="0">
-                <a:solidFill>
-                  <a:schemeClr val="tx1"/>
-                </a:solidFill>
-                <a:effectLst/>
-                <a:latin typeface="+mn-lt"/>
-                <a:ea typeface="+mn-ea"/>
-                <a:cs typeface="+mn-cs"/>
-              </a:rPr>
-              <a:t>Authenticated Encryption Schemes: A Systematic Review</a:t>
-            </a:r>
-          </a:p>
-          <a:p>
-            <a:r>
-              <a:rPr lang="en-GB" sz="1200" b="0" i="0" kern="1200" dirty="0">
-                <a:solidFill>
-                  <a:schemeClr val="tx1"/>
-                </a:solidFill>
-                <a:effectLst/>
-                <a:latin typeface="+mn-lt"/>
-                <a:ea typeface="+mn-ea"/>
-                <a:cs typeface="+mn-cs"/>
-              </a:rPr>
-              <a:t>https://</a:t>
-            </a:r>
-            <a:r>
-              <a:rPr lang="en-GB" sz="1200" b="0" i="0" kern="1200" dirty="0" err="1">
-                <a:solidFill>
-                  <a:schemeClr val="tx1"/>
-                </a:solidFill>
-                <a:effectLst/>
-                <a:latin typeface="+mn-lt"/>
-                <a:ea typeface="+mn-ea"/>
-                <a:cs typeface="+mn-cs"/>
-              </a:rPr>
-              <a:t>ieeexplore.ieee.org</a:t>
-            </a:r>
-            <a:r>
-              <a:rPr lang="en-GB" sz="1200" b="0" i="0" kern="1200" dirty="0">
-                <a:solidFill>
-                  <a:schemeClr val="tx1"/>
-                </a:solidFill>
-                <a:effectLst/>
-                <a:latin typeface="+mn-lt"/>
-                <a:ea typeface="+mn-ea"/>
-                <a:cs typeface="+mn-cs"/>
-              </a:rPr>
-              <a:t>/abstract/document/9695453</a:t>
-            </a:r>
-          </a:p>
-          <a:p>
-            <a:endParaRPr lang="en-GB" sz="1200" b="0" i="0" kern="1200" dirty="0">
-              <a:solidFill>
-                <a:schemeClr val="tx1"/>
-              </a:solidFill>
-              <a:effectLst/>
-              <a:latin typeface="+mn-lt"/>
-              <a:ea typeface="+mn-ea"/>
-              <a:cs typeface="+mn-cs"/>
-            </a:endParaRPr>
-          </a:p>
-          <a:p>
-            <a:endParaRPr lang="en-GB" sz="1200" b="0" i="0" kern="1200" dirty="0">
-              <a:solidFill>
-                <a:schemeClr val="tx1"/>
-              </a:solidFill>
-              <a:effectLst/>
-              <a:latin typeface="+mn-lt"/>
-              <a:ea typeface="+mn-ea"/>
-              <a:cs typeface="+mn-cs"/>
-            </a:endParaRPr>
-          </a:p>
-          <a:p>
-            <a:pPr marL="0" marR="0" lvl="0" indent="0" algn="l" defTabSz="914400" rtl="0" eaLnBrk="1" fontAlgn="auto" latinLnBrk="0" hangingPunct="1">
-              <a:lnSpc>
-                <a:spcPct val="100000"/>
-              </a:lnSpc>
-              <a:spcBef>
-                <a:spcPts val="0"/>
-              </a:spcBef>
-              <a:spcAft>
-                <a:spcPts val="0"/>
-              </a:spcAft>
-              <a:buClrTx/>
-              <a:buSzTx/>
-              <a:buFontTx/>
-              <a:buNone/>
-              <a:tabLst/>
-              <a:defRPr/>
-            </a:pPr>
-            <a:r>
-              <a:rPr lang="en-GB" b="1" dirty="0"/>
-              <a:t>A Lightweight Image Encryption Algorithm Based on Secure Key Generation</a:t>
-            </a:r>
-            <a:r>
-              <a:rPr lang="en-GB" dirty="0"/>
-              <a:t> </a:t>
-            </a:r>
-            <a:r>
-              <a:rPr lang="zh-CN" altLang="en-US" dirty="0"/>
-              <a:t> </a:t>
-            </a:r>
-            <a:r>
-              <a:rPr lang="en-US" altLang="zh-CN" dirty="0"/>
-              <a:t>(based</a:t>
-            </a:r>
-            <a:r>
-              <a:rPr lang="zh-CN" altLang="en-US" dirty="0"/>
-              <a:t> </a:t>
-            </a:r>
-            <a:r>
-              <a:rPr lang="en-US" altLang="zh-CN" dirty="0"/>
-              <a:t>on</a:t>
-            </a:r>
-            <a:r>
-              <a:rPr lang="zh-CN" altLang="en-US" dirty="0"/>
-              <a:t> </a:t>
-            </a:r>
-            <a:r>
-              <a:rPr lang="en-US" altLang="zh-CN" dirty="0"/>
-              <a:t>AES)</a:t>
-            </a:r>
-            <a:endParaRPr lang="en-GB" dirty="0"/>
-          </a:p>
-          <a:p>
-            <a:r>
-              <a:rPr lang="en-GB" sz="1200" b="0" i="0" kern="1200" dirty="0">
-                <a:solidFill>
-                  <a:schemeClr val="tx1"/>
-                </a:solidFill>
-                <a:effectLst/>
-                <a:latin typeface="+mn-lt"/>
-                <a:ea typeface="+mn-ea"/>
-                <a:cs typeface="+mn-cs"/>
-              </a:rPr>
-              <a:t>https://</a:t>
-            </a:r>
-            <a:r>
-              <a:rPr lang="en-GB" sz="1200" b="0" i="0" kern="1200" dirty="0" err="1">
-                <a:solidFill>
-                  <a:schemeClr val="tx1"/>
-                </a:solidFill>
-                <a:effectLst/>
-                <a:latin typeface="+mn-lt"/>
-                <a:ea typeface="+mn-ea"/>
-                <a:cs typeface="+mn-cs"/>
-              </a:rPr>
-              <a:t>ieeexplore.ieee.org</a:t>
-            </a:r>
-            <a:r>
-              <a:rPr lang="en-GB" sz="1200" b="0" i="0" kern="1200" dirty="0">
-                <a:solidFill>
-                  <a:schemeClr val="tx1"/>
-                </a:solidFill>
-                <a:effectLst/>
-                <a:latin typeface="+mn-lt"/>
-                <a:ea typeface="+mn-ea"/>
-                <a:cs typeface="+mn-cs"/>
-              </a:rPr>
-              <a:t>/document/10596034</a:t>
-            </a:r>
-          </a:p>
-          <a:p>
-            <a:endParaRPr lang="en-GB" sz="1200" b="0" i="0" kern="1200" dirty="0">
-              <a:solidFill>
-                <a:schemeClr val="tx1"/>
-              </a:solidFill>
-              <a:effectLst/>
-              <a:latin typeface="+mn-lt"/>
-              <a:ea typeface="+mn-ea"/>
-              <a:cs typeface="+mn-cs"/>
-            </a:endParaRPr>
-          </a:p>
-          <a:p>
-            <a:r>
-              <a:rPr lang="en-GB" sz="1200" b="0" i="0" kern="1200" dirty="0">
-                <a:solidFill>
-                  <a:schemeClr val="tx1"/>
-                </a:solidFill>
-                <a:effectLst/>
-                <a:latin typeface="+mn-lt"/>
-                <a:ea typeface="+mn-ea"/>
-                <a:cs typeface="+mn-cs"/>
-              </a:rPr>
-              <a:t>1. Secure key generation</a:t>
-            </a:r>
-          </a:p>
-          <a:p>
-            <a:r>
-              <a:rPr lang="en-GB" sz="1200" b="0" i="0" kern="1200" dirty="0">
-                <a:solidFill>
-                  <a:schemeClr val="tx1"/>
-                </a:solidFill>
-                <a:effectLst/>
-                <a:latin typeface="+mn-lt"/>
-                <a:ea typeface="+mn-ea"/>
-                <a:cs typeface="+mn-cs"/>
-              </a:rPr>
-              <a:t>2. Dynamic S-box generation</a:t>
-            </a:r>
-          </a:p>
-          <a:p>
-            <a:r>
-              <a:rPr lang="en-GB" sz="1200" b="0" i="0" kern="1200" dirty="0">
-                <a:solidFill>
-                  <a:schemeClr val="tx1"/>
-                </a:solidFill>
-                <a:effectLst/>
-                <a:latin typeface="+mn-lt"/>
-                <a:ea typeface="+mn-ea"/>
-                <a:cs typeface="+mn-cs"/>
-              </a:rPr>
-              <a:t>3. Replace </a:t>
-            </a:r>
-            <a:r>
-              <a:rPr lang="en-GB" sz="1200" b="0" i="0" kern="1200" dirty="0" err="1">
-                <a:solidFill>
-                  <a:schemeClr val="tx1"/>
-                </a:solidFill>
-                <a:effectLst/>
-                <a:latin typeface="+mn-lt"/>
-                <a:ea typeface="+mn-ea"/>
-                <a:cs typeface="+mn-cs"/>
-              </a:rPr>
-              <a:t>MixColumns</a:t>
-            </a:r>
-            <a:r>
-              <a:rPr lang="en-GB" sz="1200" b="0" i="0" kern="1200" dirty="0">
-                <a:solidFill>
-                  <a:schemeClr val="tx1"/>
-                </a:solidFill>
-                <a:effectLst/>
-                <a:latin typeface="+mn-lt"/>
-                <a:ea typeface="+mn-ea"/>
-                <a:cs typeface="+mn-cs"/>
-              </a:rPr>
-              <a:t> with circular permutation</a:t>
-            </a:r>
           </a:p>
         </p:txBody>
       </p:sp>
@@ -1082,7 +1960,7 @@
           <a:p>
             <a:fld id="{C856F6D7-A759-5D41-8F8D-5EE238F097BC}" type="slidenum">
               <a:rPr lang="en-US" smtClean="0"/>
-              <a:t>7</a:t>
+              <a:t>3</a:t>
             </a:fld>
             <a:endParaRPr lang="en-US"/>
           </a:p>
@@ -1091,7 +1969,7 @@
     </p:spTree>
     <p:extLst>
       <p:ext uri="{BB962C8B-B14F-4D97-AF65-F5344CB8AC3E}">
-        <p14:creationId xmlns:p14="http://schemas.microsoft.com/office/powerpoint/2010/main" val="2835312467"/>
+        <p14:creationId xmlns:p14="http://schemas.microsoft.com/office/powerpoint/2010/main" val="3990994911"/>
       </p:ext>
     </p:extLst>
   </p:cSld>
@@ -1145,10 +2023,240 @@
           <a:bodyPr/>
           <a:lstStyle/>
           <a:p>
+            <a:r>
+              <a:rPr lang="en-GB" dirty="0"/>
+              <a:t>Embedded Systems Authentication and Encryption Using Strong PUF </a:t>
+            </a:r>
+            <a:r>
+              <a:rPr lang="en-GB" dirty="0" err="1"/>
+              <a:t>Modeling</a:t>
+            </a:r>
+            <a:r>
+              <a:rPr lang="en-GB" dirty="0"/>
+              <a:t> </a:t>
+            </a:r>
+            <a:endParaRPr lang="en-US" dirty="0"/>
+          </a:p>
+          <a:p>
+            <a:r>
+              <a:rPr lang="en-US" dirty="0"/>
+              <a:t>https://</a:t>
+            </a:r>
+            <a:r>
+              <a:rPr lang="en-US" dirty="0" err="1"/>
+              <a:t>ieeexplore.ieee.org</a:t>
+            </a:r>
+            <a:r>
+              <a:rPr lang="en-US" dirty="0"/>
+              <a:t>/abstract/document/9043104?casa_token=TzGmEqi4czcAAAAA:FP9-Idn1xMF5z_j2kDuLO-pOOLk1aUnqQG75sw8GjfFpAKonMz5raTOEofeSaK4YYtV8hXbb</a:t>
+            </a:r>
+          </a:p>
+          <a:p>
+            <a:endParaRPr lang="en-US" dirty="0"/>
+          </a:p>
+          <a:p>
+            <a:r>
+              <a:rPr lang="en-US" dirty="0"/>
+              <a:t>server-side authentication</a:t>
+            </a:r>
+          </a:p>
+          <a:p>
+            <a:r>
+              <a:rPr lang="en-US" dirty="0"/>
+              <a:t>client-side authentication</a:t>
+            </a:r>
+            <a:r>
+              <a:rPr lang="zh-CN" altLang="en-US" dirty="0"/>
+              <a:t> </a:t>
+            </a:r>
+            <a:r>
+              <a:rPr lang="en-US" altLang="zh-CN" dirty="0"/>
+              <a:t>–</a:t>
+            </a:r>
+            <a:r>
+              <a:rPr lang="zh-CN" altLang="en-US" dirty="0"/>
+              <a:t> </a:t>
+            </a:r>
+            <a:r>
+              <a:rPr lang="en-US" altLang="zh-CN" dirty="0"/>
+              <a:t>lack</a:t>
+            </a:r>
+            <a:r>
+              <a:rPr lang="zh-CN" altLang="en-US" dirty="0"/>
+              <a:t> </a:t>
+            </a:r>
+            <a:r>
+              <a:rPr lang="en-US" altLang="zh-CN" dirty="0"/>
+              <a:t>of</a:t>
+            </a:r>
+            <a:r>
+              <a:rPr lang="zh-CN" altLang="en-US" dirty="0"/>
+              <a:t> </a:t>
+            </a:r>
+            <a:r>
+              <a:rPr lang="en-US" altLang="zh-CN" dirty="0"/>
+              <a:t>computational</a:t>
+            </a:r>
+            <a:r>
+              <a:rPr lang="zh-CN" altLang="en-US" dirty="0"/>
+              <a:t> </a:t>
+            </a:r>
+            <a:r>
+              <a:rPr lang="en-US" altLang="zh-CN" dirty="0"/>
+              <a:t>resources.</a:t>
+            </a:r>
+            <a:endParaRPr lang="en-US" dirty="0"/>
+          </a:p>
+          <a:p>
+            <a:endParaRPr lang="en-GB" sz="1200" b="0" i="0" kern="1200" dirty="0">
+              <a:solidFill>
+                <a:schemeClr val="tx1"/>
+              </a:solidFill>
+              <a:effectLst/>
+              <a:latin typeface="+mn-lt"/>
+              <a:ea typeface="+mn-ea"/>
+              <a:cs typeface="+mn-cs"/>
+            </a:endParaRPr>
+          </a:p>
+          <a:p>
+            <a:endParaRPr lang="en-GB" sz="1200" b="0" i="0" kern="1200" dirty="0">
+              <a:solidFill>
+                <a:schemeClr val="tx1"/>
+              </a:solidFill>
+              <a:effectLst/>
+              <a:latin typeface="+mn-lt"/>
+              <a:ea typeface="+mn-ea"/>
+              <a:cs typeface="+mn-cs"/>
+            </a:endParaRPr>
+          </a:p>
+          <a:p>
+            <a:r>
+              <a:rPr lang="en-GB" sz="1200" b="0" i="0" kern="1200" dirty="0">
+                <a:solidFill>
+                  <a:schemeClr val="tx1"/>
+                </a:solidFill>
+                <a:effectLst/>
+                <a:latin typeface="+mn-lt"/>
+                <a:ea typeface="+mn-ea"/>
+                <a:cs typeface="+mn-cs"/>
+              </a:rPr>
+              <a:t>ChaCha20-Poly1305 authenticated encryption for high-speed embedded IoT applications</a:t>
+            </a:r>
+          </a:p>
+          <a:p>
+            <a:r>
+              <a:rPr lang="en-GB" sz="1200" b="0" i="0" kern="1200" dirty="0">
+                <a:solidFill>
+                  <a:schemeClr val="tx1"/>
+                </a:solidFill>
+                <a:effectLst/>
+                <a:latin typeface="+mn-lt"/>
+                <a:ea typeface="+mn-ea"/>
+                <a:cs typeface="+mn-cs"/>
+              </a:rPr>
+              <a:t>https://</a:t>
+            </a:r>
+            <a:r>
+              <a:rPr lang="en-GB" sz="1200" b="0" i="0" kern="1200" dirty="0" err="1">
+                <a:solidFill>
+                  <a:schemeClr val="tx1"/>
+                </a:solidFill>
+                <a:effectLst/>
+                <a:latin typeface="+mn-lt"/>
+                <a:ea typeface="+mn-ea"/>
+                <a:cs typeface="+mn-cs"/>
+              </a:rPr>
+              <a:t>ieeexplore.ieee.org</a:t>
+            </a:r>
+            <a:r>
+              <a:rPr lang="en-GB" sz="1200" b="0" i="0" kern="1200" dirty="0">
+                <a:solidFill>
+                  <a:schemeClr val="tx1"/>
+                </a:solidFill>
+                <a:effectLst/>
+                <a:latin typeface="+mn-lt"/>
+                <a:ea typeface="+mn-ea"/>
+                <a:cs typeface="+mn-cs"/>
+              </a:rPr>
+              <a:t>/document/7927078</a:t>
+            </a:r>
+          </a:p>
+          <a:p>
             <a:br>
               <a:rPr lang="en-GB" dirty="0"/>
             </a:br>
-            <a:endParaRPr lang="en-US" dirty="0"/>
+            <a:r>
+              <a:rPr lang="en-GB" sz="1200" b="1" i="0" kern="1200" dirty="0">
+                <a:solidFill>
+                  <a:schemeClr val="tx1"/>
+                </a:solidFill>
+                <a:effectLst/>
+                <a:latin typeface="+mn-lt"/>
+                <a:ea typeface="+mn-ea"/>
+                <a:cs typeface="+mn-cs"/>
+              </a:rPr>
+              <a:t>Authenticated Encryption Schemes: A Systematic Review</a:t>
+            </a:r>
+          </a:p>
+          <a:p>
+            <a:r>
+              <a:rPr lang="en-GB" sz="1200" b="0" i="0" kern="1200" dirty="0">
+                <a:solidFill>
+                  <a:schemeClr val="tx1"/>
+                </a:solidFill>
+                <a:effectLst/>
+                <a:latin typeface="+mn-lt"/>
+                <a:ea typeface="+mn-ea"/>
+                <a:cs typeface="+mn-cs"/>
+              </a:rPr>
+              <a:t>https://</a:t>
+            </a:r>
+            <a:r>
+              <a:rPr lang="en-GB" sz="1200" b="0" i="0" kern="1200" dirty="0" err="1">
+                <a:solidFill>
+                  <a:schemeClr val="tx1"/>
+                </a:solidFill>
+                <a:effectLst/>
+                <a:latin typeface="+mn-lt"/>
+                <a:ea typeface="+mn-ea"/>
+                <a:cs typeface="+mn-cs"/>
+              </a:rPr>
+              <a:t>ieeexplore.ieee.org</a:t>
+            </a:r>
+            <a:r>
+              <a:rPr lang="en-GB" sz="1200" b="0" i="0" kern="1200" dirty="0">
+                <a:solidFill>
+                  <a:schemeClr val="tx1"/>
+                </a:solidFill>
+                <a:effectLst/>
+                <a:latin typeface="+mn-lt"/>
+                <a:ea typeface="+mn-ea"/>
+                <a:cs typeface="+mn-cs"/>
+              </a:rPr>
+              <a:t>/abstract/document/9695453</a:t>
+            </a:r>
+          </a:p>
+          <a:p>
+            <a:endParaRPr lang="en-GB" sz="1200" b="0" i="0" kern="1200" dirty="0">
+              <a:solidFill>
+                <a:schemeClr val="tx1"/>
+              </a:solidFill>
+              <a:effectLst/>
+              <a:latin typeface="+mn-lt"/>
+              <a:ea typeface="+mn-ea"/>
+              <a:cs typeface="+mn-cs"/>
+            </a:endParaRPr>
+          </a:p>
+          <a:p>
+            <a:endParaRPr lang="en-GB" sz="1200" b="0" i="0" kern="1200" dirty="0">
+              <a:solidFill>
+                <a:schemeClr val="tx1"/>
+              </a:solidFill>
+              <a:effectLst/>
+              <a:latin typeface="+mn-lt"/>
+              <a:ea typeface="+mn-ea"/>
+              <a:cs typeface="+mn-cs"/>
+            </a:endParaRPr>
           </a:p>
           <a:p>
             <a:pPr marL="0" marR="0" lvl="0" indent="0" algn="l" defTabSz="914400" rtl="0" eaLnBrk="1" fontAlgn="auto" latinLnBrk="0" hangingPunct="1">
@@ -1169,6 +2277,41 @@
               <a:defRPr/>
             </a:pPr>
             <a:r>
+              <a:rPr lang="en-GB" b="1" dirty="0"/>
+              <a:t>A Lightweight Image Encryption Algorithm Based on Secure Key Generation</a:t>
+            </a:r>
+            <a:r>
+              <a:rPr lang="en-GB" dirty="0"/>
+              <a:t> </a:t>
+            </a:r>
+            <a:r>
+              <a:rPr lang="zh-CN" altLang="en-US" dirty="0"/>
+              <a:t> </a:t>
+            </a:r>
+            <a:r>
+              <a:rPr lang="en-US" altLang="zh-CN" dirty="0"/>
+              <a:t>(based</a:t>
+            </a:r>
+            <a:r>
+              <a:rPr lang="zh-CN" altLang="en-US" dirty="0"/>
+              <a:t> </a:t>
+            </a:r>
+            <a:r>
+              <a:rPr lang="en-US" altLang="zh-CN" dirty="0"/>
+              <a:t>on</a:t>
+            </a:r>
+            <a:r>
+              <a:rPr lang="zh-CN" altLang="en-US" dirty="0"/>
+              <a:t> </a:t>
+            </a:r>
+            <a:r>
+              <a:rPr lang="en-US" altLang="zh-CN" dirty="0"/>
+              <a:t>AES)</a:t>
+            </a:r>
+            <a:endParaRPr lang="en-GB" dirty="0"/>
+          </a:p>
+          <a:p>
+            <a:r>
               <a:rPr lang="en-GB" sz="1200" b="0" i="0" kern="1200" dirty="0">
                 <a:solidFill>
                   <a:schemeClr val="tx1"/>
@@ -1178,7 +2321,7 @@
                 <a:ea typeface="+mn-ea"/>
                 <a:cs typeface="+mn-cs"/>
               </a:rPr>
-              <a:t>Deep Learning Model Inversion Attacks and </a:t>
+              <a:t>https://</a:t>
             </a:r>
             <a:r>
               <a:rPr lang="en-GB" sz="1200" b="0" i="0" kern="1200" dirty="0" err="1">
@@ -1190,7 +2333,7 @@
                 <a:ea typeface="+mn-ea"/>
                 <a:cs typeface="+mn-cs"/>
               </a:rPr>
-              <a:t>Defenses</a:t>
+              <a:t>ieeexplore.ieee.org</a:t>
             </a:r>
             <a:r>
               <a:rPr lang="en-GB" sz="1200" b="0" i="0" kern="1200" dirty="0">
@@ -1202,64 +2345,23 @@
                 <a:ea typeface="+mn-ea"/>
                 <a:cs typeface="+mn-cs"/>
               </a:rPr>
-              <a:t>: A Comprehensive Survey</a:t>
-            </a:r>
-            <a:endParaRPr lang="en-US" dirty="0"/>
-          </a:p>
-          <a:p>
-            <a:r>
-              <a:rPr lang="en-US" dirty="0"/>
-              <a:t>https://</a:t>
-            </a:r>
-            <a:r>
-              <a:rPr lang="en-US" dirty="0" err="1"/>
-              <a:t>arxiv.org</a:t>
-            </a:r>
-            <a:r>
-              <a:rPr lang="en-US" dirty="0"/>
-              <a:t>/html/2501.18934v1</a:t>
-            </a:r>
-          </a:p>
-          <a:p>
-            <a:endParaRPr lang="en-US" dirty="0"/>
-          </a:p>
-          <a:p>
-            <a:r>
-              <a:rPr lang="en-GB" dirty="0"/>
-              <a:t>Exploring Model Inversion Attacks in the Black-box Setting</a:t>
-            </a:r>
-          </a:p>
-          <a:p>
-            <a:r>
-              <a:rPr lang="en-US" dirty="0"/>
-              <a:t>https://</a:t>
-            </a:r>
-            <a:r>
-              <a:rPr lang="en-US" dirty="0" err="1"/>
-              <a:t>petsymposium.org</a:t>
-            </a:r>
-            <a:r>
-              <a:rPr lang="en-US" dirty="0"/>
-              <a:t>/</a:t>
-            </a:r>
-            <a:r>
-              <a:rPr lang="en-US" dirty="0" err="1"/>
-              <a:t>popets</a:t>
-            </a:r>
-            <a:r>
-              <a:rPr lang="en-US" dirty="0"/>
-              <a:t>/2023/popets-2023-0012.pdf</a:t>
-            </a:r>
-          </a:p>
-          <a:p>
-            <a:endParaRPr lang="en-US" dirty="0"/>
-          </a:p>
-          <a:p>
-            <a:endParaRPr lang="en-US" dirty="0"/>
-          </a:p>
-          <a:p>
-            <a:r>
-              <a:rPr lang="en-GB" sz="1200" b="1" i="0" kern="1200" dirty="0">
+              <a:t>/document/10596034</a:t>
+            </a:r>
+          </a:p>
+          <a:p>
+            <a:endParaRPr lang="en-GB" sz="1200" b="0" i="0" kern="1200" dirty="0">
+              <a:solidFill>
+                <a:schemeClr val="tx1"/>
+              </a:solidFill>
+              <a:effectLst/>
+              <a:latin typeface="+mn-lt"/>
+              <a:ea typeface="+mn-ea"/>
+              <a:cs typeface="+mn-cs"/>
+            </a:endParaRPr>
+          </a:p>
+          <a:p>
+            <a:r>
+              <a:rPr lang="en-GB" sz="1200" b="0" i="0" kern="1200" dirty="0">
                 <a:solidFill>
                   <a:schemeClr val="tx1"/>
                 </a:solidFill>
@@ -1268,22 +2370,59 @@
                 <a:ea typeface="+mn-ea"/>
                 <a:cs typeface="+mn-cs"/>
               </a:rPr>
-              <a:t>Understanding deep image representations by inverting them</a:t>
-            </a:r>
-            <a:endParaRPr lang="en-US" dirty="0"/>
-          </a:p>
-          <a:p>
-            <a:r>
-              <a:rPr lang="en-US" dirty="0"/>
-              <a:t>https://</a:t>
-            </a:r>
-            <a:r>
-              <a:rPr lang="en-US" dirty="0" err="1"/>
-              <a:t>ieeexplore.ieee.org</a:t>
-            </a:r>
-            <a:r>
-              <a:rPr lang="en-US" dirty="0"/>
-              <a:t>/document/7299155</a:t>
+              <a:t>1. Secure key generation</a:t>
+            </a:r>
+          </a:p>
+          <a:p>
+            <a:r>
+              <a:rPr lang="en-GB" sz="1200" b="0" i="0" kern="1200" dirty="0">
+                <a:solidFill>
+                  <a:schemeClr val="tx1"/>
+                </a:solidFill>
+                <a:effectLst/>
+                <a:latin typeface="+mn-lt"/>
+                <a:ea typeface="+mn-ea"/>
+                <a:cs typeface="+mn-cs"/>
+              </a:rPr>
+              <a:t>2. Dynamic S-box generation</a:t>
+            </a:r>
+          </a:p>
+          <a:p>
+            <a:r>
+              <a:rPr lang="en-GB" sz="1200" b="0" i="0" kern="1200" dirty="0">
+                <a:solidFill>
+                  <a:schemeClr val="tx1"/>
+                </a:solidFill>
+                <a:effectLst/>
+                <a:latin typeface="+mn-lt"/>
+                <a:ea typeface="+mn-ea"/>
+                <a:cs typeface="+mn-cs"/>
+              </a:rPr>
+              <a:t>3. Replace </a:t>
+            </a:r>
+            <a:r>
+              <a:rPr lang="en-GB" sz="1200" b="0" i="0" kern="1200" dirty="0" err="1">
+                <a:solidFill>
+                  <a:schemeClr val="tx1"/>
+                </a:solidFill>
+                <a:effectLst/>
+                <a:latin typeface="+mn-lt"/>
+                <a:ea typeface="+mn-ea"/>
+                <a:cs typeface="+mn-cs"/>
+              </a:rPr>
+              <a:t>MixColumns</a:t>
+            </a:r>
+            <a:r>
+              <a:rPr lang="en-GB" sz="1200" b="0" i="0" kern="1200" dirty="0">
+                <a:solidFill>
+                  <a:schemeClr val="tx1"/>
+                </a:solidFill>
+                <a:effectLst/>
+                <a:latin typeface="+mn-lt"/>
+                <a:ea typeface="+mn-ea"/>
+                <a:cs typeface="+mn-cs"/>
+              </a:rPr>
+              <a:t> with circular permutation</a:t>
             </a:r>
           </a:p>
         </p:txBody>
@@ -1305,7 +2444,7 @@
           <a:p>
             <a:fld id="{C856F6D7-A759-5D41-8F8D-5EE238F097BC}" type="slidenum">
               <a:rPr lang="en-US" smtClean="0"/>
-              <a:t>8</a:t>
+              <a:t>9</a:t>
             </a:fld>
             <a:endParaRPr lang="en-US"/>
           </a:p>
@@ -1314,7 +2453,7 @@
     </p:spTree>
     <p:extLst>
       <p:ext uri="{BB962C8B-B14F-4D97-AF65-F5344CB8AC3E}">
-        <p14:creationId xmlns:p14="http://schemas.microsoft.com/office/powerpoint/2010/main" val="3894410965"/>
+        <p14:creationId xmlns:p14="http://schemas.microsoft.com/office/powerpoint/2010/main" val="2835312467"/>
       </p:ext>
     </p:extLst>
   </p:cSld>
@@ -1368,30 +2507,145 @@
           <a:bodyPr/>
           <a:lstStyle/>
           <a:p>
-            <a:r>
+            <a:br>
               <a:rPr lang="en-GB" dirty="0"/>
-              <a:t>A privacy preserving split learning framework with adaptive inference selection for IoT security</a:t>
-            </a:r>
-            <a:r>
-              <a:rPr lang="zh-CN" altLang="en-US" dirty="0"/>
-              <a:t> </a:t>
-            </a:r>
-            <a:endParaRPr lang="en-US" altLang="zh-CN" dirty="0"/>
-          </a:p>
-          <a:p>
+            </a:br>
             <a:endParaRPr lang="en-US" dirty="0"/>
           </a:p>
           <a:p>
-            <a:r>
-              <a:rPr lang="en-US"/>
-              <a:t>Key words:</a:t>
+            <a:pPr marL="0" marR="0" lvl="0" indent="0" algn="l" defTabSz="914400" rtl="0" eaLnBrk="1" fontAlgn="auto" latinLnBrk="0" hangingPunct="1">
+              <a:lnSpc>
+                <a:spcPct val="100000"/>
+              </a:lnSpc>
+              <a:spcBef>
+                <a:spcPts val="0"/>
+              </a:spcBef>
+              <a:spcAft>
+                <a:spcPts val="0"/>
+              </a:spcAft>
+              <a:buClrTx/>
+              <a:buSzTx/>
+              <a:buFontTx/>
+              <a:buNone/>
+              <a:tabLst/>
+              <a:defRPr/>
+            </a:pPr>
+            <a:r>
+              <a:rPr lang="en-GB" sz="1200" b="0" i="0" kern="1200" dirty="0">
+                <a:solidFill>
+                  <a:schemeClr val="tx1"/>
+                </a:solidFill>
+                <a:effectLst/>
+                <a:latin typeface="+mn-lt"/>
+                <a:ea typeface="+mn-ea"/>
+                <a:cs typeface="+mn-cs"/>
+              </a:rPr>
+              <a:t>Deep Learning Model Inversion Attacks and </a:t>
+            </a:r>
+            <a:r>
+              <a:rPr lang="en-GB" sz="1200" b="0" i="0" kern="1200" dirty="0" err="1">
+                <a:solidFill>
+                  <a:schemeClr val="tx1"/>
+                </a:solidFill>
+                <a:effectLst/>
+                <a:latin typeface="+mn-lt"/>
+                <a:ea typeface="+mn-ea"/>
+                <a:cs typeface="+mn-cs"/>
+              </a:rPr>
+              <a:t>Defenses</a:t>
+            </a:r>
+            <a:r>
+              <a:rPr lang="en-GB" sz="1200" b="0" i="0" kern="1200" dirty="0">
+                <a:solidFill>
+                  <a:schemeClr val="tx1"/>
+                </a:solidFill>
+                <a:effectLst/>
+                <a:latin typeface="+mn-lt"/>
+                <a:ea typeface="+mn-ea"/>
+                <a:cs typeface="+mn-cs"/>
+              </a:rPr>
+              <a:t>: A Comprehensive Survey</a:t>
             </a:r>
             <a:endParaRPr lang="en-US" dirty="0"/>
           </a:p>
           <a:p>
             <a:r>
               <a:rPr lang="en-US" dirty="0"/>
-              <a:t>Data privacy, cloud security</a:t>
+              <a:t>https://</a:t>
+            </a:r>
+            <a:r>
+              <a:rPr lang="en-US" dirty="0" err="1"/>
+              <a:t>arxiv.org</a:t>
+            </a:r>
+            <a:r>
+              <a:rPr lang="en-US" dirty="0"/>
+              <a:t>/html/2501.18934v1</a:t>
+            </a:r>
+          </a:p>
+          <a:p>
+            <a:endParaRPr lang="en-US" dirty="0"/>
+          </a:p>
+          <a:p>
+            <a:r>
+              <a:rPr lang="en-GB" dirty="0"/>
+              <a:t>Exploring Model Inversion Attacks in the Black-box Setting</a:t>
+            </a:r>
+          </a:p>
+          <a:p>
+            <a:r>
+              <a:rPr lang="en-US" dirty="0"/>
+              <a:t>https://</a:t>
+            </a:r>
+            <a:r>
+              <a:rPr lang="en-US" dirty="0" err="1"/>
+              <a:t>petsymposium.org</a:t>
+            </a:r>
+            <a:r>
+              <a:rPr lang="en-US" dirty="0"/>
+              <a:t>/</a:t>
+            </a:r>
+            <a:r>
+              <a:rPr lang="en-US" dirty="0" err="1"/>
+              <a:t>popets</a:t>
+            </a:r>
+            <a:r>
+              <a:rPr lang="en-US" dirty="0"/>
+              <a:t>/2023/popets-2023-0012.pdf</a:t>
+            </a:r>
+          </a:p>
+          <a:p>
+            <a:endParaRPr lang="en-US" dirty="0"/>
+          </a:p>
+          <a:p>
+            <a:endParaRPr lang="en-US" dirty="0"/>
+          </a:p>
+          <a:p>
+            <a:r>
+              <a:rPr lang="en-GB" sz="1200" b="1" i="0" kern="1200" dirty="0">
+                <a:solidFill>
+                  <a:schemeClr val="tx1"/>
+                </a:solidFill>
+                <a:effectLst/>
+                <a:latin typeface="+mn-lt"/>
+                <a:ea typeface="+mn-ea"/>
+                <a:cs typeface="+mn-cs"/>
+              </a:rPr>
+              <a:t>Understanding deep image representations by inverting them</a:t>
+            </a:r>
+            <a:endParaRPr lang="en-US" dirty="0"/>
+          </a:p>
+          <a:p>
+            <a:r>
+              <a:rPr lang="en-US" dirty="0"/>
+              <a:t>https://</a:t>
+            </a:r>
+            <a:r>
+              <a:rPr lang="en-US" dirty="0" err="1"/>
+              <a:t>ieeexplore.ieee.org</a:t>
+            </a:r>
+            <a:r>
+              <a:rPr lang="en-US" dirty="0"/>
+              <a:t>/document/7299155</a:t>
             </a:r>
           </a:p>
         </p:txBody>
@@ -1413,7 +2667,7 @@
           <a:p>
             <a:fld id="{C856F6D7-A759-5D41-8F8D-5EE238F097BC}" type="slidenum">
               <a:rPr lang="en-US" smtClean="0"/>
-              <a:t>9</a:t>
+              <a:t>10</a:t>
             </a:fld>
             <a:endParaRPr lang="en-US"/>
           </a:p>
@@ -1422,7 +2676,7 @@
     </p:spTree>
     <p:extLst>
       <p:ext uri="{BB962C8B-B14F-4D97-AF65-F5344CB8AC3E}">
-        <p14:creationId xmlns:p14="http://schemas.microsoft.com/office/powerpoint/2010/main" val="639853060"/>
+        <p14:creationId xmlns:p14="http://schemas.microsoft.com/office/powerpoint/2010/main" val="3894410965"/>
       </p:ext>
     </p:extLst>
   </p:cSld>
@@ -1476,7 +2730,31 @@
           <a:bodyPr/>
           <a:lstStyle/>
           <a:p>
+            <a:r>
+              <a:rPr lang="en-GB" dirty="0"/>
+              <a:t>A privacy preserving split learning framework with adaptive inference selection for IoT security</a:t>
+            </a:r>
+            <a:r>
+              <a:rPr lang="zh-CN" altLang="en-US" dirty="0"/>
+              <a:t> </a:t>
+            </a:r>
+            <a:endParaRPr lang="en-US" altLang="zh-CN" dirty="0"/>
+          </a:p>
+          <a:p>
             <a:endParaRPr lang="en-US" dirty="0"/>
+          </a:p>
+          <a:p>
+            <a:r>
+              <a:rPr lang="en-US"/>
+              <a:t>Key words:</a:t>
+            </a:r>
+            <a:endParaRPr lang="en-US" dirty="0"/>
+          </a:p>
+          <a:p>
+            <a:r>
+              <a:rPr lang="en-US" dirty="0"/>
+              <a:t>Data privacy, cloud security</a:t>
+            </a:r>
           </a:p>
         </p:txBody>
       </p:sp>
@@ -1497,7 +2775,91 @@
           <a:p>
             <a:fld id="{C856F6D7-A759-5D41-8F8D-5EE238F097BC}" type="slidenum">
               <a:rPr lang="en-US" smtClean="0"/>
-              <a:t>10</a:t>
+              <a:t>11</a:t>
+            </a:fld>
+            <a:endParaRPr lang="en-US"/>
+          </a:p>
+        </p:txBody>
+      </p:sp>
+    </p:spTree>
+    <p:extLst>
+      <p:ext uri="{BB962C8B-B14F-4D97-AF65-F5344CB8AC3E}">
+        <p14:creationId xmlns:p14="http://schemas.microsoft.com/office/powerpoint/2010/main" val="639853060"/>
+      </p:ext>
+    </p:extLst>
+  </p:cSld>
+  <p:clrMapOvr>
+    <a:masterClrMapping/>
+  </p:clrMapOvr>
+</p:notes>
+</file>
+
+<file path=ppt/notesSlides/notesSlide6.xml><?xml version="1.0" encoding="utf-8"?>
+<p:notes xmlns:a="http://schemas.openxmlformats.org/drawingml/2006/main" xmlns:r="http://schemas.openxmlformats.org/officeDocument/2006/relationships" xmlns:p="http://schemas.openxmlformats.org/presentationml/2006/main">
+  <p:cSld>
+    <p:spTree>
+      <p:nvGrpSpPr>
+        <p:cNvPr id="1" name=""/>
+        <p:cNvGrpSpPr/>
+        <p:nvPr/>
+      </p:nvGrpSpPr>
+      <p:grpSpPr>
+        <a:xfrm>
+          <a:off x="0" y="0"/>
+          <a:ext cx="0" cy="0"/>
+          <a:chOff x="0" y="0"/>
+          <a:chExt cx="0" cy="0"/>
+        </a:xfrm>
+      </p:grpSpPr>
+      <p:sp>
+        <p:nvSpPr>
+          <p:cNvPr id="2" name="Slide Image Placeholder 1"/>
+          <p:cNvSpPr>
+            <a:spLocks noGrp="1" noRot="1" noChangeAspect="1"/>
+          </p:cNvSpPr>
+          <p:nvPr>
+            <p:ph type="sldImg"/>
+          </p:nvPr>
+        </p:nvSpPr>
+        <p:spPr/>
+      </p:sp>
+      <p:sp>
+        <p:nvSpPr>
+          <p:cNvPr id="3" name="Notes Placeholder 2"/>
+          <p:cNvSpPr>
+            <a:spLocks noGrp="1"/>
+          </p:cNvSpPr>
+          <p:nvPr>
+            <p:ph type="body" idx="1"/>
+          </p:nvPr>
+        </p:nvSpPr>
+        <p:spPr/>
+        <p:txBody>
+          <a:bodyPr/>
+          <a:lstStyle/>
+          <a:p>
+            <a:endParaRPr lang="en-US" dirty="0"/>
+          </a:p>
+        </p:txBody>
+      </p:sp>
+      <p:sp>
+        <p:nvSpPr>
+          <p:cNvPr id="4" name="Slide Number Placeholder 3"/>
+          <p:cNvSpPr>
+            <a:spLocks noGrp="1"/>
+          </p:cNvSpPr>
+          <p:nvPr>
+            <p:ph type="sldNum" sz="quarter" idx="5"/>
+          </p:nvPr>
+        </p:nvSpPr>
+        <p:spPr/>
+        <p:txBody>
+          <a:bodyPr/>
+          <a:lstStyle/>
+          <a:p>
+            <a:fld id="{C856F6D7-A759-5D41-8F8D-5EE238F097BC}" type="slidenum">
+              <a:rPr lang="en-US" smtClean="0"/>
+              <a:t>12</a:t>
             </a:fld>
             <a:endParaRPr lang="en-US"/>
           </a:p>
@@ -1665,7 +3027,7 @@
           <a:p>
             <a:fld id="{0FA3F8E0-39CC-F548-AAA7-4485C47B7E6B}" type="datetimeFigureOut">
               <a:rPr lang="en-US" smtClean="0"/>
-              <a:t>5/22/26</a:t>
+              <a:t>6/7/26</a:t>
             </a:fld>
             <a:endParaRPr lang="en-US"/>
           </a:p>
@@ -1865,7 +3227,7 @@
           <a:p>
             <a:fld id="{0FA3F8E0-39CC-F548-AAA7-4485C47B7E6B}" type="datetimeFigureOut">
               <a:rPr lang="en-US" smtClean="0"/>
-              <a:t>5/22/26</a:t>
+              <a:t>6/7/26</a:t>
             </a:fld>
             <a:endParaRPr lang="en-US"/>
           </a:p>
@@ -2075,7 +3437,7 @@
           <a:p>
             <a:fld id="{0FA3F8E0-39CC-F548-AAA7-4485C47B7E6B}" type="datetimeFigureOut">
               <a:rPr lang="en-US" smtClean="0"/>
-              <a:t>5/22/26</a:t>
+              <a:t>6/7/26</a:t>
             </a:fld>
             <a:endParaRPr lang="en-US"/>
           </a:p>
@@ -2275,7 +3637,7 @@
           <a:p>
             <a:fld id="{0FA3F8E0-39CC-F548-AAA7-4485C47B7E6B}" type="datetimeFigureOut">
               <a:rPr lang="en-US" smtClean="0"/>
-              <a:t>5/22/26</a:t>
+              <a:t>6/7/26</a:t>
             </a:fld>
             <a:endParaRPr lang="en-US"/>
           </a:p>
@@ -2551,7 +3913,7 @@
           <a:p>
             <a:fld id="{0FA3F8E0-39CC-F548-AAA7-4485C47B7E6B}" type="datetimeFigureOut">
               <a:rPr lang="en-US" smtClean="0"/>
-              <a:t>5/22/26</a:t>
+              <a:t>6/7/26</a:t>
             </a:fld>
             <a:endParaRPr lang="en-US"/>
           </a:p>
@@ -2819,7 +4181,7 @@
           <a:p>
             <a:fld id="{0FA3F8E0-39CC-F548-AAA7-4485C47B7E6B}" type="datetimeFigureOut">
               <a:rPr lang="en-US" smtClean="0"/>
-              <a:t>5/22/26</a:t>
+              <a:t>6/7/26</a:t>
             </a:fld>
             <a:endParaRPr lang="en-US"/>
           </a:p>
@@ -3234,7 +4596,7 @@
           <a:p>
             <a:fld id="{0FA3F8E0-39CC-F548-AAA7-4485C47B7E6B}" type="datetimeFigureOut">
               <a:rPr lang="en-US" smtClean="0"/>
-              <a:t>5/22/26</a:t>
+              <a:t>6/7/26</a:t>
             </a:fld>
             <a:endParaRPr lang="en-US"/>
           </a:p>
@@ -3376,7 +4738,7 @@
           <a:p>
             <a:fld id="{0FA3F8E0-39CC-F548-AAA7-4485C47B7E6B}" type="datetimeFigureOut">
               <a:rPr lang="en-US" smtClean="0"/>
-              <a:t>5/22/26</a:t>
+              <a:t>6/7/26</a:t>
             </a:fld>
             <a:endParaRPr lang="en-US"/>
           </a:p>
@@ -3489,7 +4851,7 @@
           <a:p>
             <a:fld id="{0FA3F8E0-39CC-F548-AAA7-4485C47B7E6B}" type="datetimeFigureOut">
               <a:rPr lang="en-US" smtClean="0"/>
-              <a:t>5/22/26</a:t>
+              <a:t>6/7/26</a:t>
             </a:fld>
             <a:endParaRPr lang="en-US"/>
           </a:p>
@@ -3802,7 +5164,7 @@
           <a:p>
             <a:fld id="{0FA3F8E0-39CC-F548-AAA7-4485C47B7E6B}" type="datetimeFigureOut">
               <a:rPr lang="en-US" smtClean="0"/>
-              <a:t>5/22/26</a:t>
+              <a:t>6/7/26</a:t>
             </a:fld>
             <a:endParaRPr lang="en-US"/>
           </a:p>
@@ -4091,7 +5453,7 @@
           <a:p>
             <a:fld id="{0FA3F8E0-39CC-F548-AAA7-4485C47B7E6B}" type="datetimeFigureOut">
               <a:rPr lang="en-US" smtClean="0"/>
-              <a:t>5/22/26</a:t>
+              <a:t>6/7/26</a:t>
             </a:fld>
             <a:endParaRPr lang="en-US"/>
           </a:p>
@@ -4334,7 +5696,7 @@
           <a:p>
             <a:fld id="{0FA3F8E0-39CC-F548-AAA7-4485C47B7E6B}" type="datetimeFigureOut">
               <a:rPr lang="en-US" smtClean="0"/>
-              <a:t>5/22/26</a:t>
+              <a:t>6/7/26</a:t>
             </a:fld>
             <a:endParaRPr lang="en-US"/>
           </a:p>
@@ -4848,6 +6210,352 @@
           <p:cNvPr id="2" name="Title 1">
             <a:extLst>
               <a:ext uri="{FF2B5EF4-FFF2-40B4-BE49-F238E27FC236}">
+                <a16:creationId xmlns:a16="http://schemas.microsoft.com/office/drawing/2014/main" id="{88F7E6BD-FF49-36B7-3121-DB46BCCFFEEE}"/>
+              </a:ext>
+            </a:extLst>
+          </p:cNvPr>
+          <p:cNvSpPr>
+            <a:spLocks noGrp="1"/>
+          </p:cNvSpPr>
+          <p:nvPr>
+            <p:ph type="title"/>
+          </p:nvPr>
+        </p:nvSpPr>
+        <p:spPr/>
+        <p:txBody>
+          <a:bodyPr>
+            <a:normAutofit fontScale="90000"/>
+          </a:bodyPr>
+          <a:lstStyle/>
+          <a:p>
+            <a:r>
+              <a:rPr lang="en-GB" dirty="0"/>
+              <a:t>Embedding transmission reduces raw-image exposure, but embeddings are still sensitive.</a:t>
+            </a:r>
+            <a:r>
+              <a:rPr lang="zh-CN" altLang="en-US" dirty="0"/>
+              <a:t> </a:t>
+            </a:r>
+            <a:r>
+              <a:rPr lang="en-US" altLang="zh-CN" dirty="0"/>
+              <a:t>(background)</a:t>
+            </a:r>
+            <a:endParaRPr lang="en-US" dirty="0"/>
+          </a:p>
+        </p:txBody>
+      </p:sp>
+      <p:sp>
+        <p:nvSpPr>
+          <p:cNvPr id="3" name="Content Placeholder 2">
+            <a:extLst>
+              <a:ext uri="{FF2B5EF4-FFF2-40B4-BE49-F238E27FC236}">
+                <a16:creationId xmlns:a16="http://schemas.microsoft.com/office/drawing/2014/main" id="{FCCF3752-85EC-FA56-49C2-25FBBD516EEA}"/>
+              </a:ext>
+            </a:extLst>
+          </p:cNvPr>
+          <p:cNvSpPr>
+            <a:spLocks noGrp="1"/>
+          </p:cNvSpPr>
+          <p:nvPr>
+            <p:ph idx="1"/>
+          </p:nvPr>
+        </p:nvSpPr>
+        <p:spPr/>
+        <p:txBody>
+          <a:bodyPr>
+            <a:normAutofit fontScale="77500" lnSpcReduction="20000"/>
+          </a:bodyPr>
+          <a:lstStyle/>
+          <a:p>
+            <a:r>
+              <a:rPr lang="en-GB" b="1" dirty="0"/>
+              <a:t>Understanding deep image representations by inverting them</a:t>
+            </a:r>
+            <a:r>
+              <a:rPr lang="zh-CN" altLang="en-US" b="1" dirty="0"/>
+              <a:t> </a:t>
+            </a:r>
+            <a:r>
+              <a:rPr lang="en-US" altLang="zh-CN" dirty="0"/>
+              <a:t>--</a:t>
+            </a:r>
+            <a:r>
+              <a:rPr lang="zh-CN" altLang="en-US" dirty="0"/>
+              <a:t> </a:t>
+            </a:r>
+            <a:r>
+              <a:rPr lang="en-GB" dirty="0"/>
+              <a:t>Inverts image representations to reconstruct visual content</a:t>
+            </a:r>
+            <a:r>
+              <a:rPr lang="en-US" altLang="zh-CN" dirty="0"/>
+              <a:t>.</a:t>
+            </a:r>
+            <a:r>
+              <a:rPr lang="zh-CN" altLang="en-US" dirty="0"/>
+              <a:t> </a:t>
+            </a:r>
+            <a:r>
+              <a:rPr lang="en-US" altLang="zh-CN" dirty="0"/>
+              <a:t>This</a:t>
+            </a:r>
+            <a:r>
+              <a:rPr lang="zh-CN" altLang="en-US" dirty="0"/>
+              <a:t> </a:t>
+            </a:r>
+            <a:r>
+              <a:rPr lang="en-GB" dirty="0"/>
+              <a:t>shown that, under white-box or partially known model settings, visual representations can be inverted to recover information about the original image.</a:t>
+            </a:r>
+          </a:p>
+          <a:p>
+            <a:endParaRPr lang="en-GB" dirty="0"/>
+          </a:p>
+          <a:p>
+            <a:r>
+              <a:rPr lang="en-GB" b="1" dirty="0"/>
+              <a:t>Deep-BMI: Exploring Model Inversion Attacks in the Black-box Setting</a:t>
+            </a:r>
+            <a:r>
+              <a:rPr lang="zh-CN" altLang="en-US" b="1" dirty="0"/>
+              <a:t> </a:t>
+            </a:r>
+            <a:r>
+              <a:rPr lang="en-US" altLang="zh-CN" dirty="0"/>
+              <a:t>--</a:t>
+            </a:r>
+            <a:r>
+              <a:rPr lang="zh-CN" altLang="en-US" dirty="0"/>
+              <a:t> </a:t>
+            </a:r>
+            <a:r>
+              <a:rPr lang="en-GB" dirty="0"/>
+              <a:t>Black-box model inversion can reconstruct semantically meaningful images without accessing target model parameters, although it usually requires repeated queries to the target model.</a:t>
+            </a:r>
+          </a:p>
+          <a:p>
+            <a:endParaRPr lang="en-GB" dirty="0"/>
+          </a:p>
+          <a:p>
+            <a:r>
+              <a:rPr lang="en-GB" b="1" dirty="0"/>
+              <a:t>Deep Learning Model Inversion Attacks and </a:t>
+            </a:r>
+            <a:r>
+              <a:rPr lang="en-GB" b="1" dirty="0" err="1"/>
+              <a:t>Defenses</a:t>
+            </a:r>
+            <a:r>
+              <a:rPr lang="en-GB" b="1" dirty="0"/>
+              <a:t>: A Comprehensive Survey</a:t>
+            </a:r>
+            <a:r>
+              <a:rPr lang="zh-CN" altLang="en-US" b="1" dirty="0"/>
+              <a:t> </a:t>
+            </a:r>
+            <a:r>
+              <a:rPr lang="en-US" altLang="zh-CN" dirty="0"/>
+              <a:t>--</a:t>
+            </a:r>
+            <a:r>
+              <a:rPr lang="zh-CN" altLang="en-US" dirty="0"/>
+              <a:t> </a:t>
+            </a:r>
+            <a:r>
+              <a:rPr lang="en-GB" dirty="0"/>
+              <a:t>how attackers can reconstruct private training data or sensitive information from deep learning models, and summarises existing </a:t>
+            </a:r>
+            <a:r>
+              <a:rPr lang="en-GB" dirty="0" err="1"/>
+              <a:t>defense</a:t>
+            </a:r>
+            <a:r>
+              <a:rPr lang="en-GB" dirty="0"/>
+              <a:t> methods.</a:t>
+            </a:r>
+            <a:br>
+              <a:rPr lang="en-GB" dirty="0"/>
+            </a:br>
+            <a:endParaRPr lang="en-US" dirty="0"/>
+          </a:p>
+          <a:p>
+            <a:endParaRPr lang="en-US" dirty="0"/>
+          </a:p>
+          <a:p>
+            <a:endParaRPr lang="en-US" dirty="0"/>
+          </a:p>
+        </p:txBody>
+      </p:sp>
+    </p:spTree>
+    <p:extLst>
+      <p:ext uri="{BB962C8B-B14F-4D97-AF65-F5344CB8AC3E}">
+        <p14:creationId xmlns:p14="http://schemas.microsoft.com/office/powerpoint/2010/main" val="1349224978"/>
+      </p:ext>
+    </p:extLst>
+  </p:cSld>
+  <p:clrMapOvr>
+    <a:masterClrMapping/>
+  </p:clrMapOvr>
+</p:sld>
+</file>
+
+<file path=ppt/slides/slide11.xml><?xml version="1.0" encoding="utf-8"?>
+<p:sld xmlns:a="http://schemas.openxmlformats.org/drawingml/2006/main" xmlns:r="http://schemas.openxmlformats.org/officeDocument/2006/relationships" xmlns:p="http://schemas.openxmlformats.org/presentationml/2006/main">
+  <p:cSld>
+    <p:spTree>
+      <p:nvGrpSpPr>
+        <p:cNvPr id="1" name=""/>
+        <p:cNvGrpSpPr/>
+        <p:nvPr/>
+      </p:nvGrpSpPr>
+      <p:grpSpPr>
+        <a:xfrm>
+          <a:off x="0" y="0"/>
+          <a:ext cx="0" cy="0"/>
+          <a:chOff x="0" y="0"/>
+          <a:chExt cx="0" cy="0"/>
+        </a:xfrm>
+      </p:grpSpPr>
+      <p:sp>
+        <p:nvSpPr>
+          <p:cNvPr id="2" name="Title 1">
+            <a:extLst>
+              <a:ext uri="{FF2B5EF4-FFF2-40B4-BE49-F238E27FC236}">
+                <a16:creationId xmlns:a16="http://schemas.microsoft.com/office/drawing/2014/main" id="{1B5E8B61-A1B0-A574-297A-A4D576271C24}"/>
+              </a:ext>
+            </a:extLst>
+          </p:cNvPr>
+          <p:cNvSpPr>
+            <a:spLocks noGrp="1"/>
+          </p:cNvSpPr>
+          <p:nvPr>
+            <p:ph type="title"/>
+          </p:nvPr>
+        </p:nvSpPr>
+        <p:spPr/>
+        <p:txBody>
+          <a:bodyPr/>
+          <a:lstStyle/>
+          <a:p>
+            <a:r>
+              <a:rPr lang="en-US" altLang="zh-CN" dirty="0"/>
+              <a:t>E</a:t>
+            </a:r>
+            <a:r>
+              <a:rPr lang="en-GB" dirty="0" err="1"/>
+              <a:t>mbedding</a:t>
+            </a:r>
+            <a:r>
+              <a:rPr lang="en-GB" dirty="0"/>
+              <a:t> encryption and authentication combinations</a:t>
+            </a:r>
+            <a:endParaRPr lang="en-US" dirty="0"/>
+          </a:p>
+        </p:txBody>
+      </p:sp>
+      <p:sp>
+        <p:nvSpPr>
+          <p:cNvPr id="3" name="Content Placeholder 2">
+            <a:extLst>
+              <a:ext uri="{FF2B5EF4-FFF2-40B4-BE49-F238E27FC236}">
+                <a16:creationId xmlns:a16="http://schemas.microsoft.com/office/drawing/2014/main" id="{CF3649C6-2E5F-3C42-FBEB-C028BFCC91CA}"/>
+              </a:ext>
+            </a:extLst>
+          </p:cNvPr>
+          <p:cNvSpPr>
+            <a:spLocks noGrp="1"/>
+          </p:cNvSpPr>
+          <p:nvPr>
+            <p:ph idx="1"/>
+          </p:nvPr>
+        </p:nvSpPr>
+        <p:spPr/>
+        <p:txBody>
+          <a:bodyPr>
+            <a:normAutofit lnSpcReduction="10000"/>
+          </a:bodyPr>
+          <a:lstStyle/>
+          <a:p>
+            <a:r>
+              <a:rPr lang="en-GB" b="1" dirty="0"/>
+              <a:t>A privacy preserving split learning framework with adaptive inference selection for IoT security</a:t>
+            </a:r>
+            <a:r>
+              <a:rPr lang="zh-CN" altLang="en-US" b="1" dirty="0"/>
+              <a:t>  </a:t>
+            </a:r>
+            <a:r>
+              <a:rPr lang="en-US" altLang="zh-CN" dirty="0"/>
+              <a:t>--</a:t>
+            </a:r>
+            <a:r>
+              <a:rPr lang="zh-CN" altLang="en-US" dirty="0"/>
+              <a:t> </a:t>
+            </a:r>
+            <a:r>
+              <a:rPr lang="en-GB" dirty="0"/>
+              <a:t>Split Learning, Gaussian noise-based DP, pruning, quantization, TensorFlow Lite, and adaptive model selection.</a:t>
+            </a:r>
+          </a:p>
+          <a:p>
+            <a:r>
+              <a:rPr lang="en-GB" b="1" dirty="0"/>
+              <a:t>A privacy-preserving multi-user retrieval system for multimodal artificial intelligence</a:t>
+            </a:r>
+          </a:p>
+          <a:p>
+            <a:pPr lvl="1"/>
+            <a:r>
+              <a:rPr lang="en-GB" dirty="0"/>
+              <a:t>This paper shows that embedding transmission alone is not enough for privacy protection, so the authors combine embedding obfuscation, encryption, and secure key management for multimodal retrieval.</a:t>
+            </a:r>
+          </a:p>
+          <a:p>
+            <a:pPr marL="0" indent="0">
+              <a:buNone/>
+            </a:pPr>
+            <a:br>
+              <a:rPr lang="en-GB" dirty="0"/>
+            </a:br>
+            <a:endParaRPr lang="en-US" dirty="0"/>
+          </a:p>
+        </p:txBody>
+      </p:sp>
+    </p:spTree>
+    <p:extLst>
+      <p:ext uri="{BB962C8B-B14F-4D97-AF65-F5344CB8AC3E}">
+        <p14:creationId xmlns:p14="http://schemas.microsoft.com/office/powerpoint/2010/main" val="1853872987"/>
+      </p:ext>
+    </p:extLst>
+  </p:cSld>
+  <p:clrMapOvr>
+    <a:masterClrMapping/>
+  </p:clrMapOvr>
+</p:sld>
+</file>
+
+<file path=ppt/slides/slide12.xml><?xml version="1.0" encoding="utf-8"?>
+<p:sld xmlns:a="http://schemas.openxmlformats.org/drawingml/2006/main" xmlns:r="http://schemas.openxmlformats.org/officeDocument/2006/relationships" xmlns:p="http://schemas.openxmlformats.org/presentationml/2006/main">
+  <p:cSld>
+    <p:spTree>
+      <p:nvGrpSpPr>
+        <p:cNvPr id="1" name=""/>
+        <p:cNvGrpSpPr/>
+        <p:nvPr/>
+      </p:nvGrpSpPr>
+      <p:grpSpPr>
+        <a:xfrm>
+          <a:off x="0" y="0"/>
+          <a:ext cx="0" cy="0"/>
+          <a:chOff x="0" y="0"/>
+          <a:chExt cx="0" cy="0"/>
+        </a:xfrm>
+      </p:grpSpPr>
+      <p:sp>
+        <p:nvSpPr>
+          <p:cNvPr id="2" name="Title 1">
+            <a:extLst>
+              <a:ext uri="{FF2B5EF4-FFF2-40B4-BE49-F238E27FC236}">
                 <a16:creationId xmlns:a16="http://schemas.microsoft.com/office/drawing/2014/main" id="{A9FDA0D3-0E46-EDD0-E7F8-496FC8B2B297}"/>
               </a:ext>
             </a:extLst>
@@ -5515,6 +7223,3246 @@
   <p:cSld>
     <p:spTree>
       <p:nvGrpSpPr>
+        <p:cNvPr id="1" name=""/>
+        <p:cNvGrpSpPr/>
+        <p:nvPr/>
+      </p:nvGrpSpPr>
+      <p:grpSpPr>
+        <a:xfrm>
+          <a:off x="0" y="0"/>
+          <a:ext cx="0" cy="0"/>
+          <a:chOff x="0" y="0"/>
+          <a:chExt cx="0" cy="0"/>
+        </a:xfrm>
+      </p:grpSpPr>
+      <p:sp>
+        <p:nvSpPr>
+          <p:cNvPr id="144" name="Rounded Rectangle 143">
+            <a:extLst>
+              <a:ext uri="{FF2B5EF4-FFF2-40B4-BE49-F238E27FC236}">
+                <a16:creationId xmlns:a16="http://schemas.microsoft.com/office/drawing/2014/main" id="{2CD0A8B5-A948-56DE-4F7B-338BE23AE60D}"/>
+              </a:ext>
+            </a:extLst>
+          </p:cNvPr>
+          <p:cNvSpPr/>
+          <p:nvPr/>
+        </p:nvSpPr>
+        <p:spPr>
+          <a:xfrm>
+            <a:off x="4914167" y="333921"/>
+            <a:ext cx="6664560" cy="3581587"/>
+          </a:xfrm>
+          <a:prstGeom prst="roundRect">
+            <a:avLst/>
+          </a:prstGeom>
+          <a:solidFill>
+            <a:schemeClr val="bg1"/>
+          </a:solidFill>
+          <a:ln>
+            <a:prstDash val="sysDash"/>
+          </a:ln>
+        </p:spPr>
+        <p:style>
+          <a:lnRef idx="2">
+            <a:schemeClr val="accent1">
+              <a:shade val="15000"/>
+            </a:schemeClr>
+          </a:lnRef>
+          <a:fillRef idx="1">
+            <a:schemeClr val="accent1"/>
+          </a:fillRef>
+          <a:effectRef idx="0">
+            <a:schemeClr val="accent1"/>
+          </a:effectRef>
+          <a:fontRef idx="minor">
+            <a:schemeClr val="lt1"/>
+          </a:fontRef>
+        </p:style>
+        <p:txBody>
+          <a:bodyPr rtlCol="0" anchor="ctr"/>
+          <a:lstStyle/>
+          <a:p>
+            <a:pPr algn="ctr"/>
+            <a:endParaRPr lang="en-US" dirty="0">
+              <a:solidFill>
+                <a:schemeClr val="tx1"/>
+              </a:solidFill>
+            </a:endParaRPr>
+          </a:p>
+        </p:txBody>
+      </p:sp>
+      <p:sp>
+        <p:nvSpPr>
+          <p:cNvPr id="160" name="Rectangle 159">
+            <a:extLst>
+              <a:ext uri="{FF2B5EF4-FFF2-40B4-BE49-F238E27FC236}">
+                <a16:creationId xmlns:a16="http://schemas.microsoft.com/office/drawing/2014/main" id="{C66CD70B-3997-E535-C310-3F86D9F14847}"/>
+              </a:ext>
+            </a:extLst>
+          </p:cNvPr>
+          <p:cNvSpPr/>
+          <p:nvPr/>
+        </p:nvSpPr>
+        <p:spPr>
+          <a:xfrm>
+            <a:off x="5157471" y="1838071"/>
+            <a:ext cx="1133613" cy="286362"/>
+          </a:xfrm>
+          <a:prstGeom prst="rect">
+            <a:avLst/>
+          </a:prstGeom>
+          <a:solidFill>
+            <a:schemeClr val="accent6">
+              <a:lumMod val="20000"/>
+              <a:lumOff val="80000"/>
+            </a:schemeClr>
+          </a:solidFill>
+          <a:ln>
+            <a:prstDash val="dash"/>
+          </a:ln>
+        </p:spPr>
+        <p:style>
+          <a:lnRef idx="2">
+            <a:schemeClr val="accent1">
+              <a:shade val="15000"/>
+            </a:schemeClr>
+          </a:lnRef>
+          <a:fillRef idx="1">
+            <a:schemeClr val="accent1"/>
+          </a:fillRef>
+          <a:effectRef idx="0">
+            <a:schemeClr val="accent1"/>
+          </a:effectRef>
+          <a:fontRef idx="minor">
+            <a:schemeClr val="lt1"/>
+          </a:fontRef>
+        </p:style>
+        <p:txBody>
+          <a:bodyPr rtlCol="0" anchor="ctr"/>
+          <a:lstStyle/>
+          <a:p>
+            <a:r>
+              <a:rPr lang="en-US" altLang="zh-CN" sz="1200" dirty="0" err="1">
+                <a:solidFill>
+                  <a:schemeClr val="tx1"/>
+                </a:solidFill>
+              </a:rPr>
+              <a:t>NanoVLM</a:t>
+            </a:r>
+            <a:r>
+              <a:rPr lang="zh-CN" altLang="en-US" sz="1200" dirty="0">
+                <a:solidFill>
+                  <a:schemeClr val="tx1"/>
+                </a:solidFill>
+              </a:rPr>
+              <a:t> </a:t>
+            </a:r>
+            <a:r>
+              <a:rPr lang="en-US" altLang="zh-CN" sz="1200" dirty="0">
+                <a:solidFill>
+                  <a:schemeClr val="tx1"/>
+                </a:solidFill>
+              </a:rPr>
+              <a:t>text</a:t>
+            </a:r>
+            <a:endParaRPr lang="en-US" sz="1200" dirty="0">
+              <a:solidFill>
+                <a:schemeClr val="tx1"/>
+              </a:solidFill>
+            </a:endParaRPr>
+          </a:p>
+        </p:txBody>
+      </p:sp>
+      <p:sp>
+        <p:nvSpPr>
+          <p:cNvPr id="159" name="Rectangle 158">
+            <a:extLst>
+              <a:ext uri="{FF2B5EF4-FFF2-40B4-BE49-F238E27FC236}">
+                <a16:creationId xmlns:a16="http://schemas.microsoft.com/office/drawing/2014/main" id="{4241A81B-9F61-A630-8B8A-BE611C0C9531}"/>
+              </a:ext>
+            </a:extLst>
+          </p:cNvPr>
+          <p:cNvSpPr/>
+          <p:nvPr/>
+        </p:nvSpPr>
+        <p:spPr>
+          <a:xfrm>
+            <a:off x="5098855" y="1732563"/>
+            <a:ext cx="1133613" cy="286362"/>
+          </a:xfrm>
+          <a:prstGeom prst="rect">
+            <a:avLst/>
+          </a:prstGeom>
+          <a:solidFill>
+            <a:schemeClr val="accent6">
+              <a:lumMod val="20000"/>
+              <a:lumOff val="80000"/>
+            </a:schemeClr>
+          </a:solidFill>
+          <a:ln>
+            <a:prstDash val="dash"/>
+          </a:ln>
+        </p:spPr>
+        <p:style>
+          <a:lnRef idx="2">
+            <a:schemeClr val="accent1">
+              <a:shade val="15000"/>
+            </a:schemeClr>
+          </a:lnRef>
+          <a:fillRef idx="1">
+            <a:schemeClr val="accent1"/>
+          </a:fillRef>
+          <a:effectRef idx="0">
+            <a:schemeClr val="accent1"/>
+          </a:effectRef>
+          <a:fontRef idx="minor">
+            <a:schemeClr val="lt1"/>
+          </a:fontRef>
+        </p:style>
+        <p:txBody>
+          <a:bodyPr rtlCol="0" anchor="ctr"/>
+          <a:lstStyle/>
+          <a:p>
+            <a:r>
+              <a:rPr lang="en-US" altLang="zh-CN" sz="1200" dirty="0" err="1">
+                <a:solidFill>
+                  <a:schemeClr val="tx1"/>
+                </a:solidFill>
+              </a:rPr>
+              <a:t>NanoVLM</a:t>
+            </a:r>
+            <a:r>
+              <a:rPr lang="zh-CN" altLang="en-US" sz="1200" dirty="0">
+                <a:solidFill>
+                  <a:schemeClr val="tx1"/>
+                </a:solidFill>
+              </a:rPr>
+              <a:t> </a:t>
+            </a:r>
+            <a:r>
+              <a:rPr lang="en-US" altLang="zh-CN" sz="1200" dirty="0">
+                <a:solidFill>
+                  <a:schemeClr val="tx1"/>
+                </a:solidFill>
+              </a:rPr>
+              <a:t>text</a:t>
+            </a:r>
+            <a:endParaRPr lang="en-US" sz="1200" dirty="0">
+              <a:solidFill>
+                <a:schemeClr val="tx1"/>
+              </a:solidFill>
+            </a:endParaRPr>
+          </a:p>
+        </p:txBody>
+      </p:sp>
+      <p:sp>
+        <p:nvSpPr>
+          <p:cNvPr id="157" name="Rectangle 156">
+            <a:extLst>
+              <a:ext uri="{FF2B5EF4-FFF2-40B4-BE49-F238E27FC236}">
+                <a16:creationId xmlns:a16="http://schemas.microsoft.com/office/drawing/2014/main" id="{5C1EE247-48DB-9F98-AC2E-0AD24F1C6681}"/>
+              </a:ext>
+            </a:extLst>
+          </p:cNvPr>
+          <p:cNvSpPr/>
+          <p:nvPr/>
+        </p:nvSpPr>
+        <p:spPr>
+          <a:xfrm>
+            <a:off x="5191107" y="1193822"/>
+            <a:ext cx="1067598" cy="261471"/>
+          </a:xfrm>
+          <a:prstGeom prst="rect">
+            <a:avLst/>
+          </a:prstGeom>
+          <a:solidFill>
+            <a:schemeClr val="tx2">
+              <a:lumMod val="25000"/>
+              <a:lumOff val="75000"/>
+            </a:schemeClr>
+          </a:solidFill>
+          <a:ln>
+            <a:prstDash val="dash"/>
+          </a:ln>
+        </p:spPr>
+        <p:style>
+          <a:lnRef idx="2">
+            <a:schemeClr val="accent1">
+              <a:shade val="15000"/>
+            </a:schemeClr>
+          </a:lnRef>
+          <a:fillRef idx="1">
+            <a:schemeClr val="accent1"/>
+          </a:fillRef>
+          <a:effectRef idx="0">
+            <a:schemeClr val="accent1"/>
+          </a:effectRef>
+          <a:fontRef idx="minor">
+            <a:schemeClr val="lt1"/>
+          </a:fontRef>
+        </p:style>
+        <p:txBody>
+          <a:bodyPr rtlCol="0" anchor="ctr"/>
+          <a:lstStyle/>
+          <a:p>
+            <a:r>
+              <a:rPr lang="en-US" altLang="zh-CN" sz="1400" dirty="0">
+                <a:solidFill>
+                  <a:schemeClr val="tx1"/>
+                </a:solidFill>
+              </a:rPr>
+              <a:t>Output</a:t>
+            </a:r>
+            <a:r>
+              <a:rPr lang="zh-CN" altLang="en-US" sz="1400" dirty="0">
+                <a:solidFill>
+                  <a:schemeClr val="tx1"/>
+                </a:solidFill>
+              </a:rPr>
+              <a:t> </a:t>
+            </a:r>
+            <a:r>
+              <a:rPr lang="en-US" altLang="zh-CN" sz="1400" dirty="0">
+                <a:solidFill>
+                  <a:schemeClr val="tx1"/>
+                </a:solidFill>
+              </a:rPr>
+              <a:t>text</a:t>
+            </a:r>
+            <a:endParaRPr lang="en-US" sz="1400" dirty="0">
+              <a:solidFill>
+                <a:schemeClr val="tx1"/>
+              </a:solidFill>
+            </a:endParaRPr>
+          </a:p>
+        </p:txBody>
+      </p:sp>
+      <p:sp>
+        <p:nvSpPr>
+          <p:cNvPr id="156" name="Rectangle 155">
+            <a:extLst>
+              <a:ext uri="{FF2B5EF4-FFF2-40B4-BE49-F238E27FC236}">
+                <a16:creationId xmlns:a16="http://schemas.microsoft.com/office/drawing/2014/main" id="{A7CCDA6B-8DAC-6779-0300-D1ABD7723CD6}"/>
+              </a:ext>
+            </a:extLst>
+          </p:cNvPr>
+          <p:cNvSpPr/>
+          <p:nvPr/>
+        </p:nvSpPr>
+        <p:spPr>
+          <a:xfrm>
+            <a:off x="5131153" y="1123105"/>
+            <a:ext cx="1067598" cy="261471"/>
+          </a:xfrm>
+          <a:prstGeom prst="rect">
+            <a:avLst/>
+          </a:prstGeom>
+          <a:solidFill>
+            <a:schemeClr val="tx2">
+              <a:lumMod val="25000"/>
+              <a:lumOff val="75000"/>
+            </a:schemeClr>
+          </a:solidFill>
+          <a:ln>
+            <a:prstDash val="dash"/>
+          </a:ln>
+        </p:spPr>
+        <p:style>
+          <a:lnRef idx="2">
+            <a:schemeClr val="accent1">
+              <a:shade val="15000"/>
+            </a:schemeClr>
+          </a:lnRef>
+          <a:fillRef idx="1">
+            <a:schemeClr val="accent1"/>
+          </a:fillRef>
+          <a:effectRef idx="0">
+            <a:schemeClr val="accent1"/>
+          </a:effectRef>
+          <a:fontRef idx="minor">
+            <a:schemeClr val="lt1"/>
+          </a:fontRef>
+        </p:style>
+        <p:txBody>
+          <a:bodyPr rtlCol="0" anchor="ctr"/>
+          <a:lstStyle/>
+          <a:p>
+            <a:r>
+              <a:rPr lang="en-US" altLang="zh-CN" sz="1400" dirty="0">
+                <a:solidFill>
+                  <a:schemeClr val="tx1"/>
+                </a:solidFill>
+              </a:rPr>
+              <a:t>Output</a:t>
+            </a:r>
+            <a:r>
+              <a:rPr lang="zh-CN" altLang="en-US" sz="1400" dirty="0">
+                <a:solidFill>
+                  <a:schemeClr val="tx1"/>
+                </a:solidFill>
+              </a:rPr>
+              <a:t> </a:t>
+            </a:r>
+            <a:r>
+              <a:rPr lang="en-US" altLang="zh-CN" sz="1400" dirty="0">
+                <a:solidFill>
+                  <a:schemeClr val="tx1"/>
+                </a:solidFill>
+              </a:rPr>
+              <a:t>text</a:t>
+            </a:r>
+            <a:endParaRPr lang="en-US" sz="1400" dirty="0">
+              <a:solidFill>
+                <a:schemeClr val="tx1"/>
+              </a:solidFill>
+            </a:endParaRPr>
+          </a:p>
+        </p:txBody>
+      </p:sp>
+      <p:sp>
+        <p:nvSpPr>
+          <p:cNvPr id="155" name="Rectangle 154">
+            <a:extLst>
+              <a:ext uri="{FF2B5EF4-FFF2-40B4-BE49-F238E27FC236}">
+                <a16:creationId xmlns:a16="http://schemas.microsoft.com/office/drawing/2014/main" id="{A612EF7E-0F09-5D74-B404-DAD3FB3A3D85}"/>
+              </a:ext>
+            </a:extLst>
+          </p:cNvPr>
+          <p:cNvSpPr/>
+          <p:nvPr/>
+        </p:nvSpPr>
+        <p:spPr>
+          <a:xfrm>
+            <a:off x="5062732" y="1040686"/>
+            <a:ext cx="1067598" cy="261471"/>
+          </a:xfrm>
+          <a:prstGeom prst="rect">
+            <a:avLst/>
+          </a:prstGeom>
+          <a:solidFill>
+            <a:schemeClr val="tx2">
+              <a:lumMod val="25000"/>
+              <a:lumOff val="75000"/>
+            </a:schemeClr>
+          </a:solidFill>
+          <a:ln>
+            <a:prstDash val="dash"/>
+          </a:ln>
+        </p:spPr>
+        <p:style>
+          <a:lnRef idx="2">
+            <a:schemeClr val="accent1">
+              <a:shade val="15000"/>
+            </a:schemeClr>
+          </a:lnRef>
+          <a:fillRef idx="1">
+            <a:schemeClr val="accent1"/>
+          </a:fillRef>
+          <a:effectRef idx="0">
+            <a:schemeClr val="accent1"/>
+          </a:effectRef>
+          <a:fontRef idx="minor">
+            <a:schemeClr val="lt1"/>
+          </a:fontRef>
+        </p:style>
+        <p:txBody>
+          <a:bodyPr rtlCol="0" anchor="ctr"/>
+          <a:lstStyle/>
+          <a:p>
+            <a:r>
+              <a:rPr lang="en-US" altLang="zh-CN" sz="1400" dirty="0">
+                <a:solidFill>
+                  <a:schemeClr val="tx1"/>
+                </a:solidFill>
+              </a:rPr>
+              <a:t>Output</a:t>
+            </a:r>
+            <a:r>
+              <a:rPr lang="zh-CN" altLang="en-US" sz="1400" dirty="0">
+                <a:solidFill>
+                  <a:schemeClr val="tx1"/>
+                </a:solidFill>
+              </a:rPr>
+              <a:t> </a:t>
+            </a:r>
+            <a:r>
+              <a:rPr lang="en-US" altLang="zh-CN" sz="1400" dirty="0">
+                <a:solidFill>
+                  <a:schemeClr val="tx1"/>
+                </a:solidFill>
+              </a:rPr>
+              <a:t>text</a:t>
+            </a:r>
+            <a:endParaRPr lang="en-US" sz="1400" dirty="0">
+              <a:solidFill>
+                <a:schemeClr val="tx1"/>
+              </a:solidFill>
+            </a:endParaRPr>
+          </a:p>
+        </p:txBody>
+      </p:sp>
+      <p:sp>
+        <p:nvSpPr>
+          <p:cNvPr id="99" name="Rounded Rectangle 98">
+            <a:extLst>
+              <a:ext uri="{FF2B5EF4-FFF2-40B4-BE49-F238E27FC236}">
+                <a16:creationId xmlns:a16="http://schemas.microsoft.com/office/drawing/2014/main" id="{29298D02-0D7B-A3E5-8525-20BA77383CAE}"/>
+              </a:ext>
+            </a:extLst>
+          </p:cNvPr>
+          <p:cNvSpPr/>
+          <p:nvPr/>
+        </p:nvSpPr>
+        <p:spPr>
+          <a:xfrm>
+            <a:off x="457200" y="4570247"/>
+            <a:ext cx="11195538" cy="1940163"/>
+          </a:xfrm>
+          <a:prstGeom prst="roundRect">
+            <a:avLst/>
+          </a:prstGeom>
+          <a:solidFill>
+            <a:schemeClr val="bg1"/>
+          </a:solidFill>
+          <a:ln>
+            <a:prstDash val="sysDash"/>
+          </a:ln>
+        </p:spPr>
+        <p:style>
+          <a:lnRef idx="2">
+            <a:schemeClr val="accent1">
+              <a:shade val="15000"/>
+            </a:schemeClr>
+          </a:lnRef>
+          <a:fillRef idx="1">
+            <a:schemeClr val="accent1"/>
+          </a:fillRef>
+          <a:effectRef idx="0">
+            <a:schemeClr val="accent1"/>
+          </a:effectRef>
+          <a:fontRef idx="minor">
+            <a:schemeClr val="lt1"/>
+          </a:fontRef>
+        </p:style>
+        <p:txBody>
+          <a:bodyPr rtlCol="0" anchor="ctr"/>
+          <a:lstStyle/>
+          <a:p>
+            <a:pPr algn="ctr"/>
+            <a:endParaRPr lang="en-US"/>
+          </a:p>
+        </p:txBody>
+      </p:sp>
+      <p:sp>
+        <p:nvSpPr>
+          <p:cNvPr id="94" name="TextBox 93">
+            <a:extLst>
+              <a:ext uri="{FF2B5EF4-FFF2-40B4-BE49-F238E27FC236}">
+                <a16:creationId xmlns:a16="http://schemas.microsoft.com/office/drawing/2014/main" id="{E6FD5FE4-87AE-7C7D-3732-307D2C1DA2B0}"/>
+              </a:ext>
+            </a:extLst>
+          </p:cNvPr>
+          <p:cNvSpPr txBox="1"/>
+          <p:nvPr/>
+        </p:nvSpPr>
+        <p:spPr>
+          <a:xfrm>
+            <a:off x="4108496" y="5121089"/>
+            <a:ext cx="2228916" cy="307777"/>
+          </a:xfrm>
+          <a:prstGeom prst="rect">
+            <a:avLst/>
+          </a:prstGeom>
+          <a:noFill/>
+        </p:spPr>
+        <p:txBody>
+          <a:bodyPr wrap="square" rtlCol="0">
+            <a:spAutoFit/>
+          </a:bodyPr>
+          <a:lstStyle/>
+          <a:p>
+            <a:r>
+              <a:rPr lang="en-US" altLang="zh-CN" sz="1400" dirty="0"/>
+              <a:t>Split</a:t>
+            </a:r>
+            <a:r>
+              <a:rPr lang="zh-CN" altLang="en-US" sz="1400" dirty="0"/>
+              <a:t> </a:t>
+            </a:r>
+            <a:r>
+              <a:rPr lang="en-US" altLang="zh-CN" sz="1400" dirty="0"/>
+              <a:t>+</a:t>
+            </a:r>
+            <a:r>
+              <a:rPr lang="zh-CN" altLang="en-US" sz="1400" dirty="0"/>
+              <a:t> </a:t>
+            </a:r>
+            <a:r>
+              <a:rPr lang="en-US" altLang="zh-CN" sz="1400" dirty="0"/>
+              <a:t>Position</a:t>
+            </a:r>
+            <a:r>
+              <a:rPr lang="zh-CN" altLang="en-US" sz="1400" dirty="0"/>
+              <a:t> </a:t>
+            </a:r>
+            <a:r>
+              <a:rPr lang="en-US" altLang="zh-CN" sz="1400" dirty="0"/>
+              <a:t>Embedding</a:t>
+            </a:r>
+            <a:endParaRPr lang="en-US" sz="1400" dirty="0"/>
+          </a:p>
+        </p:txBody>
+      </p:sp>
+      <p:pic>
+        <p:nvPicPr>
+          <p:cNvPr id="95" name="Picture 94">
+            <a:extLst>
+              <a:ext uri="{FF2B5EF4-FFF2-40B4-BE49-F238E27FC236}">
+                <a16:creationId xmlns:a16="http://schemas.microsoft.com/office/drawing/2014/main" id="{82701329-01B4-6241-5F8E-FF1FCD188986}"/>
+              </a:ext>
+            </a:extLst>
+          </p:cNvPr>
+          <p:cNvPicPr>
+            <a:picLocks noChangeAspect="1"/>
+          </p:cNvPicPr>
+          <p:nvPr/>
+        </p:nvPicPr>
+        <p:blipFill>
+          <a:blip r:embed="rId3"/>
+          <a:stretch>
+            <a:fillRect/>
+          </a:stretch>
+        </p:blipFill>
+        <p:spPr>
+          <a:xfrm>
+            <a:off x="2392960" y="5417848"/>
+            <a:ext cx="941817" cy="928458"/>
+          </a:xfrm>
+          <a:prstGeom prst="rect">
+            <a:avLst/>
+          </a:prstGeom>
+        </p:spPr>
+      </p:pic>
+      <p:sp>
+        <p:nvSpPr>
+          <p:cNvPr id="96" name="TextBox 95">
+            <a:extLst>
+              <a:ext uri="{FF2B5EF4-FFF2-40B4-BE49-F238E27FC236}">
+                <a16:creationId xmlns:a16="http://schemas.microsoft.com/office/drawing/2014/main" id="{BCCF3236-A221-B990-DA6A-474540A36AC7}"/>
+              </a:ext>
+            </a:extLst>
+          </p:cNvPr>
+          <p:cNvSpPr txBox="1"/>
+          <p:nvPr/>
+        </p:nvSpPr>
+        <p:spPr>
+          <a:xfrm>
+            <a:off x="2217939" y="5121089"/>
+            <a:ext cx="1387753" cy="307777"/>
+          </a:xfrm>
+          <a:prstGeom prst="rect">
+            <a:avLst/>
+          </a:prstGeom>
+          <a:noFill/>
+        </p:spPr>
+        <p:txBody>
+          <a:bodyPr wrap="square" rtlCol="0">
+            <a:spAutoFit/>
+          </a:bodyPr>
+          <a:lstStyle/>
+          <a:p>
+            <a:r>
+              <a:rPr lang="en-US" altLang="zh-CN" sz="1400" dirty="0"/>
+              <a:t>Resize</a:t>
+            </a:r>
+            <a:r>
+              <a:rPr lang="zh-CN" altLang="en-US" sz="1400" dirty="0"/>
+              <a:t> </a:t>
+            </a:r>
+            <a:r>
+              <a:rPr lang="en-US" altLang="zh-CN" sz="1400" dirty="0"/>
+              <a:t>+</a:t>
+            </a:r>
+            <a:r>
+              <a:rPr lang="zh-CN" altLang="en-US" sz="1400" dirty="0"/>
+              <a:t> </a:t>
+            </a:r>
+            <a:r>
+              <a:rPr lang="en-US" altLang="zh-CN" sz="1400" dirty="0"/>
+              <a:t>Patch</a:t>
+            </a:r>
+            <a:r>
+              <a:rPr lang="zh-CN" altLang="en-US" sz="1400" dirty="0"/>
+              <a:t> </a:t>
+            </a:r>
+            <a:endParaRPr lang="en-US" sz="1400" dirty="0"/>
+          </a:p>
+        </p:txBody>
+      </p:sp>
+      <p:sp>
+        <p:nvSpPr>
+          <p:cNvPr id="98" name="Can 97">
+            <a:extLst>
+              <a:ext uri="{FF2B5EF4-FFF2-40B4-BE49-F238E27FC236}">
+                <a16:creationId xmlns:a16="http://schemas.microsoft.com/office/drawing/2014/main" id="{5B80560D-7226-7073-5026-287D56BD0A19}"/>
+              </a:ext>
+            </a:extLst>
+          </p:cNvPr>
+          <p:cNvSpPr/>
+          <p:nvPr/>
+        </p:nvSpPr>
+        <p:spPr>
+          <a:xfrm>
+            <a:off x="821443" y="5355120"/>
+            <a:ext cx="1008043" cy="969484"/>
+          </a:xfrm>
+          <a:prstGeom prst="can">
+            <a:avLst/>
+          </a:prstGeom>
+          <a:solidFill>
+            <a:schemeClr val="tx2">
+              <a:lumMod val="25000"/>
+              <a:lumOff val="75000"/>
+            </a:schemeClr>
+          </a:solidFill>
+        </p:spPr>
+        <p:style>
+          <a:lnRef idx="2">
+            <a:schemeClr val="accent1">
+              <a:shade val="15000"/>
+            </a:schemeClr>
+          </a:lnRef>
+          <a:fillRef idx="1">
+            <a:schemeClr val="accent1"/>
+          </a:fillRef>
+          <a:effectRef idx="0">
+            <a:schemeClr val="accent1"/>
+          </a:effectRef>
+          <a:fontRef idx="minor">
+            <a:schemeClr val="lt1"/>
+          </a:fontRef>
+        </p:style>
+        <p:txBody>
+          <a:bodyPr rtlCol="0" anchor="ctr"/>
+          <a:lstStyle/>
+          <a:p>
+            <a:pPr algn="ctr"/>
+            <a:r>
+              <a:rPr lang="en-US" dirty="0"/>
+              <a:t>Image</a:t>
+            </a:r>
+            <a:r>
+              <a:rPr lang="zh-CN" altLang="en-US" dirty="0"/>
+              <a:t> </a:t>
+            </a:r>
+            <a:r>
+              <a:rPr lang="en-US" altLang="zh-CN" dirty="0"/>
+              <a:t>Dataset</a:t>
+            </a:r>
+            <a:endParaRPr lang="en-US" dirty="0"/>
+          </a:p>
+        </p:txBody>
+      </p:sp>
+      <p:sp>
+        <p:nvSpPr>
+          <p:cNvPr id="100" name="TextBox 99">
+            <a:extLst>
+              <a:ext uri="{FF2B5EF4-FFF2-40B4-BE49-F238E27FC236}">
+                <a16:creationId xmlns:a16="http://schemas.microsoft.com/office/drawing/2014/main" id="{C898C339-698F-CEBE-1C2E-2BA2CBA0426C}"/>
+              </a:ext>
+            </a:extLst>
+          </p:cNvPr>
+          <p:cNvSpPr txBox="1"/>
+          <p:nvPr/>
+        </p:nvSpPr>
+        <p:spPr>
+          <a:xfrm>
+            <a:off x="5851345" y="4792985"/>
+            <a:ext cx="1605271" cy="369332"/>
+          </a:xfrm>
+          <a:prstGeom prst="rect">
+            <a:avLst/>
+          </a:prstGeom>
+          <a:noFill/>
+        </p:spPr>
+        <p:txBody>
+          <a:bodyPr wrap="square" rtlCol="0">
+            <a:spAutoFit/>
+          </a:bodyPr>
+          <a:lstStyle/>
+          <a:p>
+            <a:r>
+              <a:rPr lang="en-US" altLang="zh-CN" dirty="0"/>
+              <a:t>Edge</a:t>
+            </a:r>
+            <a:r>
+              <a:rPr lang="zh-CN" altLang="en-US" dirty="0"/>
+              <a:t> </a:t>
+            </a:r>
+            <a:r>
+              <a:rPr lang="en-US" altLang="zh-CN" dirty="0"/>
+              <a:t>layer</a:t>
+            </a:r>
+            <a:endParaRPr lang="en-US" dirty="0"/>
+          </a:p>
+        </p:txBody>
+      </p:sp>
+      <p:sp>
+        <p:nvSpPr>
+          <p:cNvPr id="108" name="Right Arrow 107">
+            <a:extLst>
+              <a:ext uri="{FF2B5EF4-FFF2-40B4-BE49-F238E27FC236}">
+                <a16:creationId xmlns:a16="http://schemas.microsoft.com/office/drawing/2014/main" id="{07CA554A-2E36-44E7-2695-33EC01B84569}"/>
+              </a:ext>
+            </a:extLst>
+          </p:cNvPr>
+          <p:cNvSpPr/>
+          <p:nvPr/>
+        </p:nvSpPr>
+        <p:spPr>
+          <a:xfrm>
+            <a:off x="3453281" y="5677552"/>
+            <a:ext cx="563430" cy="345201"/>
+          </a:xfrm>
+          <a:prstGeom prst="rightArrow">
+            <a:avLst/>
+          </a:prstGeom>
+          <a:solidFill>
+            <a:schemeClr val="bg1"/>
+          </a:solidFill>
+          <a:ln>
+            <a:prstDash val="dash"/>
+          </a:ln>
+        </p:spPr>
+        <p:style>
+          <a:lnRef idx="2">
+            <a:schemeClr val="accent1">
+              <a:shade val="15000"/>
+            </a:schemeClr>
+          </a:lnRef>
+          <a:fillRef idx="1">
+            <a:schemeClr val="accent1"/>
+          </a:fillRef>
+          <a:effectRef idx="0">
+            <a:schemeClr val="accent1"/>
+          </a:effectRef>
+          <a:fontRef idx="minor">
+            <a:schemeClr val="lt1"/>
+          </a:fontRef>
+        </p:style>
+        <p:txBody>
+          <a:bodyPr rtlCol="0" anchor="ctr"/>
+          <a:lstStyle/>
+          <a:p>
+            <a:pPr algn="ctr"/>
+            <a:endParaRPr lang="en-US"/>
+          </a:p>
+        </p:txBody>
+      </p:sp>
+      <p:sp>
+        <p:nvSpPr>
+          <p:cNvPr id="109" name="Right Arrow 108">
+            <a:extLst>
+              <a:ext uri="{FF2B5EF4-FFF2-40B4-BE49-F238E27FC236}">
+                <a16:creationId xmlns:a16="http://schemas.microsoft.com/office/drawing/2014/main" id="{8992D15B-AAEE-242C-B6AC-9AB31962A241}"/>
+              </a:ext>
+            </a:extLst>
+          </p:cNvPr>
+          <p:cNvSpPr/>
+          <p:nvPr/>
+        </p:nvSpPr>
+        <p:spPr>
+          <a:xfrm>
+            <a:off x="1947487" y="5699492"/>
+            <a:ext cx="433311" cy="301319"/>
+          </a:xfrm>
+          <a:prstGeom prst="rightArrow">
+            <a:avLst/>
+          </a:prstGeom>
+          <a:solidFill>
+            <a:schemeClr val="tx2">
+              <a:lumMod val="25000"/>
+              <a:lumOff val="75000"/>
+            </a:schemeClr>
+          </a:solidFill>
+          <a:ln>
+            <a:prstDash val="dash"/>
+          </a:ln>
+        </p:spPr>
+        <p:style>
+          <a:lnRef idx="2">
+            <a:schemeClr val="accent1">
+              <a:shade val="15000"/>
+            </a:schemeClr>
+          </a:lnRef>
+          <a:fillRef idx="1">
+            <a:schemeClr val="accent1"/>
+          </a:fillRef>
+          <a:effectRef idx="0">
+            <a:schemeClr val="accent1"/>
+          </a:effectRef>
+          <a:fontRef idx="minor">
+            <a:schemeClr val="lt1"/>
+          </a:fontRef>
+        </p:style>
+        <p:txBody>
+          <a:bodyPr rtlCol="0" anchor="ctr"/>
+          <a:lstStyle/>
+          <a:p>
+            <a:pPr algn="ctr"/>
+            <a:endParaRPr lang="en-US"/>
+          </a:p>
+        </p:txBody>
+      </p:sp>
+      <p:sp>
+        <p:nvSpPr>
+          <p:cNvPr id="110" name="Rounded Rectangle 109">
+            <a:extLst>
+              <a:ext uri="{FF2B5EF4-FFF2-40B4-BE49-F238E27FC236}">
+                <a16:creationId xmlns:a16="http://schemas.microsoft.com/office/drawing/2014/main" id="{7EBC1A99-CCAC-5D05-EE4D-75D7F43BB26C}"/>
+              </a:ext>
+            </a:extLst>
+          </p:cNvPr>
+          <p:cNvSpPr/>
+          <p:nvPr/>
+        </p:nvSpPr>
+        <p:spPr>
+          <a:xfrm>
+            <a:off x="457202" y="347590"/>
+            <a:ext cx="3827429" cy="3567918"/>
+          </a:xfrm>
+          <a:prstGeom prst="roundRect">
+            <a:avLst/>
+          </a:prstGeom>
+          <a:solidFill>
+            <a:schemeClr val="bg1"/>
+          </a:solidFill>
+          <a:ln>
+            <a:prstDash val="sysDash"/>
+          </a:ln>
+        </p:spPr>
+        <p:style>
+          <a:lnRef idx="2">
+            <a:schemeClr val="accent1">
+              <a:shade val="15000"/>
+            </a:schemeClr>
+          </a:lnRef>
+          <a:fillRef idx="1">
+            <a:schemeClr val="accent1"/>
+          </a:fillRef>
+          <a:effectRef idx="0">
+            <a:schemeClr val="accent1"/>
+          </a:effectRef>
+          <a:fontRef idx="minor">
+            <a:schemeClr val="lt1"/>
+          </a:fontRef>
+        </p:style>
+        <p:txBody>
+          <a:bodyPr rtlCol="0" anchor="ctr"/>
+          <a:lstStyle/>
+          <a:p>
+            <a:pPr algn="ctr"/>
+            <a:endParaRPr lang="en-US"/>
+          </a:p>
+        </p:txBody>
+      </p:sp>
+      <p:sp>
+        <p:nvSpPr>
+          <p:cNvPr id="111" name="TextBox 110">
+            <a:extLst>
+              <a:ext uri="{FF2B5EF4-FFF2-40B4-BE49-F238E27FC236}">
+                <a16:creationId xmlns:a16="http://schemas.microsoft.com/office/drawing/2014/main" id="{615B0621-85FA-801B-74E5-9ED5E3E83454}"/>
+              </a:ext>
+            </a:extLst>
+          </p:cNvPr>
+          <p:cNvSpPr txBox="1"/>
+          <p:nvPr/>
+        </p:nvSpPr>
+        <p:spPr>
+          <a:xfrm>
+            <a:off x="1564039" y="369193"/>
+            <a:ext cx="1751765" cy="369332"/>
+          </a:xfrm>
+          <a:prstGeom prst="rect">
+            <a:avLst/>
+          </a:prstGeom>
+          <a:noFill/>
+        </p:spPr>
+        <p:txBody>
+          <a:bodyPr wrap="square" rtlCol="0">
+            <a:spAutoFit/>
+          </a:bodyPr>
+          <a:lstStyle/>
+          <a:p>
+            <a:r>
+              <a:rPr lang="en-US" altLang="zh-CN" dirty="0"/>
+              <a:t>Cloud</a:t>
+            </a:r>
+            <a:r>
+              <a:rPr lang="zh-CN" altLang="en-US" dirty="0"/>
+              <a:t> </a:t>
+            </a:r>
+            <a:r>
+              <a:rPr lang="en-US" altLang="zh-CN" dirty="0"/>
+              <a:t>Service</a:t>
+            </a:r>
+            <a:endParaRPr lang="en-US" dirty="0"/>
+          </a:p>
+        </p:txBody>
+      </p:sp>
+      <p:sp>
+        <p:nvSpPr>
+          <p:cNvPr id="112" name="Right Arrow 111">
+            <a:extLst>
+              <a:ext uri="{FF2B5EF4-FFF2-40B4-BE49-F238E27FC236}">
+                <a16:creationId xmlns:a16="http://schemas.microsoft.com/office/drawing/2014/main" id="{83AA4F44-F259-B634-F88D-F1C904477A0F}"/>
+              </a:ext>
+            </a:extLst>
+          </p:cNvPr>
+          <p:cNvSpPr/>
+          <p:nvPr/>
+        </p:nvSpPr>
+        <p:spPr>
+          <a:xfrm>
+            <a:off x="6458462" y="5741400"/>
+            <a:ext cx="941817" cy="281354"/>
+          </a:xfrm>
+          <a:prstGeom prst="rightArrow">
+            <a:avLst/>
+          </a:prstGeom>
+          <a:solidFill>
+            <a:schemeClr val="bg1"/>
+          </a:solidFill>
+          <a:ln>
+            <a:prstDash val="dash"/>
+          </a:ln>
+        </p:spPr>
+        <p:style>
+          <a:lnRef idx="2">
+            <a:schemeClr val="accent1">
+              <a:shade val="15000"/>
+            </a:schemeClr>
+          </a:lnRef>
+          <a:fillRef idx="1">
+            <a:schemeClr val="accent1"/>
+          </a:fillRef>
+          <a:effectRef idx="0">
+            <a:schemeClr val="accent1"/>
+          </a:effectRef>
+          <a:fontRef idx="minor">
+            <a:schemeClr val="lt1"/>
+          </a:fontRef>
+        </p:style>
+        <p:txBody>
+          <a:bodyPr rtlCol="0" anchor="ctr"/>
+          <a:lstStyle/>
+          <a:p>
+            <a:pPr algn="ctr"/>
+            <a:endParaRPr lang="en-US"/>
+          </a:p>
+        </p:txBody>
+      </p:sp>
+      <p:pic>
+        <p:nvPicPr>
+          <p:cNvPr id="113" name="Picture 112">
+            <a:extLst>
+              <a:ext uri="{FF2B5EF4-FFF2-40B4-BE49-F238E27FC236}">
+                <a16:creationId xmlns:a16="http://schemas.microsoft.com/office/drawing/2014/main" id="{D5163FF7-519D-44CF-1598-5A0EB9CADE24}"/>
+              </a:ext>
+            </a:extLst>
+          </p:cNvPr>
+          <p:cNvPicPr>
+            <a:picLocks noChangeAspect="1"/>
+          </p:cNvPicPr>
+          <p:nvPr/>
+        </p:nvPicPr>
+        <p:blipFill>
+          <a:blip r:embed="rId4"/>
+          <a:stretch>
+            <a:fillRect/>
+          </a:stretch>
+        </p:blipFill>
+        <p:spPr>
+          <a:xfrm>
+            <a:off x="7564848" y="5508639"/>
+            <a:ext cx="797508" cy="797508"/>
+          </a:xfrm>
+          <a:prstGeom prst="rect">
+            <a:avLst/>
+          </a:prstGeom>
+        </p:spPr>
+      </p:pic>
+      <p:sp>
+        <p:nvSpPr>
+          <p:cNvPr id="114" name="TextBox 113">
+            <a:extLst>
+              <a:ext uri="{FF2B5EF4-FFF2-40B4-BE49-F238E27FC236}">
+                <a16:creationId xmlns:a16="http://schemas.microsoft.com/office/drawing/2014/main" id="{87B42F7E-263E-0B6A-902D-F0F9D3DF2A46}"/>
+              </a:ext>
+            </a:extLst>
+          </p:cNvPr>
+          <p:cNvSpPr txBox="1"/>
+          <p:nvPr/>
+        </p:nvSpPr>
+        <p:spPr>
+          <a:xfrm>
+            <a:off x="7366300" y="5121089"/>
+            <a:ext cx="2228916" cy="307777"/>
+          </a:xfrm>
+          <a:prstGeom prst="rect">
+            <a:avLst/>
+          </a:prstGeom>
+          <a:noFill/>
+        </p:spPr>
+        <p:txBody>
+          <a:bodyPr wrap="square" rtlCol="0">
+            <a:spAutoFit/>
+          </a:bodyPr>
+          <a:lstStyle/>
+          <a:p>
+            <a:r>
+              <a:rPr lang="en-US" altLang="zh-CN" sz="1400" dirty="0" err="1"/>
+              <a:t>Encypted</a:t>
+            </a:r>
+            <a:r>
+              <a:rPr lang="zh-CN" altLang="en-US" sz="1400" dirty="0"/>
+              <a:t> </a:t>
+            </a:r>
+            <a:r>
+              <a:rPr lang="en-US" altLang="zh-CN" sz="1400" dirty="0"/>
+              <a:t>data</a:t>
+            </a:r>
+            <a:endParaRPr lang="en-US" sz="1400" dirty="0"/>
+          </a:p>
+        </p:txBody>
+      </p:sp>
+      <p:pic>
+        <p:nvPicPr>
+          <p:cNvPr id="115" name="Picture 114">
+            <a:extLst>
+              <a:ext uri="{FF2B5EF4-FFF2-40B4-BE49-F238E27FC236}">
+                <a16:creationId xmlns:a16="http://schemas.microsoft.com/office/drawing/2014/main" id="{9B55552B-CAB8-2416-3762-9F2DCD18B72A}"/>
+              </a:ext>
+            </a:extLst>
+          </p:cNvPr>
+          <p:cNvPicPr>
+            <a:picLocks noChangeAspect="1"/>
+          </p:cNvPicPr>
+          <p:nvPr/>
+        </p:nvPicPr>
+        <p:blipFill>
+          <a:blip r:embed="rId5"/>
+          <a:stretch>
+            <a:fillRect/>
+          </a:stretch>
+        </p:blipFill>
+        <p:spPr>
+          <a:xfrm>
+            <a:off x="9302696" y="5421917"/>
+            <a:ext cx="941817" cy="941817"/>
+          </a:xfrm>
+          <a:prstGeom prst="rect">
+            <a:avLst/>
+          </a:prstGeom>
+        </p:spPr>
+      </p:pic>
+      <p:sp>
+        <p:nvSpPr>
+          <p:cNvPr id="116" name="TextBox 115">
+            <a:extLst>
+              <a:ext uri="{FF2B5EF4-FFF2-40B4-BE49-F238E27FC236}">
+                <a16:creationId xmlns:a16="http://schemas.microsoft.com/office/drawing/2014/main" id="{63997B99-74B0-040E-B52E-D4343DB5A519}"/>
+              </a:ext>
+            </a:extLst>
+          </p:cNvPr>
+          <p:cNvSpPr txBox="1"/>
+          <p:nvPr/>
+        </p:nvSpPr>
+        <p:spPr>
+          <a:xfrm>
+            <a:off x="9362483" y="5121089"/>
+            <a:ext cx="2228916" cy="307777"/>
+          </a:xfrm>
+          <a:prstGeom prst="rect">
+            <a:avLst/>
+          </a:prstGeom>
+          <a:noFill/>
+        </p:spPr>
+        <p:txBody>
+          <a:bodyPr wrap="square" rtlCol="0">
+            <a:spAutoFit/>
+          </a:bodyPr>
+          <a:lstStyle/>
+          <a:p>
+            <a:r>
+              <a:rPr lang="en-US" altLang="zh-CN" sz="1400" dirty="0"/>
+              <a:t>Metadata</a:t>
+            </a:r>
+            <a:r>
+              <a:rPr lang="zh-CN" altLang="en-US" sz="1400" dirty="0"/>
+              <a:t> </a:t>
+            </a:r>
+            <a:r>
+              <a:rPr lang="en-US" altLang="zh-CN" sz="1400" dirty="0"/>
+              <a:t>+</a:t>
+            </a:r>
+            <a:r>
+              <a:rPr lang="zh-CN" altLang="en-US" sz="1400" dirty="0"/>
+              <a:t> </a:t>
+            </a:r>
+            <a:r>
+              <a:rPr lang="en-US" altLang="zh-CN" sz="1400" dirty="0"/>
+              <a:t>encoder</a:t>
+            </a:r>
+            <a:endParaRPr lang="en-US" sz="1400" dirty="0"/>
+          </a:p>
+        </p:txBody>
+      </p:sp>
+      <p:pic>
+        <p:nvPicPr>
+          <p:cNvPr id="117" name="Picture 116">
+            <a:extLst>
+              <a:ext uri="{FF2B5EF4-FFF2-40B4-BE49-F238E27FC236}">
+                <a16:creationId xmlns:a16="http://schemas.microsoft.com/office/drawing/2014/main" id="{45F576A8-E3A8-218C-7459-267BFDCF0EE9}"/>
+              </a:ext>
+            </a:extLst>
+          </p:cNvPr>
+          <p:cNvPicPr>
+            <a:picLocks noChangeAspect="1"/>
+          </p:cNvPicPr>
+          <p:nvPr/>
+        </p:nvPicPr>
+        <p:blipFill>
+          <a:blip r:embed="rId6"/>
+          <a:stretch>
+            <a:fillRect/>
+          </a:stretch>
+        </p:blipFill>
+        <p:spPr>
+          <a:xfrm>
+            <a:off x="10533848" y="5427727"/>
+            <a:ext cx="907873" cy="907873"/>
+          </a:xfrm>
+          <a:prstGeom prst="rect">
+            <a:avLst/>
+          </a:prstGeom>
+        </p:spPr>
+      </p:pic>
+      <p:sp>
+        <p:nvSpPr>
+          <p:cNvPr id="119" name="TextBox 118">
+            <a:extLst>
+              <a:ext uri="{FF2B5EF4-FFF2-40B4-BE49-F238E27FC236}">
+                <a16:creationId xmlns:a16="http://schemas.microsoft.com/office/drawing/2014/main" id="{4736DC92-8B38-D0DB-E31C-F99C86253667}"/>
+              </a:ext>
+            </a:extLst>
+          </p:cNvPr>
+          <p:cNvSpPr txBox="1"/>
+          <p:nvPr/>
+        </p:nvSpPr>
+        <p:spPr>
+          <a:xfrm>
+            <a:off x="10186654" y="5514934"/>
+            <a:ext cx="844062" cy="830997"/>
+          </a:xfrm>
+          <a:prstGeom prst="rect">
+            <a:avLst/>
+          </a:prstGeom>
+          <a:noFill/>
+        </p:spPr>
+        <p:txBody>
+          <a:bodyPr wrap="square" rtlCol="0">
+            <a:spAutoFit/>
+          </a:bodyPr>
+          <a:lstStyle/>
+          <a:p>
+            <a:r>
+              <a:rPr lang="en-US" altLang="zh-CN" sz="4800" dirty="0"/>
+              <a:t>+</a:t>
+            </a:r>
+            <a:endParaRPr lang="en-US" sz="4800" dirty="0"/>
+          </a:p>
+        </p:txBody>
+      </p:sp>
+      <p:cxnSp>
+        <p:nvCxnSpPr>
+          <p:cNvPr id="127" name="Elbow Connector 126">
+            <a:extLst>
+              <a:ext uri="{FF2B5EF4-FFF2-40B4-BE49-F238E27FC236}">
+                <a16:creationId xmlns:a16="http://schemas.microsoft.com/office/drawing/2014/main" id="{0573E0EC-E657-6C44-D713-95C27F9BA53D}"/>
+              </a:ext>
+            </a:extLst>
+          </p:cNvPr>
+          <p:cNvCxnSpPr>
+            <a:cxnSpLocks/>
+            <a:stCxn id="110" idx="1"/>
+            <a:endCxn id="99" idx="3"/>
+          </p:cNvCxnSpPr>
+          <p:nvPr/>
+        </p:nvCxnSpPr>
+        <p:spPr>
+          <a:xfrm rot="10800000" flipH="1" flipV="1">
+            <a:off x="457202" y="2131549"/>
+            <a:ext cx="11195536" cy="3408780"/>
+          </a:xfrm>
+          <a:prstGeom prst="bentConnector5">
+            <a:avLst>
+              <a:gd name="adj1" fmla="val -2042"/>
+              <a:gd name="adj2" fmla="val 61938"/>
+              <a:gd name="adj3" fmla="val 102042"/>
+            </a:avLst>
+          </a:prstGeom>
+          <a:ln>
+            <a:headEnd type="triangle"/>
+          </a:ln>
+        </p:spPr>
+        <p:style>
+          <a:lnRef idx="2">
+            <a:schemeClr val="accent1"/>
+          </a:lnRef>
+          <a:fillRef idx="0">
+            <a:schemeClr val="accent1"/>
+          </a:fillRef>
+          <a:effectRef idx="1">
+            <a:schemeClr val="accent1"/>
+          </a:effectRef>
+          <a:fontRef idx="minor">
+            <a:schemeClr val="tx1"/>
+          </a:fontRef>
+        </p:style>
+      </p:cxnSp>
+      <p:pic>
+        <p:nvPicPr>
+          <p:cNvPr id="134" name="Picture 133">
+            <a:extLst>
+              <a:ext uri="{FF2B5EF4-FFF2-40B4-BE49-F238E27FC236}">
+                <a16:creationId xmlns:a16="http://schemas.microsoft.com/office/drawing/2014/main" id="{2DAB9230-1751-37DD-D964-89DF8CDC4E30}"/>
+              </a:ext>
+            </a:extLst>
+          </p:cNvPr>
+          <p:cNvPicPr>
+            <a:picLocks noChangeAspect="1"/>
+          </p:cNvPicPr>
+          <p:nvPr/>
+        </p:nvPicPr>
+        <p:blipFill>
+          <a:blip r:embed="rId7"/>
+          <a:stretch>
+            <a:fillRect/>
+          </a:stretch>
+        </p:blipFill>
+        <p:spPr>
+          <a:xfrm>
+            <a:off x="1023554" y="1123653"/>
+            <a:ext cx="2640860" cy="816607"/>
+          </a:xfrm>
+          <a:prstGeom prst="rect">
+            <a:avLst/>
+          </a:prstGeom>
+        </p:spPr>
+      </p:pic>
+      <p:sp>
+        <p:nvSpPr>
+          <p:cNvPr id="137" name="TextBox 136">
+            <a:extLst>
+              <a:ext uri="{FF2B5EF4-FFF2-40B4-BE49-F238E27FC236}">
+                <a16:creationId xmlns:a16="http://schemas.microsoft.com/office/drawing/2014/main" id="{26040C58-425C-5001-889E-177C33309617}"/>
+              </a:ext>
+            </a:extLst>
+          </p:cNvPr>
+          <p:cNvSpPr txBox="1"/>
+          <p:nvPr/>
+        </p:nvSpPr>
+        <p:spPr>
+          <a:xfrm>
+            <a:off x="1477863" y="759564"/>
+            <a:ext cx="2228916" cy="307777"/>
+          </a:xfrm>
+          <a:prstGeom prst="rect">
+            <a:avLst/>
+          </a:prstGeom>
+          <a:noFill/>
+        </p:spPr>
+        <p:txBody>
+          <a:bodyPr wrap="square" rtlCol="0">
+            <a:spAutoFit/>
+          </a:bodyPr>
+          <a:lstStyle/>
+          <a:p>
+            <a:r>
+              <a:rPr lang="en-US" altLang="zh-CN" sz="1400" dirty="0"/>
+              <a:t>Reconstruct</a:t>
+            </a:r>
+            <a:r>
+              <a:rPr lang="zh-CN" altLang="en-US" sz="1400" dirty="0"/>
+              <a:t> </a:t>
+            </a:r>
+            <a:r>
+              <a:rPr lang="en-US" altLang="zh-CN" sz="1400" dirty="0"/>
+              <a:t>embedding</a:t>
+            </a:r>
+            <a:endParaRPr lang="en-US" sz="1400" dirty="0"/>
+          </a:p>
+        </p:txBody>
+      </p:sp>
+      <p:pic>
+        <p:nvPicPr>
+          <p:cNvPr id="140" name="Picture 139">
+            <a:extLst>
+              <a:ext uri="{FF2B5EF4-FFF2-40B4-BE49-F238E27FC236}">
+                <a16:creationId xmlns:a16="http://schemas.microsoft.com/office/drawing/2014/main" id="{6E89CF31-E937-A397-F470-C1752B36E861}"/>
+              </a:ext>
+            </a:extLst>
+          </p:cNvPr>
+          <p:cNvPicPr>
+            <a:picLocks noChangeAspect="1"/>
+          </p:cNvPicPr>
+          <p:nvPr/>
+        </p:nvPicPr>
+        <p:blipFill>
+          <a:blip r:embed="rId8"/>
+          <a:stretch>
+            <a:fillRect/>
+          </a:stretch>
+        </p:blipFill>
+        <p:spPr>
+          <a:xfrm>
+            <a:off x="1146131" y="2840250"/>
+            <a:ext cx="914400" cy="914400"/>
+          </a:xfrm>
+          <a:prstGeom prst="rect">
+            <a:avLst/>
+          </a:prstGeom>
+        </p:spPr>
+      </p:pic>
+      <p:sp>
+        <p:nvSpPr>
+          <p:cNvPr id="141" name="TextBox 140">
+            <a:extLst>
+              <a:ext uri="{FF2B5EF4-FFF2-40B4-BE49-F238E27FC236}">
+                <a16:creationId xmlns:a16="http://schemas.microsoft.com/office/drawing/2014/main" id="{E58912BB-F314-8295-1A6C-5CB7AAC9F65F}"/>
+              </a:ext>
+            </a:extLst>
+          </p:cNvPr>
+          <p:cNvSpPr txBox="1"/>
+          <p:nvPr/>
+        </p:nvSpPr>
+        <p:spPr>
+          <a:xfrm>
+            <a:off x="797363" y="2532473"/>
+            <a:ext cx="2228916" cy="307777"/>
+          </a:xfrm>
+          <a:prstGeom prst="rect">
+            <a:avLst/>
+          </a:prstGeom>
+          <a:noFill/>
+        </p:spPr>
+        <p:txBody>
+          <a:bodyPr wrap="square" rtlCol="0">
+            <a:spAutoFit/>
+          </a:bodyPr>
+          <a:lstStyle/>
+          <a:p>
+            <a:r>
+              <a:rPr lang="en-US" altLang="zh-CN" sz="1400" dirty="0"/>
+              <a:t>Construct</a:t>
+            </a:r>
+            <a:r>
+              <a:rPr lang="zh-CN" altLang="en-US" sz="1400" dirty="0"/>
+              <a:t> </a:t>
+            </a:r>
+            <a:r>
+              <a:rPr lang="en-US" altLang="zh-CN" sz="1400" dirty="0"/>
+              <a:t>prompt</a:t>
+            </a:r>
+            <a:endParaRPr lang="en-US" sz="1400" dirty="0"/>
+          </a:p>
+        </p:txBody>
+      </p:sp>
+      <p:sp>
+        <p:nvSpPr>
+          <p:cNvPr id="142" name="Right Arrow 141">
+            <a:extLst>
+              <a:ext uri="{FF2B5EF4-FFF2-40B4-BE49-F238E27FC236}">
+                <a16:creationId xmlns:a16="http://schemas.microsoft.com/office/drawing/2014/main" id="{161178A5-B23A-8F83-2A37-25756566DBCF}"/>
+              </a:ext>
+            </a:extLst>
+          </p:cNvPr>
+          <p:cNvSpPr/>
+          <p:nvPr/>
+        </p:nvSpPr>
+        <p:spPr>
+          <a:xfrm rot="5400000">
+            <a:off x="2169890" y="2070614"/>
+            <a:ext cx="402051" cy="345201"/>
+          </a:xfrm>
+          <a:prstGeom prst="rightArrow">
+            <a:avLst/>
+          </a:prstGeom>
+          <a:solidFill>
+            <a:schemeClr val="bg1"/>
+          </a:solidFill>
+          <a:ln>
+            <a:prstDash val="dash"/>
+          </a:ln>
+        </p:spPr>
+        <p:style>
+          <a:lnRef idx="2">
+            <a:schemeClr val="accent1">
+              <a:shade val="15000"/>
+            </a:schemeClr>
+          </a:lnRef>
+          <a:fillRef idx="1">
+            <a:schemeClr val="accent1"/>
+          </a:fillRef>
+          <a:effectRef idx="0">
+            <a:schemeClr val="accent1"/>
+          </a:effectRef>
+          <a:fontRef idx="minor">
+            <a:schemeClr val="lt1"/>
+          </a:fontRef>
+        </p:style>
+        <p:txBody>
+          <a:bodyPr rtlCol="0" anchor="ctr"/>
+          <a:lstStyle/>
+          <a:p>
+            <a:pPr algn="ctr"/>
+            <a:endParaRPr lang="en-US"/>
+          </a:p>
+        </p:txBody>
+      </p:sp>
+      <p:sp>
+        <p:nvSpPr>
+          <p:cNvPr id="143" name="Right Arrow 142">
+            <a:extLst>
+              <a:ext uri="{FF2B5EF4-FFF2-40B4-BE49-F238E27FC236}">
+                <a16:creationId xmlns:a16="http://schemas.microsoft.com/office/drawing/2014/main" id="{06C00B86-FCCF-0594-552F-1B2AA1C69644}"/>
+              </a:ext>
+            </a:extLst>
+          </p:cNvPr>
+          <p:cNvSpPr/>
+          <p:nvPr/>
+        </p:nvSpPr>
+        <p:spPr>
+          <a:xfrm>
+            <a:off x="2130869" y="3095148"/>
+            <a:ext cx="563430" cy="285873"/>
+          </a:xfrm>
+          <a:prstGeom prst="rightArrow">
+            <a:avLst/>
+          </a:prstGeom>
+          <a:solidFill>
+            <a:schemeClr val="bg1"/>
+          </a:solidFill>
+          <a:ln>
+            <a:prstDash val="dash"/>
+          </a:ln>
+        </p:spPr>
+        <p:style>
+          <a:lnRef idx="2">
+            <a:schemeClr val="accent1">
+              <a:shade val="15000"/>
+            </a:schemeClr>
+          </a:lnRef>
+          <a:fillRef idx="1">
+            <a:schemeClr val="accent1"/>
+          </a:fillRef>
+          <a:effectRef idx="0">
+            <a:schemeClr val="accent1"/>
+          </a:effectRef>
+          <a:fontRef idx="minor">
+            <a:schemeClr val="lt1"/>
+          </a:fontRef>
+        </p:style>
+        <p:txBody>
+          <a:bodyPr rtlCol="0" anchor="ctr"/>
+          <a:lstStyle/>
+          <a:p>
+            <a:pPr algn="ctr"/>
+            <a:endParaRPr lang="en-US"/>
+          </a:p>
+        </p:txBody>
+      </p:sp>
+      <p:sp>
+        <p:nvSpPr>
+          <p:cNvPr id="145" name="TextBox 144">
+            <a:extLst>
+              <a:ext uri="{FF2B5EF4-FFF2-40B4-BE49-F238E27FC236}">
+                <a16:creationId xmlns:a16="http://schemas.microsoft.com/office/drawing/2014/main" id="{F469385C-D6E3-CE87-4D9A-592AAFD329E4}"/>
+              </a:ext>
+            </a:extLst>
+          </p:cNvPr>
+          <p:cNvSpPr txBox="1"/>
+          <p:nvPr/>
+        </p:nvSpPr>
+        <p:spPr>
+          <a:xfrm>
+            <a:off x="7416028" y="391845"/>
+            <a:ext cx="2179188" cy="369332"/>
+          </a:xfrm>
+          <a:prstGeom prst="rect">
+            <a:avLst/>
+          </a:prstGeom>
+          <a:noFill/>
+        </p:spPr>
+        <p:txBody>
+          <a:bodyPr wrap="square" rtlCol="0">
+            <a:spAutoFit/>
+          </a:bodyPr>
+          <a:lstStyle/>
+          <a:p>
+            <a:r>
+              <a:rPr lang="en-US" altLang="zh-CN" dirty="0"/>
+              <a:t>Evaluation</a:t>
+            </a:r>
+            <a:r>
+              <a:rPr lang="zh-CN" altLang="en-US" dirty="0"/>
+              <a:t> </a:t>
+            </a:r>
+            <a:r>
+              <a:rPr lang="en-US" altLang="zh-CN" dirty="0"/>
+              <a:t>scripts</a:t>
+            </a:r>
+            <a:endParaRPr lang="en-US" dirty="0"/>
+          </a:p>
+        </p:txBody>
+      </p:sp>
+      <p:pic>
+        <p:nvPicPr>
+          <p:cNvPr id="146" name="Picture 145">
+            <a:extLst>
+              <a:ext uri="{FF2B5EF4-FFF2-40B4-BE49-F238E27FC236}">
+                <a16:creationId xmlns:a16="http://schemas.microsoft.com/office/drawing/2014/main" id="{7F2E7E1C-E5E6-1474-01F5-6F1BF7F9E19A}"/>
+              </a:ext>
+            </a:extLst>
+          </p:cNvPr>
+          <p:cNvPicPr>
+            <a:picLocks noChangeAspect="1"/>
+          </p:cNvPicPr>
+          <p:nvPr/>
+        </p:nvPicPr>
+        <p:blipFill>
+          <a:blip r:embed="rId9"/>
+          <a:stretch>
+            <a:fillRect/>
+          </a:stretch>
+        </p:blipFill>
+        <p:spPr>
+          <a:xfrm>
+            <a:off x="2837650" y="2808346"/>
+            <a:ext cx="826764" cy="826764"/>
+          </a:xfrm>
+          <a:prstGeom prst="rect">
+            <a:avLst/>
+          </a:prstGeom>
+        </p:spPr>
+      </p:pic>
+      <p:sp>
+        <p:nvSpPr>
+          <p:cNvPr id="147" name="TextBox 146">
+            <a:extLst>
+              <a:ext uri="{FF2B5EF4-FFF2-40B4-BE49-F238E27FC236}">
+                <a16:creationId xmlns:a16="http://schemas.microsoft.com/office/drawing/2014/main" id="{FA9691AB-BFEC-1BE3-5A87-305AF1D91BB3}"/>
+              </a:ext>
+            </a:extLst>
+          </p:cNvPr>
+          <p:cNvSpPr txBox="1"/>
+          <p:nvPr/>
+        </p:nvSpPr>
+        <p:spPr>
+          <a:xfrm>
+            <a:off x="2702141" y="2500568"/>
+            <a:ext cx="2228916" cy="307777"/>
+          </a:xfrm>
+          <a:prstGeom prst="rect">
+            <a:avLst/>
+          </a:prstGeom>
+          <a:noFill/>
+        </p:spPr>
+        <p:txBody>
+          <a:bodyPr wrap="square" rtlCol="0">
+            <a:spAutoFit/>
+          </a:bodyPr>
+          <a:lstStyle/>
+          <a:p>
+            <a:r>
+              <a:rPr lang="en-US" altLang="zh-CN" sz="1400" dirty="0"/>
+              <a:t>Generate</a:t>
+            </a:r>
+            <a:r>
+              <a:rPr lang="zh-CN" altLang="en-US" sz="1400" dirty="0"/>
+              <a:t> </a:t>
+            </a:r>
+            <a:r>
+              <a:rPr lang="en-US" altLang="zh-CN" sz="1400" dirty="0"/>
+              <a:t>text</a:t>
+            </a:r>
+            <a:endParaRPr lang="en-US" sz="1400" dirty="0"/>
+          </a:p>
+        </p:txBody>
+      </p:sp>
+      <p:sp>
+        <p:nvSpPr>
+          <p:cNvPr id="150" name="Manual Operation 149">
+            <a:extLst>
+              <a:ext uri="{FF2B5EF4-FFF2-40B4-BE49-F238E27FC236}">
+                <a16:creationId xmlns:a16="http://schemas.microsoft.com/office/drawing/2014/main" id="{5E1C9B84-61FD-6346-1911-F5229E8BA03F}"/>
+              </a:ext>
+            </a:extLst>
+          </p:cNvPr>
+          <p:cNvSpPr/>
+          <p:nvPr/>
+        </p:nvSpPr>
+        <p:spPr>
+          <a:xfrm rot="16200000">
+            <a:off x="6273719" y="1168619"/>
+            <a:ext cx="1333314" cy="687048"/>
+          </a:xfrm>
+          <a:prstGeom prst="flowChartManualOperation">
+            <a:avLst/>
+          </a:prstGeom>
+          <a:solidFill>
+            <a:srgbClr val="DDD6E8"/>
+          </a:solidFill>
+        </p:spPr>
+        <p:style>
+          <a:lnRef idx="2">
+            <a:schemeClr val="accent1">
+              <a:shade val="15000"/>
+            </a:schemeClr>
+          </a:lnRef>
+          <a:fillRef idx="1">
+            <a:schemeClr val="accent1"/>
+          </a:fillRef>
+          <a:effectRef idx="0">
+            <a:schemeClr val="accent1"/>
+          </a:effectRef>
+          <a:fontRef idx="minor">
+            <a:schemeClr val="lt1"/>
+          </a:fontRef>
+        </p:style>
+        <p:txBody>
+          <a:bodyPr vert="vert" rtlCol="0" anchor="ctr"/>
+          <a:lstStyle/>
+          <a:p>
+            <a:pPr algn="ctr"/>
+            <a:r>
+              <a:rPr lang="en-US" altLang="zh-CN" sz="1200" dirty="0">
+                <a:solidFill>
+                  <a:schemeClr val="tx1"/>
+                </a:solidFill>
+              </a:rPr>
+              <a:t>Text</a:t>
+            </a:r>
+            <a:r>
+              <a:rPr lang="zh-CN" altLang="en-US" sz="1200" dirty="0">
+                <a:solidFill>
+                  <a:schemeClr val="tx1"/>
+                </a:solidFill>
+              </a:rPr>
+              <a:t> </a:t>
+            </a:r>
+            <a:r>
+              <a:rPr lang="en-US" altLang="zh-CN" sz="1200" dirty="0">
+                <a:solidFill>
+                  <a:schemeClr val="tx1"/>
+                </a:solidFill>
+              </a:rPr>
+              <a:t>Encoder</a:t>
+            </a:r>
+            <a:endParaRPr lang="en-US" sz="1200" dirty="0">
+              <a:solidFill>
+                <a:schemeClr val="tx1"/>
+              </a:solidFill>
+            </a:endParaRPr>
+          </a:p>
+        </p:txBody>
+      </p:sp>
+      <p:graphicFrame>
+        <p:nvGraphicFramePr>
+          <p:cNvPr id="152" name="Table 151">
+            <a:extLst>
+              <a:ext uri="{FF2B5EF4-FFF2-40B4-BE49-F238E27FC236}">
+                <a16:creationId xmlns:a16="http://schemas.microsoft.com/office/drawing/2014/main" id="{0080C852-815E-28FA-BD57-6ED5B1124453}"/>
+              </a:ext>
+            </a:extLst>
+          </p:cNvPr>
+          <p:cNvGraphicFramePr>
+            <a:graphicFrameLocks noGrp="1"/>
+          </p:cNvGraphicFramePr>
+          <p:nvPr>
+            <p:extLst>
+              <p:ext uri="{D42A27DB-BD31-4B8C-83A1-F6EECF244321}">
+                <p14:modId xmlns:p14="http://schemas.microsoft.com/office/powerpoint/2010/main" val="2318016460"/>
+              </p:ext>
+            </p:extLst>
+          </p:nvPr>
+        </p:nvGraphicFramePr>
+        <p:xfrm>
+          <a:off x="7831596" y="1044435"/>
+          <a:ext cx="1446932" cy="304800"/>
+        </p:xfrm>
+        <a:graphic>
+          <a:graphicData uri="http://schemas.openxmlformats.org/drawingml/2006/table">
+            <a:tbl>
+              <a:tblPr firstRow="1" bandRow="1">
+                <a:tableStyleId>{00A15C55-8517-42AA-B614-E9B94910E393}</a:tableStyleId>
+              </a:tblPr>
+              <a:tblGrid>
+                <a:gridCol w="361733">
+                  <a:extLst>
+                    <a:ext uri="{9D8B030D-6E8A-4147-A177-3AD203B41FA5}">
+                      <a16:colId xmlns:a16="http://schemas.microsoft.com/office/drawing/2014/main" val="819577693"/>
+                    </a:ext>
+                  </a:extLst>
+                </a:gridCol>
+                <a:gridCol w="361733">
+                  <a:extLst>
+                    <a:ext uri="{9D8B030D-6E8A-4147-A177-3AD203B41FA5}">
+                      <a16:colId xmlns:a16="http://schemas.microsoft.com/office/drawing/2014/main" val="279023113"/>
+                    </a:ext>
+                  </a:extLst>
+                </a:gridCol>
+                <a:gridCol w="361733">
+                  <a:extLst>
+                    <a:ext uri="{9D8B030D-6E8A-4147-A177-3AD203B41FA5}">
+                      <a16:colId xmlns:a16="http://schemas.microsoft.com/office/drawing/2014/main" val="4119586817"/>
+                    </a:ext>
+                  </a:extLst>
+                </a:gridCol>
+                <a:gridCol w="361733">
+                  <a:extLst>
+                    <a:ext uri="{9D8B030D-6E8A-4147-A177-3AD203B41FA5}">
+                      <a16:colId xmlns:a16="http://schemas.microsoft.com/office/drawing/2014/main" val="2047394699"/>
+                    </a:ext>
+                  </a:extLst>
+                </a:gridCol>
+              </a:tblGrid>
+              <a:tr h="228465">
+                <a:tc>
+                  <a:txBody>
+                    <a:bodyPr/>
+                    <a:lstStyle/>
+                    <a:p>
+                      <a:r>
+                        <a:rPr lang="en-US" altLang="zh-CN" sz="1200" b="0" dirty="0">
+                          <a:solidFill>
+                            <a:schemeClr val="tx1"/>
+                          </a:solidFill>
+                        </a:rPr>
+                        <a:t>T1</a:t>
+                      </a:r>
+                      <a:endParaRPr lang="en-US" sz="1200" b="0" dirty="0">
+                        <a:solidFill>
+                          <a:schemeClr val="tx1"/>
+                        </a:solidFill>
+                      </a:endParaRPr>
+                    </a:p>
+                  </a:txBody>
+                  <a:tcPr>
+                    <a:lnL w="12700" cap="flat" cmpd="sng" algn="ctr">
+                      <a:solidFill>
+                        <a:schemeClr val="tx1"/>
+                      </a:solidFill>
+                      <a:prstDash val="solid"/>
+                      <a:round/>
+                      <a:headEnd type="none" w="med" len="med"/>
+                      <a:tailEnd type="none" w="med" len="med"/>
+                    </a:lnL>
+                    <a:lnR w="12700" cap="flat" cmpd="sng" algn="ctr">
+                      <a:solidFill>
+                        <a:schemeClr val="tx1"/>
+                      </a:solidFill>
+                      <a:prstDash val="solid"/>
+                      <a:round/>
+                      <a:headEnd type="none" w="med" len="med"/>
+                      <a:tailEnd type="none" w="med" len="med"/>
+                    </a:lnR>
+                    <a:lnT w="12700" cap="flat" cmpd="sng" algn="ctr">
+                      <a:solidFill>
+                        <a:schemeClr val="tx1"/>
+                      </a:solidFill>
+                      <a:prstDash val="solid"/>
+                      <a:round/>
+                      <a:headEnd type="none" w="med" len="med"/>
+                      <a:tailEnd type="none" w="med" len="med"/>
+                    </a:lnT>
+                    <a:lnB w="12700" cap="flat" cmpd="sng" algn="ctr">
+                      <a:solidFill>
+                        <a:schemeClr val="tx1"/>
+                      </a:solidFill>
+                      <a:prstDash val="solid"/>
+                      <a:round/>
+                      <a:headEnd type="none" w="med" len="med"/>
+                      <a:tailEnd type="none" w="med" len="med"/>
+                    </a:lnB>
+                    <a:solidFill>
+                      <a:schemeClr val="tx2">
+                        <a:lumMod val="25000"/>
+                        <a:lumOff val="75000"/>
+                      </a:schemeClr>
+                    </a:solidFill>
+                  </a:tcPr>
+                </a:tc>
+                <a:tc>
+                  <a:txBody>
+                    <a:bodyPr/>
+                    <a:lstStyle/>
+                    <a:p>
+                      <a:r>
+                        <a:rPr lang="en-US" altLang="zh-CN" sz="1200" b="0" dirty="0">
+                          <a:solidFill>
+                            <a:schemeClr val="tx1"/>
+                          </a:solidFill>
+                        </a:rPr>
+                        <a:t>T2</a:t>
+                      </a:r>
+                      <a:endParaRPr lang="en-US" sz="1200" b="0" dirty="0">
+                        <a:solidFill>
+                          <a:schemeClr val="tx1"/>
+                        </a:solidFill>
+                      </a:endParaRPr>
+                    </a:p>
+                  </a:txBody>
+                  <a:tcPr>
+                    <a:lnL w="12700" cap="flat" cmpd="sng" algn="ctr">
+                      <a:solidFill>
+                        <a:schemeClr val="tx1"/>
+                      </a:solidFill>
+                      <a:prstDash val="solid"/>
+                      <a:round/>
+                      <a:headEnd type="none" w="med" len="med"/>
+                      <a:tailEnd type="none" w="med" len="med"/>
+                    </a:lnL>
+                    <a:lnR w="12700" cap="flat" cmpd="sng" algn="ctr">
+                      <a:solidFill>
+                        <a:schemeClr val="tx1"/>
+                      </a:solidFill>
+                      <a:prstDash val="solid"/>
+                      <a:round/>
+                      <a:headEnd type="none" w="med" len="med"/>
+                      <a:tailEnd type="none" w="med" len="med"/>
+                    </a:lnR>
+                    <a:lnT w="12700" cap="flat" cmpd="sng" algn="ctr">
+                      <a:solidFill>
+                        <a:schemeClr val="tx1"/>
+                      </a:solidFill>
+                      <a:prstDash val="solid"/>
+                      <a:round/>
+                      <a:headEnd type="none" w="med" len="med"/>
+                      <a:tailEnd type="none" w="med" len="med"/>
+                    </a:lnT>
+                    <a:lnB w="12700" cap="flat" cmpd="sng" algn="ctr">
+                      <a:solidFill>
+                        <a:schemeClr val="tx1"/>
+                      </a:solidFill>
+                      <a:prstDash val="solid"/>
+                      <a:round/>
+                      <a:headEnd type="none" w="med" len="med"/>
+                      <a:tailEnd type="none" w="med" len="med"/>
+                    </a:lnB>
+                    <a:solidFill>
+                      <a:schemeClr val="tx2">
+                        <a:lumMod val="25000"/>
+                        <a:lumOff val="75000"/>
+                      </a:schemeClr>
+                    </a:solidFill>
+                  </a:tcPr>
+                </a:tc>
+                <a:tc>
+                  <a:txBody>
+                    <a:bodyPr/>
+                    <a:lstStyle/>
+                    <a:p>
+                      <a:r>
+                        <a:rPr lang="en-US" altLang="zh-CN" sz="1400" b="0" dirty="0">
+                          <a:solidFill>
+                            <a:schemeClr val="tx1"/>
+                          </a:solidFill>
+                        </a:rPr>
+                        <a:t>…</a:t>
+                      </a:r>
+                      <a:endParaRPr lang="en-US" sz="1400" b="0" dirty="0">
+                        <a:solidFill>
+                          <a:schemeClr val="tx1"/>
+                        </a:solidFill>
+                      </a:endParaRPr>
+                    </a:p>
+                  </a:txBody>
+                  <a:tcPr>
+                    <a:lnL w="12700" cap="flat" cmpd="sng" algn="ctr">
+                      <a:solidFill>
+                        <a:schemeClr val="tx1"/>
+                      </a:solidFill>
+                      <a:prstDash val="solid"/>
+                      <a:round/>
+                      <a:headEnd type="none" w="med" len="med"/>
+                      <a:tailEnd type="none" w="med" len="med"/>
+                    </a:lnL>
+                    <a:lnR w="12700" cap="flat" cmpd="sng" algn="ctr">
+                      <a:solidFill>
+                        <a:schemeClr val="tx1"/>
+                      </a:solidFill>
+                      <a:prstDash val="solid"/>
+                      <a:round/>
+                      <a:headEnd type="none" w="med" len="med"/>
+                      <a:tailEnd type="none" w="med" len="med"/>
+                    </a:lnR>
+                    <a:lnT w="12700" cap="flat" cmpd="sng" algn="ctr">
+                      <a:solidFill>
+                        <a:schemeClr val="tx1"/>
+                      </a:solidFill>
+                      <a:prstDash val="solid"/>
+                      <a:round/>
+                      <a:headEnd type="none" w="med" len="med"/>
+                      <a:tailEnd type="none" w="med" len="med"/>
+                    </a:lnT>
+                    <a:lnB w="12700" cap="flat" cmpd="sng" algn="ctr">
+                      <a:solidFill>
+                        <a:schemeClr val="tx1"/>
+                      </a:solidFill>
+                      <a:prstDash val="solid"/>
+                      <a:round/>
+                      <a:headEnd type="none" w="med" len="med"/>
+                      <a:tailEnd type="none" w="med" len="med"/>
+                    </a:lnB>
+                    <a:solidFill>
+                      <a:schemeClr val="tx2">
+                        <a:lumMod val="25000"/>
+                        <a:lumOff val="75000"/>
+                      </a:schemeClr>
+                    </a:solidFill>
+                  </a:tcPr>
+                </a:tc>
+                <a:tc>
+                  <a:txBody>
+                    <a:bodyPr/>
+                    <a:lstStyle/>
+                    <a:p>
+                      <a:r>
+                        <a:rPr lang="en-US" altLang="zh-CN" sz="1200" b="0" dirty="0">
+                          <a:solidFill>
+                            <a:schemeClr val="tx1"/>
+                          </a:solidFill>
+                        </a:rPr>
+                        <a:t>T</a:t>
+                      </a:r>
+                      <a:r>
+                        <a:rPr lang="en-US" altLang="zh-CN" sz="800" b="0" dirty="0">
+                          <a:solidFill>
+                            <a:schemeClr val="tx1"/>
+                          </a:solidFill>
+                        </a:rPr>
+                        <a:t>N</a:t>
+                      </a:r>
+                      <a:endParaRPr lang="en-US" sz="800" b="0" dirty="0">
+                        <a:solidFill>
+                          <a:schemeClr val="tx1"/>
+                        </a:solidFill>
+                      </a:endParaRPr>
+                    </a:p>
+                  </a:txBody>
+                  <a:tcPr>
+                    <a:lnL w="12700" cap="flat" cmpd="sng" algn="ctr">
+                      <a:solidFill>
+                        <a:schemeClr val="tx1"/>
+                      </a:solidFill>
+                      <a:prstDash val="solid"/>
+                      <a:round/>
+                      <a:headEnd type="none" w="med" len="med"/>
+                      <a:tailEnd type="none" w="med" len="med"/>
+                    </a:lnL>
+                    <a:lnR w="12700" cap="flat" cmpd="sng" algn="ctr">
+                      <a:solidFill>
+                        <a:schemeClr val="tx1"/>
+                      </a:solidFill>
+                      <a:prstDash val="solid"/>
+                      <a:round/>
+                      <a:headEnd type="none" w="med" len="med"/>
+                      <a:tailEnd type="none" w="med" len="med"/>
+                    </a:lnR>
+                    <a:lnT w="12700" cap="flat" cmpd="sng" algn="ctr">
+                      <a:solidFill>
+                        <a:schemeClr val="tx1"/>
+                      </a:solidFill>
+                      <a:prstDash val="solid"/>
+                      <a:round/>
+                      <a:headEnd type="none" w="med" len="med"/>
+                      <a:tailEnd type="none" w="med" len="med"/>
+                    </a:lnT>
+                    <a:lnB w="12700" cap="flat" cmpd="sng" algn="ctr">
+                      <a:solidFill>
+                        <a:schemeClr val="tx1"/>
+                      </a:solidFill>
+                      <a:prstDash val="solid"/>
+                      <a:round/>
+                      <a:headEnd type="none" w="med" len="med"/>
+                      <a:tailEnd type="none" w="med" len="med"/>
+                    </a:lnB>
+                    <a:solidFill>
+                      <a:schemeClr val="tx2">
+                        <a:lumMod val="25000"/>
+                        <a:lumOff val="75000"/>
+                      </a:schemeClr>
+                    </a:solidFill>
+                  </a:tcPr>
+                </a:tc>
+                <a:extLst>
+                  <a:ext uri="{0D108BD9-81ED-4DB2-BD59-A6C34878D82A}">
+                    <a16:rowId xmlns:a16="http://schemas.microsoft.com/office/drawing/2014/main" val="3681670762"/>
+                  </a:ext>
+                </a:extLst>
+              </a:tr>
+            </a:tbl>
+          </a:graphicData>
+        </a:graphic>
+      </p:graphicFrame>
+      <p:graphicFrame>
+        <p:nvGraphicFramePr>
+          <p:cNvPr id="154" name="Table 153">
+            <a:extLst>
+              <a:ext uri="{FF2B5EF4-FFF2-40B4-BE49-F238E27FC236}">
+                <a16:creationId xmlns:a16="http://schemas.microsoft.com/office/drawing/2014/main" id="{EF3B6D86-8E31-5C3E-0ED5-A569A931B746}"/>
+              </a:ext>
+            </a:extLst>
+          </p:cNvPr>
+          <p:cNvGraphicFramePr>
+            <a:graphicFrameLocks noGrp="1"/>
+          </p:cNvGraphicFramePr>
+          <p:nvPr>
+            <p:extLst>
+              <p:ext uri="{D42A27DB-BD31-4B8C-83A1-F6EECF244321}">
+                <p14:modId xmlns:p14="http://schemas.microsoft.com/office/powerpoint/2010/main" val="1277039738"/>
+              </p:ext>
+            </p:extLst>
+          </p:nvPr>
+        </p:nvGraphicFramePr>
+        <p:xfrm>
+          <a:off x="7831595" y="1675470"/>
+          <a:ext cx="1446932" cy="304800"/>
+        </p:xfrm>
+        <a:graphic>
+          <a:graphicData uri="http://schemas.openxmlformats.org/drawingml/2006/table">
+            <a:tbl>
+              <a:tblPr firstRow="1" bandRow="1">
+                <a:tableStyleId>{00A15C55-8517-42AA-B614-E9B94910E393}</a:tableStyleId>
+              </a:tblPr>
+              <a:tblGrid>
+                <a:gridCol w="361733">
+                  <a:extLst>
+                    <a:ext uri="{9D8B030D-6E8A-4147-A177-3AD203B41FA5}">
+                      <a16:colId xmlns:a16="http://schemas.microsoft.com/office/drawing/2014/main" val="819577693"/>
+                    </a:ext>
+                  </a:extLst>
+                </a:gridCol>
+                <a:gridCol w="361733">
+                  <a:extLst>
+                    <a:ext uri="{9D8B030D-6E8A-4147-A177-3AD203B41FA5}">
+                      <a16:colId xmlns:a16="http://schemas.microsoft.com/office/drawing/2014/main" val="279023113"/>
+                    </a:ext>
+                  </a:extLst>
+                </a:gridCol>
+                <a:gridCol w="361733">
+                  <a:extLst>
+                    <a:ext uri="{9D8B030D-6E8A-4147-A177-3AD203B41FA5}">
+                      <a16:colId xmlns:a16="http://schemas.microsoft.com/office/drawing/2014/main" val="4119586817"/>
+                    </a:ext>
+                  </a:extLst>
+                </a:gridCol>
+                <a:gridCol w="361733">
+                  <a:extLst>
+                    <a:ext uri="{9D8B030D-6E8A-4147-A177-3AD203B41FA5}">
+                      <a16:colId xmlns:a16="http://schemas.microsoft.com/office/drawing/2014/main" val="2047394699"/>
+                    </a:ext>
+                  </a:extLst>
+                </a:gridCol>
+              </a:tblGrid>
+              <a:tr h="228465">
+                <a:tc>
+                  <a:txBody>
+                    <a:bodyPr/>
+                    <a:lstStyle/>
+                    <a:p>
+                      <a:r>
+                        <a:rPr lang="en-US" altLang="zh-CN" sz="1200" b="0" dirty="0">
+                          <a:solidFill>
+                            <a:schemeClr val="tx1"/>
+                          </a:solidFill>
+                        </a:rPr>
+                        <a:t>T1</a:t>
+                      </a:r>
+                      <a:endParaRPr lang="en-US" sz="1200" b="0" dirty="0">
+                        <a:solidFill>
+                          <a:schemeClr val="tx1"/>
+                        </a:solidFill>
+                      </a:endParaRPr>
+                    </a:p>
+                  </a:txBody>
+                  <a:tcPr>
+                    <a:lnL w="12700" cap="flat" cmpd="sng" algn="ctr">
+                      <a:solidFill>
+                        <a:schemeClr val="tx1"/>
+                      </a:solidFill>
+                      <a:prstDash val="solid"/>
+                      <a:round/>
+                      <a:headEnd type="none" w="med" len="med"/>
+                      <a:tailEnd type="none" w="med" len="med"/>
+                    </a:lnL>
+                    <a:lnR w="12700" cap="flat" cmpd="sng" algn="ctr">
+                      <a:solidFill>
+                        <a:schemeClr val="tx1"/>
+                      </a:solidFill>
+                      <a:prstDash val="solid"/>
+                      <a:round/>
+                      <a:headEnd type="none" w="med" len="med"/>
+                      <a:tailEnd type="none" w="med" len="med"/>
+                    </a:lnR>
+                    <a:lnT w="12700" cap="flat" cmpd="sng" algn="ctr">
+                      <a:solidFill>
+                        <a:schemeClr val="tx1"/>
+                      </a:solidFill>
+                      <a:prstDash val="solid"/>
+                      <a:round/>
+                      <a:headEnd type="none" w="med" len="med"/>
+                      <a:tailEnd type="none" w="med" len="med"/>
+                    </a:lnT>
+                    <a:lnB w="12700" cap="flat" cmpd="sng" algn="ctr">
+                      <a:solidFill>
+                        <a:schemeClr val="tx1"/>
+                      </a:solidFill>
+                      <a:prstDash val="solid"/>
+                      <a:round/>
+                      <a:headEnd type="none" w="med" len="med"/>
+                      <a:tailEnd type="none" w="med" len="med"/>
+                    </a:lnB>
+                    <a:solidFill>
+                      <a:schemeClr val="accent6">
+                        <a:lumMod val="20000"/>
+                        <a:lumOff val="80000"/>
+                      </a:schemeClr>
+                    </a:solidFill>
+                  </a:tcPr>
+                </a:tc>
+                <a:tc>
+                  <a:txBody>
+                    <a:bodyPr/>
+                    <a:lstStyle/>
+                    <a:p>
+                      <a:r>
+                        <a:rPr lang="en-US" altLang="zh-CN" sz="1200" b="0" dirty="0">
+                          <a:solidFill>
+                            <a:schemeClr val="tx1"/>
+                          </a:solidFill>
+                        </a:rPr>
+                        <a:t>T2</a:t>
+                      </a:r>
+                      <a:endParaRPr lang="en-US" sz="1200" b="0" dirty="0">
+                        <a:solidFill>
+                          <a:schemeClr val="tx1"/>
+                        </a:solidFill>
+                      </a:endParaRPr>
+                    </a:p>
+                  </a:txBody>
+                  <a:tcPr>
+                    <a:lnL w="12700" cap="flat" cmpd="sng" algn="ctr">
+                      <a:solidFill>
+                        <a:schemeClr val="tx1"/>
+                      </a:solidFill>
+                      <a:prstDash val="solid"/>
+                      <a:round/>
+                      <a:headEnd type="none" w="med" len="med"/>
+                      <a:tailEnd type="none" w="med" len="med"/>
+                    </a:lnL>
+                    <a:lnR w="12700" cap="flat" cmpd="sng" algn="ctr">
+                      <a:solidFill>
+                        <a:schemeClr val="tx1"/>
+                      </a:solidFill>
+                      <a:prstDash val="solid"/>
+                      <a:round/>
+                      <a:headEnd type="none" w="med" len="med"/>
+                      <a:tailEnd type="none" w="med" len="med"/>
+                    </a:lnR>
+                    <a:lnT w="12700" cap="flat" cmpd="sng" algn="ctr">
+                      <a:solidFill>
+                        <a:schemeClr val="tx1"/>
+                      </a:solidFill>
+                      <a:prstDash val="solid"/>
+                      <a:round/>
+                      <a:headEnd type="none" w="med" len="med"/>
+                      <a:tailEnd type="none" w="med" len="med"/>
+                    </a:lnT>
+                    <a:lnB w="12700" cap="flat" cmpd="sng" algn="ctr">
+                      <a:solidFill>
+                        <a:schemeClr val="tx1"/>
+                      </a:solidFill>
+                      <a:prstDash val="solid"/>
+                      <a:round/>
+                      <a:headEnd type="none" w="med" len="med"/>
+                      <a:tailEnd type="none" w="med" len="med"/>
+                    </a:lnB>
+                    <a:solidFill>
+                      <a:schemeClr val="accent6">
+                        <a:lumMod val="20000"/>
+                        <a:lumOff val="80000"/>
+                      </a:schemeClr>
+                    </a:solidFill>
+                  </a:tcPr>
+                </a:tc>
+                <a:tc>
+                  <a:txBody>
+                    <a:bodyPr/>
+                    <a:lstStyle/>
+                    <a:p>
+                      <a:r>
+                        <a:rPr lang="en-US" altLang="zh-CN" sz="1400" b="0" dirty="0">
+                          <a:solidFill>
+                            <a:schemeClr val="tx1"/>
+                          </a:solidFill>
+                        </a:rPr>
+                        <a:t>…</a:t>
+                      </a:r>
+                      <a:endParaRPr lang="en-US" sz="1400" b="0" dirty="0">
+                        <a:solidFill>
+                          <a:schemeClr val="tx1"/>
+                        </a:solidFill>
+                      </a:endParaRPr>
+                    </a:p>
+                  </a:txBody>
+                  <a:tcPr>
+                    <a:lnL w="12700" cap="flat" cmpd="sng" algn="ctr">
+                      <a:solidFill>
+                        <a:schemeClr val="tx1"/>
+                      </a:solidFill>
+                      <a:prstDash val="solid"/>
+                      <a:round/>
+                      <a:headEnd type="none" w="med" len="med"/>
+                      <a:tailEnd type="none" w="med" len="med"/>
+                    </a:lnL>
+                    <a:lnR w="12700" cap="flat" cmpd="sng" algn="ctr">
+                      <a:solidFill>
+                        <a:schemeClr val="tx1"/>
+                      </a:solidFill>
+                      <a:prstDash val="solid"/>
+                      <a:round/>
+                      <a:headEnd type="none" w="med" len="med"/>
+                      <a:tailEnd type="none" w="med" len="med"/>
+                    </a:lnR>
+                    <a:lnT w="12700" cap="flat" cmpd="sng" algn="ctr">
+                      <a:solidFill>
+                        <a:schemeClr val="tx1"/>
+                      </a:solidFill>
+                      <a:prstDash val="solid"/>
+                      <a:round/>
+                      <a:headEnd type="none" w="med" len="med"/>
+                      <a:tailEnd type="none" w="med" len="med"/>
+                    </a:lnT>
+                    <a:lnB w="12700" cap="flat" cmpd="sng" algn="ctr">
+                      <a:solidFill>
+                        <a:schemeClr val="tx1"/>
+                      </a:solidFill>
+                      <a:prstDash val="solid"/>
+                      <a:round/>
+                      <a:headEnd type="none" w="med" len="med"/>
+                      <a:tailEnd type="none" w="med" len="med"/>
+                    </a:lnB>
+                    <a:solidFill>
+                      <a:schemeClr val="accent6">
+                        <a:lumMod val="20000"/>
+                        <a:lumOff val="80000"/>
+                      </a:schemeClr>
+                    </a:solidFill>
+                  </a:tcPr>
+                </a:tc>
+                <a:tc>
+                  <a:txBody>
+                    <a:bodyPr/>
+                    <a:lstStyle/>
+                    <a:p>
+                      <a:r>
+                        <a:rPr lang="en-US" altLang="zh-CN" sz="1200" b="0" dirty="0">
+                          <a:solidFill>
+                            <a:schemeClr val="tx1"/>
+                          </a:solidFill>
+                        </a:rPr>
+                        <a:t>T</a:t>
+                      </a:r>
+                      <a:r>
+                        <a:rPr lang="en-US" altLang="zh-CN" sz="800" b="0" dirty="0">
+                          <a:solidFill>
+                            <a:schemeClr val="tx1"/>
+                          </a:solidFill>
+                        </a:rPr>
+                        <a:t>N</a:t>
+                      </a:r>
+                      <a:endParaRPr lang="en-US" sz="800" b="0" dirty="0">
+                        <a:solidFill>
+                          <a:schemeClr val="tx1"/>
+                        </a:solidFill>
+                      </a:endParaRPr>
+                    </a:p>
+                  </a:txBody>
+                  <a:tcPr>
+                    <a:lnL w="12700" cap="flat" cmpd="sng" algn="ctr">
+                      <a:solidFill>
+                        <a:schemeClr val="tx1"/>
+                      </a:solidFill>
+                      <a:prstDash val="solid"/>
+                      <a:round/>
+                      <a:headEnd type="none" w="med" len="med"/>
+                      <a:tailEnd type="none" w="med" len="med"/>
+                    </a:lnL>
+                    <a:lnR w="12700" cap="flat" cmpd="sng" algn="ctr">
+                      <a:solidFill>
+                        <a:schemeClr val="tx1"/>
+                      </a:solidFill>
+                      <a:prstDash val="solid"/>
+                      <a:round/>
+                      <a:headEnd type="none" w="med" len="med"/>
+                      <a:tailEnd type="none" w="med" len="med"/>
+                    </a:lnR>
+                    <a:lnT w="12700" cap="flat" cmpd="sng" algn="ctr">
+                      <a:solidFill>
+                        <a:schemeClr val="tx1"/>
+                      </a:solidFill>
+                      <a:prstDash val="solid"/>
+                      <a:round/>
+                      <a:headEnd type="none" w="med" len="med"/>
+                      <a:tailEnd type="none" w="med" len="med"/>
+                    </a:lnT>
+                    <a:lnB w="12700" cap="flat" cmpd="sng" algn="ctr">
+                      <a:solidFill>
+                        <a:schemeClr val="tx1"/>
+                      </a:solidFill>
+                      <a:prstDash val="solid"/>
+                      <a:round/>
+                      <a:headEnd type="none" w="med" len="med"/>
+                      <a:tailEnd type="none" w="med" len="med"/>
+                    </a:lnB>
+                    <a:solidFill>
+                      <a:schemeClr val="accent6">
+                        <a:lumMod val="20000"/>
+                        <a:lumOff val="80000"/>
+                      </a:schemeClr>
+                    </a:solidFill>
+                  </a:tcPr>
+                </a:tc>
+                <a:extLst>
+                  <a:ext uri="{0D108BD9-81ED-4DB2-BD59-A6C34878D82A}">
+                    <a16:rowId xmlns:a16="http://schemas.microsoft.com/office/drawing/2014/main" val="3681670762"/>
+                  </a:ext>
+                </a:extLst>
+              </a:tr>
+            </a:tbl>
+          </a:graphicData>
+        </a:graphic>
+      </p:graphicFrame>
+      <p:sp>
+        <p:nvSpPr>
+          <p:cNvPr id="158" name="Rectangle 157">
+            <a:extLst>
+              <a:ext uri="{FF2B5EF4-FFF2-40B4-BE49-F238E27FC236}">
+                <a16:creationId xmlns:a16="http://schemas.microsoft.com/office/drawing/2014/main" id="{AEC27C49-4E47-3B27-07CC-C452DF03CD96}"/>
+              </a:ext>
+            </a:extLst>
+          </p:cNvPr>
+          <p:cNvSpPr/>
+          <p:nvPr/>
+        </p:nvSpPr>
+        <p:spPr>
+          <a:xfrm>
+            <a:off x="5028516" y="1662224"/>
+            <a:ext cx="1133613" cy="286362"/>
+          </a:xfrm>
+          <a:prstGeom prst="rect">
+            <a:avLst/>
+          </a:prstGeom>
+          <a:solidFill>
+            <a:schemeClr val="accent6">
+              <a:lumMod val="20000"/>
+              <a:lumOff val="80000"/>
+            </a:schemeClr>
+          </a:solidFill>
+          <a:ln>
+            <a:prstDash val="dash"/>
+          </a:ln>
+        </p:spPr>
+        <p:style>
+          <a:lnRef idx="2">
+            <a:schemeClr val="accent1">
+              <a:shade val="15000"/>
+            </a:schemeClr>
+          </a:lnRef>
+          <a:fillRef idx="1">
+            <a:schemeClr val="accent1"/>
+          </a:fillRef>
+          <a:effectRef idx="0">
+            <a:schemeClr val="accent1"/>
+          </a:effectRef>
+          <a:fontRef idx="minor">
+            <a:schemeClr val="lt1"/>
+          </a:fontRef>
+        </p:style>
+        <p:txBody>
+          <a:bodyPr rtlCol="0" anchor="ctr"/>
+          <a:lstStyle/>
+          <a:p>
+            <a:r>
+              <a:rPr lang="en-US" altLang="zh-CN" sz="1200" dirty="0" err="1">
+                <a:solidFill>
+                  <a:schemeClr val="tx1"/>
+                </a:solidFill>
+              </a:rPr>
+              <a:t>NanoVLM</a:t>
+            </a:r>
+            <a:r>
+              <a:rPr lang="zh-CN" altLang="en-US" sz="1200" dirty="0">
+                <a:solidFill>
+                  <a:schemeClr val="tx1"/>
+                </a:solidFill>
+              </a:rPr>
+              <a:t> </a:t>
+            </a:r>
+            <a:r>
+              <a:rPr lang="en-US" altLang="zh-CN" sz="1200" dirty="0">
+                <a:solidFill>
+                  <a:schemeClr val="tx1"/>
+                </a:solidFill>
+              </a:rPr>
+              <a:t>text</a:t>
+            </a:r>
+            <a:endParaRPr lang="en-US" sz="1200" dirty="0">
+              <a:solidFill>
+                <a:schemeClr val="tx1"/>
+              </a:solidFill>
+            </a:endParaRPr>
+          </a:p>
+        </p:txBody>
+      </p:sp>
+      <p:cxnSp>
+        <p:nvCxnSpPr>
+          <p:cNvPr id="162" name="Straight Arrow Connector 161">
+            <a:extLst>
+              <a:ext uri="{FF2B5EF4-FFF2-40B4-BE49-F238E27FC236}">
+                <a16:creationId xmlns:a16="http://schemas.microsoft.com/office/drawing/2014/main" id="{D93B7D9E-76CF-5319-CE81-FFD6AF7E5FD1}"/>
+              </a:ext>
+            </a:extLst>
+          </p:cNvPr>
+          <p:cNvCxnSpPr>
+            <a:cxnSpLocks/>
+            <a:stCxn id="155" idx="3"/>
+          </p:cNvCxnSpPr>
+          <p:nvPr/>
+        </p:nvCxnSpPr>
+        <p:spPr>
+          <a:xfrm>
+            <a:off x="6130330" y="1171422"/>
+            <a:ext cx="466522" cy="4678"/>
+          </a:xfrm>
+          <a:prstGeom prst="straightConnector1">
+            <a:avLst/>
+          </a:prstGeom>
+          <a:ln>
+            <a:tailEnd type="triangle"/>
+          </a:ln>
+        </p:spPr>
+        <p:style>
+          <a:lnRef idx="2">
+            <a:schemeClr val="accent1"/>
+          </a:lnRef>
+          <a:fillRef idx="0">
+            <a:schemeClr val="accent1"/>
+          </a:fillRef>
+          <a:effectRef idx="1">
+            <a:schemeClr val="accent1"/>
+          </a:effectRef>
+          <a:fontRef idx="minor">
+            <a:schemeClr val="tx1"/>
+          </a:fontRef>
+        </p:style>
+      </p:cxnSp>
+      <p:cxnSp>
+        <p:nvCxnSpPr>
+          <p:cNvPr id="166" name="Straight Arrow Connector 165">
+            <a:extLst>
+              <a:ext uri="{FF2B5EF4-FFF2-40B4-BE49-F238E27FC236}">
+                <a16:creationId xmlns:a16="http://schemas.microsoft.com/office/drawing/2014/main" id="{ED6B62CE-4155-9CC1-0C5B-3795A4A8B34E}"/>
+              </a:ext>
+            </a:extLst>
+          </p:cNvPr>
+          <p:cNvCxnSpPr>
+            <a:cxnSpLocks/>
+            <a:stCxn id="158" idx="3"/>
+          </p:cNvCxnSpPr>
+          <p:nvPr/>
+        </p:nvCxnSpPr>
+        <p:spPr>
+          <a:xfrm>
+            <a:off x="6162129" y="1805405"/>
+            <a:ext cx="434723" cy="0"/>
+          </a:xfrm>
+          <a:prstGeom prst="straightConnector1">
+            <a:avLst/>
+          </a:prstGeom>
+          <a:ln>
+            <a:tailEnd type="triangle"/>
+          </a:ln>
+        </p:spPr>
+        <p:style>
+          <a:lnRef idx="2">
+            <a:schemeClr val="accent1"/>
+          </a:lnRef>
+          <a:fillRef idx="0">
+            <a:schemeClr val="accent1"/>
+          </a:fillRef>
+          <a:effectRef idx="1">
+            <a:schemeClr val="accent1"/>
+          </a:effectRef>
+          <a:fontRef idx="minor">
+            <a:schemeClr val="tx1"/>
+          </a:fontRef>
+        </p:style>
+      </p:cxnSp>
+      <p:cxnSp>
+        <p:nvCxnSpPr>
+          <p:cNvPr id="177" name="Straight Arrow Connector 176">
+            <a:extLst>
+              <a:ext uri="{FF2B5EF4-FFF2-40B4-BE49-F238E27FC236}">
+                <a16:creationId xmlns:a16="http://schemas.microsoft.com/office/drawing/2014/main" id="{A86CC193-B28C-E2EA-FDE9-7A26A33C729F}"/>
+              </a:ext>
+            </a:extLst>
+          </p:cNvPr>
+          <p:cNvCxnSpPr>
+            <a:cxnSpLocks/>
+            <a:endCxn id="154" idx="1"/>
+          </p:cNvCxnSpPr>
+          <p:nvPr/>
+        </p:nvCxnSpPr>
+        <p:spPr>
+          <a:xfrm>
+            <a:off x="7283900" y="1827870"/>
+            <a:ext cx="547695" cy="0"/>
+          </a:xfrm>
+          <a:prstGeom prst="straightConnector1">
+            <a:avLst/>
+          </a:prstGeom>
+          <a:ln>
+            <a:tailEnd type="triangle"/>
+          </a:ln>
+        </p:spPr>
+        <p:style>
+          <a:lnRef idx="2">
+            <a:schemeClr val="accent1"/>
+          </a:lnRef>
+          <a:fillRef idx="0">
+            <a:schemeClr val="accent1"/>
+          </a:fillRef>
+          <a:effectRef idx="1">
+            <a:schemeClr val="accent1"/>
+          </a:effectRef>
+          <a:fontRef idx="minor">
+            <a:schemeClr val="tx1"/>
+          </a:fontRef>
+        </p:style>
+      </p:cxnSp>
+      <p:cxnSp>
+        <p:nvCxnSpPr>
+          <p:cNvPr id="179" name="Straight Arrow Connector 178">
+            <a:extLst>
+              <a:ext uri="{FF2B5EF4-FFF2-40B4-BE49-F238E27FC236}">
+                <a16:creationId xmlns:a16="http://schemas.microsoft.com/office/drawing/2014/main" id="{05619EB8-5FC9-BC3E-C27F-1BEBC37C0D34}"/>
+              </a:ext>
+            </a:extLst>
+          </p:cNvPr>
+          <p:cNvCxnSpPr>
+            <a:cxnSpLocks/>
+            <a:endCxn id="152" idx="1"/>
+          </p:cNvCxnSpPr>
+          <p:nvPr/>
+        </p:nvCxnSpPr>
+        <p:spPr>
+          <a:xfrm>
+            <a:off x="7283900" y="1187520"/>
+            <a:ext cx="547696" cy="9315"/>
+          </a:xfrm>
+          <a:prstGeom prst="straightConnector1">
+            <a:avLst/>
+          </a:prstGeom>
+          <a:ln>
+            <a:tailEnd type="triangle"/>
+          </a:ln>
+        </p:spPr>
+        <p:style>
+          <a:lnRef idx="2">
+            <a:schemeClr val="accent1"/>
+          </a:lnRef>
+          <a:fillRef idx="0">
+            <a:schemeClr val="accent1"/>
+          </a:fillRef>
+          <a:effectRef idx="1">
+            <a:schemeClr val="accent1"/>
+          </a:effectRef>
+          <a:fontRef idx="minor">
+            <a:schemeClr val="tx1"/>
+          </a:fontRef>
+        </p:style>
+      </p:cxnSp>
+      <p:pic>
+        <p:nvPicPr>
+          <p:cNvPr id="193" name="Picture 192" descr="Mastering Cosine Metrics: A Data Scientist's Essential Toolkit | by Shubham  Sangole | Python in Plain English">
+            <a:extLst>
+              <a:ext uri="{FF2B5EF4-FFF2-40B4-BE49-F238E27FC236}">
+                <a16:creationId xmlns:a16="http://schemas.microsoft.com/office/drawing/2014/main" id="{99DD3463-D326-EDC4-6B2D-66ED68428137}"/>
+              </a:ext>
+            </a:extLst>
+          </p:cNvPr>
+          <p:cNvPicPr>
+            <a:picLocks noChangeAspect="1"/>
+          </p:cNvPicPr>
+          <p:nvPr/>
+        </p:nvPicPr>
+        <p:blipFill>
+          <a:blip r:embed="rId10"/>
+          <a:stretch>
+            <a:fillRect/>
+          </a:stretch>
+        </p:blipFill>
+        <p:spPr>
+          <a:xfrm>
+            <a:off x="9840681" y="824487"/>
+            <a:ext cx="1718236" cy="1365998"/>
+          </a:xfrm>
+          <a:prstGeom prst="rect">
+            <a:avLst/>
+          </a:prstGeom>
+        </p:spPr>
+      </p:pic>
+      <p:sp>
+        <p:nvSpPr>
+          <p:cNvPr id="194" name="Right Arrow 193">
+            <a:extLst>
+              <a:ext uri="{FF2B5EF4-FFF2-40B4-BE49-F238E27FC236}">
+                <a16:creationId xmlns:a16="http://schemas.microsoft.com/office/drawing/2014/main" id="{EB88069A-90E2-5118-D313-922CE526AB5A}"/>
+              </a:ext>
+            </a:extLst>
+          </p:cNvPr>
+          <p:cNvSpPr/>
+          <p:nvPr/>
+        </p:nvSpPr>
+        <p:spPr>
+          <a:xfrm>
+            <a:off x="9357415" y="1364550"/>
+            <a:ext cx="563430" cy="285873"/>
+          </a:xfrm>
+          <a:prstGeom prst="rightArrow">
+            <a:avLst/>
+          </a:prstGeom>
+          <a:solidFill>
+            <a:schemeClr val="bg1"/>
+          </a:solidFill>
+          <a:ln>
+            <a:prstDash val="dash"/>
+          </a:ln>
+        </p:spPr>
+        <p:style>
+          <a:lnRef idx="2">
+            <a:schemeClr val="accent1">
+              <a:shade val="15000"/>
+            </a:schemeClr>
+          </a:lnRef>
+          <a:fillRef idx="1">
+            <a:schemeClr val="accent1"/>
+          </a:fillRef>
+          <a:effectRef idx="0">
+            <a:schemeClr val="accent1"/>
+          </a:effectRef>
+          <a:fontRef idx="minor">
+            <a:schemeClr val="lt1"/>
+          </a:fontRef>
+        </p:style>
+        <p:txBody>
+          <a:bodyPr rtlCol="0" anchor="ctr"/>
+          <a:lstStyle/>
+          <a:p>
+            <a:pPr algn="ctr"/>
+            <a:endParaRPr lang="en-US"/>
+          </a:p>
+        </p:txBody>
+      </p:sp>
+      <p:sp>
+        <p:nvSpPr>
+          <p:cNvPr id="196" name="Right Arrow 195">
+            <a:extLst>
+              <a:ext uri="{FF2B5EF4-FFF2-40B4-BE49-F238E27FC236}">
+                <a16:creationId xmlns:a16="http://schemas.microsoft.com/office/drawing/2014/main" id="{440EBA3A-420D-42CD-11AE-51A627FB67B3}"/>
+              </a:ext>
+            </a:extLst>
+          </p:cNvPr>
+          <p:cNvSpPr/>
+          <p:nvPr/>
+        </p:nvSpPr>
+        <p:spPr>
+          <a:xfrm>
+            <a:off x="4324710" y="1982027"/>
+            <a:ext cx="563430" cy="285873"/>
+          </a:xfrm>
+          <a:prstGeom prst="rightArrow">
+            <a:avLst/>
+          </a:prstGeom>
+          <a:solidFill>
+            <a:schemeClr val="bg1"/>
+          </a:solidFill>
+          <a:ln>
+            <a:prstDash val="dash"/>
+          </a:ln>
+        </p:spPr>
+        <p:style>
+          <a:lnRef idx="2">
+            <a:schemeClr val="accent1">
+              <a:shade val="15000"/>
+            </a:schemeClr>
+          </a:lnRef>
+          <a:fillRef idx="1">
+            <a:schemeClr val="accent1"/>
+          </a:fillRef>
+          <a:effectRef idx="0">
+            <a:schemeClr val="accent1"/>
+          </a:effectRef>
+          <a:fontRef idx="minor">
+            <a:schemeClr val="lt1"/>
+          </a:fontRef>
+        </p:style>
+        <p:txBody>
+          <a:bodyPr rtlCol="0" anchor="ctr"/>
+          <a:lstStyle/>
+          <a:p>
+            <a:pPr algn="ctr"/>
+            <a:endParaRPr lang="en-US"/>
+          </a:p>
+        </p:txBody>
+      </p:sp>
+      <p:pic>
+        <p:nvPicPr>
+          <p:cNvPr id="201" name="Picture 200">
+            <a:extLst>
+              <a:ext uri="{FF2B5EF4-FFF2-40B4-BE49-F238E27FC236}">
+                <a16:creationId xmlns:a16="http://schemas.microsoft.com/office/drawing/2014/main" id="{62C01BB3-5A0C-8440-3C05-FF765BBA333D}"/>
+              </a:ext>
+            </a:extLst>
+          </p:cNvPr>
+          <p:cNvPicPr>
+            <a:picLocks noChangeAspect="1"/>
+          </p:cNvPicPr>
+          <p:nvPr/>
+        </p:nvPicPr>
+        <p:blipFill>
+          <a:blip r:embed="rId11"/>
+          <a:stretch>
+            <a:fillRect/>
+          </a:stretch>
+        </p:blipFill>
+        <p:spPr>
+          <a:xfrm>
+            <a:off x="4146731" y="5399576"/>
+            <a:ext cx="2104956" cy="936024"/>
+          </a:xfrm>
+          <a:prstGeom prst="rect">
+            <a:avLst/>
+          </a:prstGeom>
+        </p:spPr>
+      </p:pic>
+    </p:spTree>
+    <p:extLst>
+      <p:ext uri="{BB962C8B-B14F-4D97-AF65-F5344CB8AC3E}">
+        <p14:creationId xmlns:p14="http://schemas.microsoft.com/office/powerpoint/2010/main" val="2520208814"/>
+      </p:ext>
+    </p:extLst>
+  </p:cSld>
+  <p:clrMapOvr>
+    <a:masterClrMapping/>
+  </p:clrMapOvr>
+</p:sld>
+</file>
+
+<file path=ppt/slides/slide4.xml><?xml version="1.0" encoding="utf-8"?>
+<p:sld xmlns:a="http://schemas.openxmlformats.org/drawingml/2006/main" xmlns:r="http://schemas.openxmlformats.org/officeDocument/2006/relationships" xmlns:p="http://schemas.openxmlformats.org/presentationml/2006/main">
+  <p:cSld>
+    <p:spTree>
+      <p:nvGrpSpPr>
+        <p:cNvPr id="1" name=""/>
+        <p:cNvGrpSpPr/>
+        <p:nvPr/>
+      </p:nvGrpSpPr>
+      <p:grpSpPr>
+        <a:xfrm>
+          <a:off x="0" y="0"/>
+          <a:ext cx="0" cy="0"/>
+          <a:chOff x="0" y="0"/>
+          <a:chExt cx="0" cy="0"/>
+        </a:xfrm>
+      </p:grpSpPr>
+      <p:sp>
+        <p:nvSpPr>
+          <p:cNvPr id="2" name="Title 1">
+            <a:extLst>
+              <a:ext uri="{FF2B5EF4-FFF2-40B4-BE49-F238E27FC236}">
+                <a16:creationId xmlns:a16="http://schemas.microsoft.com/office/drawing/2014/main" id="{F9AB6D9C-F7FF-AE3E-645D-471C1C9E7E98}"/>
+              </a:ext>
+            </a:extLst>
+          </p:cNvPr>
+          <p:cNvSpPr>
+            <a:spLocks noGrp="1"/>
+          </p:cNvSpPr>
+          <p:nvPr>
+            <p:ph type="title"/>
+          </p:nvPr>
+        </p:nvSpPr>
+        <p:spPr/>
+        <p:txBody>
+          <a:bodyPr/>
+          <a:lstStyle/>
+          <a:p>
+            <a:r>
+              <a:rPr lang="en-US" dirty="0"/>
+              <a:t>Literature</a:t>
+            </a:r>
+            <a:r>
+              <a:rPr lang="zh-CN" altLang="en-US" dirty="0"/>
+              <a:t> </a:t>
+            </a:r>
+            <a:r>
+              <a:rPr lang="en-US" altLang="zh-CN" dirty="0"/>
+              <a:t>Review</a:t>
+            </a:r>
+            <a:endParaRPr lang="en-US" dirty="0"/>
+          </a:p>
+        </p:txBody>
+      </p:sp>
+      <p:sp>
+        <p:nvSpPr>
+          <p:cNvPr id="3" name="Content Placeholder 2">
+            <a:extLst>
+              <a:ext uri="{FF2B5EF4-FFF2-40B4-BE49-F238E27FC236}">
+                <a16:creationId xmlns:a16="http://schemas.microsoft.com/office/drawing/2014/main" id="{A49C73BD-704C-815A-3932-EA5429BDE1A4}"/>
+              </a:ext>
+            </a:extLst>
+          </p:cNvPr>
+          <p:cNvSpPr>
+            <a:spLocks noGrp="1"/>
+          </p:cNvSpPr>
+          <p:nvPr>
+            <p:ph idx="1"/>
+          </p:nvPr>
+        </p:nvSpPr>
+        <p:spPr/>
+        <p:txBody>
+          <a:bodyPr/>
+          <a:lstStyle/>
+          <a:p>
+            <a:r>
+              <a:rPr lang="en-US" dirty="0"/>
+              <a:t>Current</a:t>
+            </a:r>
+            <a:r>
+              <a:rPr lang="zh-CN" altLang="en-US" dirty="0"/>
+              <a:t> </a:t>
+            </a:r>
+            <a:r>
+              <a:rPr lang="en-US" altLang="zh-CN" dirty="0"/>
+              <a:t>Problem</a:t>
+            </a:r>
+            <a:r>
+              <a:rPr lang="zh-CN" altLang="en-US" dirty="0"/>
+              <a:t> </a:t>
+            </a:r>
+            <a:r>
+              <a:rPr lang="en-US" altLang="zh-CN" dirty="0"/>
+              <a:t>and</a:t>
+            </a:r>
+            <a:r>
+              <a:rPr lang="zh-CN" altLang="en-US" dirty="0"/>
+              <a:t> </a:t>
+            </a:r>
+            <a:r>
+              <a:rPr lang="en-US" altLang="zh-CN" dirty="0"/>
+              <a:t>constrain</a:t>
+            </a:r>
+            <a:r>
+              <a:rPr lang="zh-CN" altLang="en-US" dirty="0"/>
+              <a:t> </a:t>
+            </a:r>
+            <a:r>
+              <a:rPr lang="en-US" altLang="zh-CN" dirty="0"/>
+              <a:t>--</a:t>
+            </a:r>
+            <a:r>
+              <a:rPr lang="zh-CN" altLang="en-US" dirty="0"/>
+              <a:t>  </a:t>
+            </a:r>
+            <a:r>
+              <a:rPr lang="en-US" altLang="zh-CN" dirty="0"/>
+              <a:t>Survey</a:t>
+            </a:r>
+          </a:p>
+          <a:p>
+            <a:r>
+              <a:rPr lang="en-US" dirty="0"/>
+              <a:t>Privacy</a:t>
+            </a:r>
+            <a:r>
+              <a:rPr lang="zh-CN" altLang="en-US" dirty="0"/>
+              <a:t> </a:t>
+            </a:r>
+            <a:r>
+              <a:rPr lang="en-US" altLang="zh-CN" dirty="0"/>
+              <a:t>Preserving</a:t>
+            </a:r>
+            <a:r>
+              <a:rPr lang="zh-CN" altLang="en-US" dirty="0"/>
+              <a:t> </a:t>
+            </a:r>
+            <a:r>
+              <a:rPr lang="en-US" altLang="zh-CN" dirty="0"/>
+              <a:t>and</a:t>
+            </a:r>
+            <a:r>
+              <a:rPr lang="zh-CN" altLang="en-US" dirty="0"/>
+              <a:t> </a:t>
+            </a:r>
+            <a:r>
+              <a:rPr lang="en-US" altLang="zh-CN" dirty="0"/>
+              <a:t>Security</a:t>
+            </a:r>
+          </a:p>
+          <a:p>
+            <a:pPr lvl="1"/>
+            <a:r>
+              <a:rPr lang="en-US" altLang="zh-CN" dirty="0"/>
+              <a:t>-</a:t>
+            </a:r>
+            <a:r>
+              <a:rPr lang="zh-CN" altLang="en-US" dirty="0"/>
+              <a:t> </a:t>
+            </a:r>
+            <a:r>
+              <a:rPr lang="en-US" altLang="zh-CN" dirty="0"/>
+              <a:t>Fine-tuning</a:t>
+            </a:r>
+            <a:r>
+              <a:rPr lang="zh-CN" altLang="en-US" dirty="0"/>
+              <a:t> </a:t>
+            </a:r>
+            <a:r>
+              <a:rPr lang="en-US" altLang="zh-CN" dirty="0"/>
+              <a:t>Phase</a:t>
+            </a:r>
+            <a:r>
+              <a:rPr lang="zh-CN" altLang="en-US" dirty="0"/>
+              <a:t> </a:t>
+            </a:r>
+            <a:r>
+              <a:rPr lang="en-US" altLang="zh-CN" dirty="0"/>
+              <a:t>–</a:t>
+            </a:r>
+            <a:r>
+              <a:rPr lang="zh-CN" altLang="en-US" dirty="0"/>
+              <a:t> </a:t>
+            </a:r>
+            <a:r>
+              <a:rPr lang="en-US" altLang="zh-CN" dirty="0"/>
+              <a:t>Encryption</a:t>
+            </a:r>
+            <a:r>
+              <a:rPr lang="zh-CN" altLang="en-US" dirty="0"/>
+              <a:t> </a:t>
+            </a:r>
+            <a:r>
+              <a:rPr lang="en-US" altLang="zh-CN" dirty="0"/>
+              <a:t>or</a:t>
+            </a:r>
+            <a:r>
+              <a:rPr lang="zh-CN" altLang="en-US" dirty="0"/>
+              <a:t> </a:t>
+            </a:r>
+            <a:r>
+              <a:rPr lang="en-US" altLang="zh-CN" dirty="0"/>
+              <a:t>FHE</a:t>
+            </a:r>
+          </a:p>
+          <a:p>
+            <a:pPr lvl="1"/>
+            <a:r>
+              <a:rPr lang="en-US" altLang="zh-CN" dirty="0"/>
+              <a:t>-</a:t>
+            </a:r>
+            <a:r>
+              <a:rPr lang="zh-CN" altLang="en-US" dirty="0"/>
+              <a:t> </a:t>
+            </a:r>
+            <a:r>
+              <a:rPr lang="en-US" altLang="zh-CN" dirty="0"/>
+              <a:t>Inference</a:t>
+            </a:r>
+            <a:r>
+              <a:rPr lang="zh-CN" altLang="en-US" dirty="0"/>
+              <a:t> </a:t>
+            </a:r>
+            <a:r>
+              <a:rPr lang="en-US" altLang="zh-CN" dirty="0"/>
+              <a:t>Phase</a:t>
+            </a:r>
+            <a:r>
+              <a:rPr lang="zh-CN" altLang="en-US" dirty="0"/>
+              <a:t> </a:t>
+            </a:r>
+            <a:r>
+              <a:rPr lang="en-US" altLang="zh-CN" dirty="0"/>
+              <a:t>–</a:t>
+            </a:r>
+            <a:r>
+              <a:rPr lang="zh-CN" altLang="en-US" dirty="0"/>
+              <a:t> </a:t>
+            </a:r>
+            <a:r>
+              <a:rPr lang="en-US" altLang="zh-CN" dirty="0"/>
+              <a:t>split</a:t>
+            </a:r>
+            <a:r>
+              <a:rPr lang="zh-CN" altLang="en-US" dirty="0"/>
+              <a:t> </a:t>
+            </a:r>
+            <a:r>
+              <a:rPr lang="en-US" altLang="zh-CN" dirty="0"/>
+              <a:t>learning</a:t>
+            </a:r>
+            <a:r>
+              <a:rPr lang="zh-CN" altLang="en-US" dirty="0"/>
+              <a:t> </a:t>
+            </a:r>
+            <a:r>
+              <a:rPr lang="en-US" altLang="zh-CN" dirty="0"/>
+              <a:t>+</a:t>
+            </a:r>
+            <a:r>
+              <a:rPr lang="zh-CN" altLang="en-US" dirty="0"/>
+              <a:t> </a:t>
+            </a:r>
+            <a:r>
+              <a:rPr lang="en-US" altLang="zh-CN" dirty="0"/>
+              <a:t>Encryption</a:t>
+            </a:r>
+            <a:r>
+              <a:rPr lang="zh-CN" altLang="en-US" dirty="0"/>
+              <a:t> </a:t>
+            </a:r>
+            <a:r>
+              <a:rPr lang="en-US" altLang="zh-CN" dirty="0"/>
+              <a:t>+</a:t>
+            </a:r>
+            <a:r>
+              <a:rPr lang="zh-CN" altLang="en-US" dirty="0"/>
+              <a:t> </a:t>
+            </a:r>
+            <a:r>
+              <a:rPr lang="en-US" altLang="zh-CN" dirty="0"/>
+              <a:t>MAC</a:t>
+            </a:r>
+            <a:endParaRPr lang="en-GB" altLang="zh-CN" dirty="0"/>
+          </a:p>
+          <a:p>
+            <a:pPr lvl="1"/>
+            <a:r>
+              <a:rPr lang="en-US" altLang="zh-CN" dirty="0"/>
+              <a:t>Authentication:</a:t>
+            </a:r>
+            <a:r>
+              <a:rPr lang="zh-CN" altLang="en-US" dirty="0"/>
+              <a:t> </a:t>
+            </a:r>
+            <a:endParaRPr lang="en-US" altLang="zh-CN" dirty="0"/>
+          </a:p>
+          <a:p>
+            <a:pPr lvl="1"/>
+            <a:endParaRPr lang="en-US" altLang="zh-CN" dirty="0"/>
+          </a:p>
+          <a:p>
+            <a:r>
+              <a:rPr lang="en-US" altLang="zh-CN" dirty="0"/>
+              <a:t>Security</a:t>
+            </a:r>
+            <a:r>
+              <a:rPr lang="zh-CN" altLang="en-US" dirty="0"/>
+              <a:t> </a:t>
+            </a:r>
+            <a:r>
+              <a:rPr lang="en-GB" dirty="0" err="1"/>
+              <a:t>Machanism</a:t>
+            </a:r>
+            <a:r>
+              <a:rPr lang="zh-CN" altLang="en-US" dirty="0"/>
+              <a:t>：</a:t>
+            </a:r>
+            <a:endParaRPr lang="en-GB" altLang="zh-CN" dirty="0"/>
+          </a:p>
+          <a:p>
+            <a:pPr lvl="1"/>
+            <a:r>
+              <a:rPr lang="en-US" altLang="zh-CN" dirty="0"/>
+              <a:t>Encryption:</a:t>
+            </a:r>
+            <a:r>
+              <a:rPr lang="zh-CN" altLang="en-US" dirty="0"/>
+              <a:t> </a:t>
+            </a:r>
+            <a:endParaRPr lang="en-US" altLang="zh-CN" dirty="0"/>
+          </a:p>
+          <a:p>
+            <a:pPr lvl="1"/>
+            <a:r>
+              <a:rPr lang="en-US" altLang="zh-CN" dirty="0"/>
+              <a:t>Authentication:</a:t>
+            </a:r>
+            <a:r>
+              <a:rPr lang="zh-CN" altLang="en-US" dirty="0"/>
+              <a:t> </a:t>
+            </a:r>
+            <a:endParaRPr lang="en-GB" altLang="zh-CN" dirty="0"/>
+          </a:p>
+          <a:p>
+            <a:pPr lvl="1"/>
+            <a:r>
+              <a:rPr lang="en-US" altLang="zh-CN" dirty="0"/>
+              <a:t>Protocol:</a:t>
+            </a:r>
+            <a:r>
+              <a:rPr lang="zh-CN" altLang="en-US" dirty="0"/>
+              <a:t> </a:t>
+            </a:r>
+            <a:endParaRPr lang="en-GB" altLang="zh-CN" dirty="0"/>
+          </a:p>
+          <a:p>
+            <a:pPr lvl="1"/>
+            <a:endParaRPr lang="en-US" altLang="zh-CN" dirty="0"/>
+          </a:p>
+        </p:txBody>
+      </p:sp>
+    </p:spTree>
+    <p:extLst>
+      <p:ext uri="{BB962C8B-B14F-4D97-AF65-F5344CB8AC3E}">
+        <p14:creationId xmlns:p14="http://schemas.microsoft.com/office/powerpoint/2010/main" val="582110372"/>
+      </p:ext>
+    </p:extLst>
+  </p:cSld>
+  <p:clrMapOvr>
+    <a:masterClrMapping/>
+  </p:clrMapOvr>
+</p:sld>
+</file>
+
+<file path=ppt/slides/slide5.xml><?xml version="1.0" encoding="utf-8"?>
+<p:sld xmlns:a="http://schemas.openxmlformats.org/drawingml/2006/main" xmlns:r="http://schemas.openxmlformats.org/officeDocument/2006/relationships" xmlns:p="http://schemas.openxmlformats.org/presentationml/2006/main">
+  <p:cSld>
+    <p:spTree>
+      <p:nvGrpSpPr>
         <p:cNvPr id="1" name="">
           <a:extLst>
             <a:ext uri="{FF2B5EF4-FFF2-40B4-BE49-F238E27FC236}">
@@ -5816,7 +10764,7 @@
 </p:sld>
 </file>
 
-<file path=ppt/slides/slide4.xml><?xml version="1.0" encoding="utf-8"?>
+<file path=ppt/slides/slide6.xml><?xml version="1.0" encoding="utf-8"?>
 <p:sld xmlns:a="http://schemas.openxmlformats.org/drawingml/2006/main" xmlns:r="http://schemas.openxmlformats.org/officeDocument/2006/relationships" xmlns:p="http://schemas.openxmlformats.org/presentationml/2006/main">
   <p:cSld>
     <p:spTree>
@@ -6145,7 +11093,7 @@
 </p:sld>
 </file>
 
-<file path=ppt/slides/slide5.xml><?xml version="1.0" encoding="utf-8"?>
+<file path=ppt/slides/slide7.xml><?xml version="1.0" encoding="utf-8"?>
 <p:sld xmlns:a="http://schemas.openxmlformats.org/drawingml/2006/main" xmlns:r="http://schemas.openxmlformats.org/officeDocument/2006/relationships" xmlns:p="http://schemas.openxmlformats.org/presentationml/2006/main">
   <p:cSld>
     <p:spTree>
@@ -6527,392 +11475,6 @@
     <p:extLst>
       <p:ext uri="{BB962C8B-B14F-4D97-AF65-F5344CB8AC3E}">
         <p14:creationId xmlns:p14="http://schemas.microsoft.com/office/powerpoint/2010/main" val="73146100"/>
-      </p:ext>
-    </p:extLst>
-  </p:cSld>
-  <p:clrMapOvr>
-    <a:masterClrMapping/>
-  </p:clrMapOvr>
-</p:sld>
-</file>
-
-<file path=ppt/slides/slide6.xml><?xml version="1.0" encoding="utf-8"?>
-<p:sld xmlns:a="http://schemas.openxmlformats.org/drawingml/2006/main" xmlns:r="http://schemas.openxmlformats.org/officeDocument/2006/relationships" xmlns:p="http://schemas.openxmlformats.org/presentationml/2006/main">
-  <p:cSld>
-    <p:spTree>
-      <p:nvGrpSpPr>
-        <p:cNvPr id="1" name=""/>
-        <p:cNvGrpSpPr/>
-        <p:nvPr/>
-      </p:nvGrpSpPr>
-      <p:grpSpPr>
-        <a:xfrm>
-          <a:off x="0" y="0"/>
-          <a:ext cx="0" cy="0"/>
-          <a:chOff x="0" y="0"/>
-          <a:chExt cx="0" cy="0"/>
-        </a:xfrm>
-      </p:grpSpPr>
-      <p:sp>
-        <p:nvSpPr>
-          <p:cNvPr id="2" name="Title 1">
-            <a:extLst>
-              <a:ext uri="{FF2B5EF4-FFF2-40B4-BE49-F238E27FC236}">
-                <a16:creationId xmlns:a16="http://schemas.microsoft.com/office/drawing/2014/main" id="{7212C24C-AEA6-BE17-5DB3-E933CD76C602}"/>
-              </a:ext>
-            </a:extLst>
-          </p:cNvPr>
-          <p:cNvSpPr>
-            <a:spLocks noGrp="1"/>
-          </p:cNvSpPr>
-          <p:nvPr>
-            <p:ph type="title"/>
-          </p:nvPr>
-        </p:nvSpPr>
-        <p:spPr/>
-        <p:txBody>
-          <a:bodyPr/>
-          <a:lstStyle/>
-          <a:p>
-            <a:r>
-              <a:rPr lang="en-US" dirty="0"/>
-              <a:t>Literature</a:t>
-            </a:r>
-            <a:r>
-              <a:rPr lang="zh-CN" altLang="en-US" dirty="0"/>
-              <a:t> </a:t>
-            </a:r>
-            <a:r>
-              <a:rPr lang="en-US" altLang="zh-CN" dirty="0"/>
-              <a:t>review</a:t>
-            </a:r>
-            <a:r>
-              <a:rPr lang="zh-CN" altLang="en-US" dirty="0"/>
-              <a:t> </a:t>
-            </a:r>
-            <a:r>
-              <a:rPr lang="en-US" altLang="zh-CN" dirty="0"/>
-              <a:t> (basic idea)</a:t>
-            </a:r>
-            <a:endParaRPr lang="en-US" dirty="0"/>
-          </a:p>
-        </p:txBody>
-      </p:sp>
-      <p:sp>
-        <p:nvSpPr>
-          <p:cNvPr id="3" name="Content Placeholder 2">
-            <a:extLst>
-              <a:ext uri="{FF2B5EF4-FFF2-40B4-BE49-F238E27FC236}">
-                <a16:creationId xmlns:a16="http://schemas.microsoft.com/office/drawing/2014/main" id="{41C6BA2B-3401-4993-B104-0C4DD9C52C54}"/>
-              </a:ext>
-            </a:extLst>
-          </p:cNvPr>
-          <p:cNvSpPr>
-            <a:spLocks noGrp="1"/>
-          </p:cNvSpPr>
-          <p:nvPr>
-            <p:ph idx="1"/>
-          </p:nvPr>
-        </p:nvSpPr>
-        <p:spPr/>
-        <p:txBody>
-          <a:bodyPr>
-            <a:normAutofit/>
-          </a:bodyPr>
-          <a:lstStyle/>
-          <a:p>
-            <a:r>
-              <a:rPr lang="en-GB" dirty="0"/>
-              <a:t>Image transmission protection methods are relevant background.</a:t>
-            </a:r>
-          </a:p>
-          <a:p>
-            <a:endParaRPr lang="en-GB" dirty="0"/>
-          </a:p>
-          <a:p>
-            <a:r>
-              <a:rPr lang="en-GB" dirty="0"/>
-              <a:t>Embedding transmission reduces raw-image exposure, but embeddings are still sensitive.</a:t>
-            </a:r>
-            <a:r>
-              <a:rPr lang="zh-CN" altLang="en-US" dirty="0"/>
-              <a:t> </a:t>
-            </a:r>
-            <a:r>
-              <a:rPr lang="en-US" altLang="zh-CN" dirty="0"/>
-              <a:t>(background)</a:t>
-            </a:r>
-            <a:br>
-              <a:rPr lang="en-GB" dirty="0"/>
-            </a:br>
-            <a:endParaRPr lang="en-GB" dirty="0"/>
-          </a:p>
-          <a:p>
-            <a:r>
-              <a:rPr lang="en-GB" dirty="0"/>
-              <a:t>Narrow down to embedding encryption and authentication combinations (find research gap)</a:t>
-            </a:r>
-            <a:endParaRPr lang="en-US" dirty="0"/>
-          </a:p>
-        </p:txBody>
-      </p:sp>
-    </p:spTree>
-    <p:extLst>
-      <p:ext uri="{BB962C8B-B14F-4D97-AF65-F5344CB8AC3E}">
-        <p14:creationId xmlns:p14="http://schemas.microsoft.com/office/powerpoint/2010/main" val="943481238"/>
-      </p:ext>
-    </p:extLst>
-  </p:cSld>
-  <p:clrMapOvr>
-    <a:masterClrMapping/>
-  </p:clrMapOvr>
-</p:sld>
-</file>
-
-<file path=ppt/slides/slide7.xml><?xml version="1.0" encoding="utf-8"?>
-<p:sld xmlns:a="http://schemas.openxmlformats.org/drawingml/2006/main" xmlns:r="http://schemas.openxmlformats.org/officeDocument/2006/relationships" xmlns:p="http://schemas.openxmlformats.org/presentationml/2006/main">
-  <p:cSld>
-    <p:spTree>
-      <p:nvGrpSpPr>
-        <p:cNvPr id="1" name=""/>
-        <p:cNvGrpSpPr/>
-        <p:nvPr/>
-      </p:nvGrpSpPr>
-      <p:grpSpPr>
-        <a:xfrm>
-          <a:off x="0" y="0"/>
-          <a:ext cx="0" cy="0"/>
-          <a:chOff x="0" y="0"/>
-          <a:chExt cx="0" cy="0"/>
-        </a:xfrm>
-      </p:grpSpPr>
-      <p:sp>
-        <p:nvSpPr>
-          <p:cNvPr id="2" name="Title 1">
-            <a:extLst>
-              <a:ext uri="{FF2B5EF4-FFF2-40B4-BE49-F238E27FC236}">
-                <a16:creationId xmlns:a16="http://schemas.microsoft.com/office/drawing/2014/main" id="{A6E34B27-50C9-B3F7-8E23-F04F6994F203}"/>
-              </a:ext>
-            </a:extLst>
-          </p:cNvPr>
-          <p:cNvSpPr>
-            <a:spLocks noGrp="1"/>
-          </p:cNvSpPr>
-          <p:nvPr>
-            <p:ph type="title"/>
-          </p:nvPr>
-        </p:nvSpPr>
-        <p:spPr/>
-        <p:txBody>
-          <a:bodyPr/>
-          <a:lstStyle/>
-          <a:p>
-            <a:r>
-              <a:rPr lang="en-GB" dirty="0"/>
-              <a:t>Image transmission protection methods are relevant background</a:t>
-            </a:r>
-            <a:endParaRPr lang="en-US" dirty="0"/>
-          </a:p>
-        </p:txBody>
-      </p:sp>
-      <p:sp>
-        <p:nvSpPr>
-          <p:cNvPr id="3" name="Content Placeholder 2">
-            <a:extLst>
-              <a:ext uri="{FF2B5EF4-FFF2-40B4-BE49-F238E27FC236}">
-                <a16:creationId xmlns:a16="http://schemas.microsoft.com/office/drawing/2014/main" id="{71466402-3AB0-7EEA-2FFB-34664A8B0A45}"/>
-              </a:ext>
-            </a:extLst>
-          </p:cNvPr>
-          <p:cNvSpPr>
-            <a:spLocks noGrp="1"/>
-          </p:cNvSpPr>
-          <p:nvPr>
-            <p:ph idx="1"/>
-          </p:nvPr>
-        </p:nvSpPr>
-        <p:spPr/>
-        <p:txBody>
-          <a:bodyPr>
-            <a:normAutofit fontScale="92500" lnSpcReduction="20000"/>
-          </a:bodyPr>
-          <a:lstStyle/>
-          <a:p>
-            <a:r>
-              <a:rPr lang="en-GB" b="1" dirty="0"/>
-              <a:t>IOT Device </a:t>
-            </a:r>
-            <a:r>
-              <a:rPr lang="en-GB" b="1" dirty="0" err="1"/>
-              <a:t>Encyption</a:t>
-            </a:r>
-            <a:r>
-              <a:rPr lang="en-GB" b="1" dirty="0"/>
-              <a:t> and Authentication: </a:t>
-            </a:r>
-          </a:p>
-          <a:p>
-            <a:pPr lvl="1"/>
-            <a:r>
-              <a:rPr lang="en-GB" dirty="0"/>
-              <a:t>Embedded Systems Authentication and Encryption Using Strong PUF </a:t>
-            </a:r>
-            <a:r>
-              <a:rPr lang="en-GB" dirty="0" err="1"/>
-              <a:t>Modeling</a:t>
-            </a:r>
-            <a:r>
-              <a:rPr lang="en-GB" dirty="0"/>
-              <a:t> - </a:t>
-            </a:r>
-            <a:r>
-              <a:rPr lang="en-US" altLang="zh-CN" dirty="0"/>
-              <a:t>Introducing</a:t>
-            </a:r>
-            <a:r>
-              <a:rPr lang="zh-CN" altLang="en-US" dirty="0"/>
-              <a:t> </a:t>
-            </a:r>
-            <a:r>
-              <a:rPr lang="en-US" altLang="zh-CN" dirty="0"/>
-              <a:t>that</a:t>
-            </a:r>
-            <a:r>
-              <a:rPr lang="zh-CN" altLang="en-US" dirty="0"/>
-              <a:t> </a:t>
-            </a:r>
-            <a:r>
-              <a:rPr lang="en-US" altLang="zh-CN" dirty="0"/>
-              <a:t>e</a:t>
-            </a:r>
-            <a:r>
-              <a:rPr lang="en-GB" dirty="0" err="1"/>
-              <a:t>mbedded</a:t>
-            </a:r>
-            <a:r>
-              <a:rPr lang="en-GB" dirty="0"/>
-              <a:t> devices face several security and performance limitations</a:t>
-            </a:r>
-            <a:r>
-              <a:rPr lang="en-US" altLang="zh-CN" dirty="0"/>
-              <a:t>.</a:t>
-            </a:r>
-            <a:r>
-              <a:rPr lang="zh-CN" altLang="en-US" dirty="0"/>
-              <a:t>  </a:t>
-            </a:r>
-            <a:r>
-              <a:rPr lang="en-US" altLang="zh-CN" dirty="0"/>
-              <a:t>(embedded</a:t>
-            </a:r>
-            <a:r>
-              <a:rPr lang="zh-CN" altLang="en-US" dirty="0"/>
-              <a:t> </a:t>
-            </a:r>
-            <a:r>
-              <a:rPr lang="en-US" altLang="zh-CN" dirty="0"/>
-              <a:t>encryption)</a:t>
-            </a:r>
-          </a:p>
-          <a:p>
-            <a:pPr lvl="1"/>
-            <a:r>
-              <a:rPr lang="en-GB" dirty="0"/>
-              <a:t>ChaCha20-Poly1305 authenticated encryption for high-speed embedded IoT applications (related to MQTT protocol)</a:t>
-            </a:r>
-          </a:p>
-          <a:p>
-            <a:pPr lvl="1"/>
-            <a:r>
-              <a:rPr lang="en-GB" dirty="0"/>
-              <a:t>Lightweight Internet of Things Device Authentication, Encryption, and Key Distribution Using End-to-End Neural Cryptosystems</a:t>
-            </a:r>
-          </a:p>
-          <a:p>
-            <a:pPr lvl="1"/>
-            <a:endParaRPr lang="en-GB" dirty="0"/>
-          </a:p>
-          <a:p>
-            <a:r>
-              <a:rPr lang="en-GB" b="1" dirty="0"/>
-              <a:t>Image Encryption: </a:t>
-            </a:r>
-          </a:p>
-          <a:p>
-            <a:pPr lvl="1"/>
-            <a:r>
-              <a:rPr lang="en-GB" dirty="0"/>
-              <a:t>A Lightweight Image Encryption Algorithm Based on Secure Key Generation </a:t>
-            </a:r>
-            <a:r>
-              <a:rPr lang="zh-CN" altLang="en-US" dirty="0"/>
-              <a:t> </a:t>
-            </a:r>
-            <a:r>
-              <a:rPr lang="en-US" altLang="zh-CN" dirty="0"/>
-              <a:t>(based</a:t>
-            </a:r>
-            <a:r>
-              <a:rPr lang="zh-CN" altLang="en-US" dirty="0"/>
-              <a:t> </a:t>
-            </a:r>
-            <a:r>
-              <a:rPr lang="en-US" altLang="zh-CN" dirty="0"/>
-              <a:t>on</a:t>
-            </a:r>
-            <a:r>
-              <a:rPr lang="zh-CN" altLang="en-US" dirty="0"/>
-              <a:t> </a:t>
-            </a:r>
-            <a:r>
-              <a:rPr lang="en-US" altLang="zh-CN" dirty="0"/>
-              <a:t>AES)</a:t>
-            </a:r>
-            <a:endParaRPr lang="en-GB" dirty="0"/>
-          </a:p>
-          <a:p>
-            <a:pPr lvl="1"/>
-            <a:endParaRPr lang="en-GB" dirty="0"/>
-          </a:p>
-          <a:p>
-            <a:r>
-              <a:rPr lang="en-GB" b="1" dirty="0"/>
-              <a:t>Transmission protocol</a:t>
-            </a:r>
-            <a:r>
-              <a:rPr lang="en-US" altLang="zh-CN" b="1" dirty="0"/>
-              <a:t>:</a:t>
-            </a:r>
-            <a:r>
-              <a:rPr lang="zh-CN" altLang="en-US" b="1" dirty="0"/>
-              <a:t> </a:t>
-            </a:r>
-            <a:r>
-              <a:rPr lang="en-GB" dirty="0"/>
-              <a:t>MQTT</a:t>
-            </a:r>
-            <a:r>
-              <a:rPr lang="zh-CN" altLang="en-US" dirty="0"/>
-              <a:t> </a:t>
-            </a:r>
-            <a:r>
-              <a:rPr lang="en-US" altLang="zh-CN" dirty="0"/>
-              <a:t>(classic protocol), what else?</a:t>
-            </a:r>
-            <a:endParaRPr lang="en-GB" dirty="0"/>
-          </a:p>
-          <a:p>
-            <a:pPr marL="457200" lvl="1" indent="0">
-              <a:buNone/>
-            </a:pPr>
-            <a:endParaRPr lang="en-US" dirty="0"/>
-          </a:p>
-        </p:txBody>
-      </p:sp>
-    </p:spTree>
-    <p:extLst>
-      <p:ext uri="{BB962C8B-B14F-4D97-AF65-F5344CB8AC3E}">
-        <p14:creationId xmlns:p14="http://schemas.microsoft.com/office/powerpoint/2010/main" val="3554619603"/>
       </p:ext>
     </p:extLst>
   </p:cSld>
@@ -6944,7 +11506,7 @@
           <p:cNvPr id="2" name="Title 1">
             <a:extLst>
               <a:ext uri="{FF2B5EF4-FFF2-40B4-BE49-F238E27FC236}">
-                <a16:creationId xmlns:a16="http://schemas.microsoft.com/office/drawing/2014/main" id="{88F7E6BD-FF49-36B7-3121-DB46BCCFFEEE}"/>
+                <a16:creationId xmlns:a16="http://schemas.microsoft.com/office/drawing/2014/main" id="{7212C24C-AEA6-BE17-5DB3-E933CD76C602}"/>
               </a:ext>
             </a:extLst>
           </p:cNvPr>
@@ -6957,14 +11519,12 @@
         </p:nvSpPr>
         <p:spPr/>
         <p:txBody>
-          <a:bodyPr>
-            <a:normAutofit fontScale="90000"/>
-          </a:bodyPr>
+          <a:bodyPr/>
           <a:lstStyle/>
           <a:p>
             <a:r>
-              <a:rPr lang="en-GB" dirty="0"/>
-              <a:t>Embedding transmission reduces raw-image exposure, but embeddings are still sensitive.</a:t>
+              <a:rPr lang="en-US" dirty="0"/>
+              <a:t>Literature</a:t>
             </a:r>
             <a:r>
               <a:rPr lang="zh-CN" altLang="en-US" dirty="0"/>
@@ -6972,7 +11532,15 @@
             </a:r>
             <a:r>
               <a:rPr lang="en-US" altLang="zh-CN" dirty="0"/>
-              <a:t>(background)</a:t>
+              <a:t>review</a:t>
+            </a:r>
+            <a:r>
+              <a:rPr lang="zh-CN" altLang="en-US" dirty="0"/>
+              <a:t> </a:t>
+            </a:r>
+            <a:r>
+              <a:rPr lang="en-US" altLang="zh-CN" dirty="0"/>
+              <a:t> (basic idea)</a:t>
             </a:r>
             <a:endParaRPr lang="en-US" dirty="0"/>
           </a:p>
@@ -6983,7 +11551,7 @@
           <p:cNvPr id="3" name="Content Placeholder 2">
             <a:extLst>
               <a:ext uri="{FF2B5EF4-FFF2-40B4-BE49-F238E27FC236}">
-                <a16:creationId xmlns:a16="http://schemas.microsoft.com/office/drawing/2014/main" id="{FCCF3752-85EC-FA56-49C2-25FBBD516EEA}"/>
+                <a16:creationId xmlns:a16="http://schemas.microsoft.com/office/drawing/2014/main" id="{41C6BA2B-3401-4993-B104-0C4DD9C52C54}"/>
               </a:ext>
             </a:extLst>
           </p:cNvPr>
@@ -6997,125 +11565,41 @@
         <p:spPr/>
         <p:txBody>
           <a:bodyPr>
-            <a:normAutofit fontScale="77500" lnSpcReduction="20000"/>
+            <a:normAutofit/>
           </a:bodyPr>
           <a:lstStyle/>
           <a:p>
             <a:r>
-              <a:rPr lang="en-GB" b="1" dirty="0"/>
-              <a:t>Understanding deep image representations by inverting them</a:t>
-            </a:r>
-            <a:r>
-              <a:rPr lang="zh-CN" altLang="en-US" b="1" dirty="0"/>
-              <a:t> </a:t>
-            </a:r>
-            <a:r>
-              <a:rPr lang="en-US" altLang="zh-CN" dirty="0"/>
-              <a:t>--</a:t>
+              <a:rPr lang="en-GB" dirty="0"/>
+              <a:t>Image transmission protection methods are relevant background.</a:t>
+            </a:r>
+          </a:p>
+          <a:p>
+            <a:endParaRPr lang="en-GB" dirty="0"/>
+          </a:p>
+          <a:p>
+            <a:r>
+              <a:rPr lang="en-GB" dirty="0"/>
+              <a:t>Embedding transmission reduces raw-image exposure, but embeddings are still sensitive.</a:t>
             </a:r>
             <a:r>
               <a:rPr lang="zh-CN" altLang="en-US" dirty="0"/>
               <a:t> </a:t>
             </a:r>
             <a:r>
-              <a:rPr lang="en-GB" dirty="0"/>
-              <a:t>Inverts image representations to reconstruct visual content</a:t>
-            </a:r>
-            <a:r>
-              <a:rPr lang="en-US" altLang="zh-CN" dirty="0"/>
-              <a:t>.</a:t>
-            </a:r>
-            <a:r>
-              <a:rPr lang="zh-CN" altLang="en-US" dirty="0"/>
-              <a:t> </a:t>
-            </a:r>
-            <a:r>
-              <a:rPr lang="en-US" altLang="zh-CN" dirty="0"/>
-              <a:t>This</a:t>
-            </a:r>
-            <a:r>
-              <a:rPr lang="zh-CN" altLang="en-US" dirty="0"/>
-              <a:t> </a:t>
-            </a:r>
-            <a:r>
-              <a:rPr lang="en-GB" dirty="0"/>
-              <a:t>shown that, under white-box or partially known model settings, visual representations can be inverted to recover information about the original image.</a:t>
-            </a:r>
-          </a:p>
-          <a:p>
-            <a:endParaRPr lang="en-GB" dirty="0"/>
-          </a:p>
-          <a:p>
-            <a:r>
-              <a:rPr lang="en-GB" b="1" dirty="0"/>
-              <a:t>Deep-BMI: Exploring Model Inversion Attacks in the Black-box Setting</a:t>
-            </a:r>
-            <a:r>
-              <a:rPr lang="zh-CN" altLang="en-US" b="1" dirty="0"/>
-              <a:t> </a:t>
-            </a:r>
-            <a:r>
-              <a:rPr lang="en-US" altLang="zh-CN" dirty="0"/>
-              <a:t>--</a:t>
-            </a:r>
-            <a:r>
-              <a:rPr lang="zh-CN" altLang="en-US" dirty="0"/>
-              <a:t> </a:t>
-            </a:r>
-            <a:r>
-              <a:rPr lang="en-GB" dirty="0"/>
-              <a:t>Black-box model inversion can reconstruct semantically meaningful images without accessing target model parameters, although it usually requires repeated queries to the target model.</a:t>
-            </a:r>
-          </a:p>
-          <a:p>
-            <a:endParaRPr lang="en-GB" dirty="0"/>
-          </a:p>
-          <a:p>
-            <a:r>
-              <a:rPr lang="en-GB" b="1" dirty="0"/>
-              <a:t>Deep Learning Model Inversion Attacks and </a:t>
-            </a:r>
-            <a:r>
-              <a:rPr lang="en-GB" b="1" dirty="0" err="1"/>
-              <a:t>Defenses</a:t>
-            </a:r>
-            <a:r>
-              <a:rPr lang="en-GB" b="1" dirty="0"/>
-              <a:t>: A Comprehensive Survey</a:t>
-            </a:r>
-            <a:r>
-              <a:rPr lang="zh-CN" altLang="en-US" b="1" dirty="0"/>
-              <a:t> </a:t>
-            </a:r>
-            <a:r>
-              <a:rPr lang="en-US" altLang="zh-CN" dirty="0"/>
-              <a:t>--</a:t>
-            </a:r>
-            <a:r>
-              <a:rPr lang="zh-CN" altLang="en-US" dirty="0"/>
-              <a:t> </a:t>
-            </a:r>
-            <a:r>
-              <a:rPr lang="en-GB" dirty="0"/>
-              <a:t>how attackers can reconstruct private training data or sensitive information from deep learning models, and summarises existing </a:t>
-            </a:r>
-            <a:r>
-              <a:rPr lang="en-GB" dirty="0" err="1"/>
-              <a:t>defense</a:t>
-            </a:r>
-            <a:r>
-              <a:rPr lang="en-GB" dirty="0"/>
-              <a:t> methods.</a:t>
+              <a:rPr lang="en-US" altLang="zh-CN" dirty="0"/>
+              <a:t>(background)</a:t>
             </a:r>
             <a:br>
               <a:rPr lang="en-GB" dirty="0"/>
             </a:br>
-            <a:endParaRPr lang="en-US" dirty="0"/>
-          </a:p>
-          <a:p>
-            <a:endParaRPr lang="en-US" dirty="0"/>
-          </a:p>
-          <a:p>
+            <a:endParaRPr lang="en-GB" dirty="0"/>
+          </a:p>
+          <a:p>
+            <a:r>
+              <a:rPr lang="en-GB" dirty="0"/>
+              <a:t>Narrow down to embedding encryption and authentication combinations (find research gap)</a:t>
+            </a:r>
             <a:endParaRPr lang="en-US" dirty="0"/>
           </a:p>
         </p:txBody>
@@ -7123,7 +11607,7 @@
     </p:spTree>
     <p:extLst>
       <p:ext uri="{BB962C8B-B14F-4D97-AF65-F5344CB8AC3E}">
-        <p14:creationId xmlns:p14="http://schemas.microsoft.com/office/powerpoint/2010/main" val="1349224978"/>
+        <p14:creationId xmlns:p14="http://schemas.microsoft.com/office/powerpoint/2010/main" val="943481238"/>
       </p:ext>
     </p:extLst>
   </p:cSld>
@@ -7155,7 +11639,7 @@
           <p:cNvPr id="2" name="Title 1">
             <a:extLst>
               <a:ext uri="{FF2B5EF4-FFF2-40B4-BE49-F238E27FC236}">
-                <a16:creationId xmlns:a16="http://schemas.microsoft.com/office/drawing/2014/main" id="{1B5E8B61-A1B0-A574-297A-A4D576271C24}"/>
+                <a16:creationId xmlns:a16="http://schemas.microsoft.com/office/drawing/2014/main" id="{A6E34B27-50C9-B3F7-8E23-F04F6994F203}"/>
               </a:ext>
             </a:extLst>
           </p:cNvPr>
@@ -7172,16 +11656,8 @@
           <a:lstStyle/>
           <a:p>
             <a:r>
-              <a:rPr lang="en-US" altLang="zh-CN" dirty="0"/>
-              <a:t>E</a:t>
-            </a:r>
-            <a:r>
-              <a:rPr lang="en-GB" dirty="0" err="1"/>
-              <a:t>mbedding</a:t>
-            </a:r>
-            <a:r>
               <a:rPr lang="en-GB" dirty="0"/>
-              <a:t> encryption and authentication combinations</a:t>
+              <a:t>Image transmission protection methods are relevant background</a:t>
             </a:r>
             <a:endParaRPr lang="en-US" dirty="0"/>
           </a:p>
@@ -7192,7 +11668,7 @@
           <p:cNvPr id="3" name="Content Placeholder 2">
             <a:extLst>
               <a:ext uri="{FF2B5EF4-FFF2-40B4-BE49-F238E27FC236}">
-                <a16:creationId xmlns:a16="http://schemas.microsoft.com/office/drawing/2014/main" id="{CF3649C6-2E5F-3C42-FBEB-C028BFCC91CA}"/>
+                <a16:creationId xmlns:a16="http://schemas.microsoft.com/office/drawing/2014/main" id="{71466402-3AB0-7EEA-2FFB-34664A8B0A45}"/>
               </a:ext>
             </a:extLst>
           </p:cNvPr>
@@ -7206,51 +11682,177 @@
         <p:spPr/>
         <p:txBody>
           <a:bodyPr>
-            <a:normAutofit fontScale="92500" lnSpcReduction="10000"/>
+            <a:normAutofit fontScale="92500" lnSpcReduction="20000"/>
           </a:bodyPr>
           <a:lstStyle/>
           <a:p>
             <a:r>
               <a:rPr lang="en-GB" b="1" dirty="0"/>
-              <a:t>A privacy preserving split learning framework with adaptive inference selection for IoT security</a:t>
+              <a:t>IOT Device </a:t>
+            </a:r>
+            <a:r>
+              <a:rPr lang="en-GB" b="1" dirty="0" err="1"/>
+              <a:t>Encyption</a:t>
+            </a:r>
+            <a:r>
+              <a:rPr lang="en-GB" b="1" dirty="0"/>
+              <a:t> and Authentication: </a:t>
+            </a:r>
+          </a:p>
+          <a:p>
+            <a:pPr lvl="1"/>
+            <a:r>
+              <a:rPr lang="en-GB" dirty="0"/>
+              <a:t>Embedded Systems Authentication and Encryption Using Strong PUF </a:t>
+            </a:r>
+            <a:r>
+              <a:rPr lang="en-GB" dirty="0" err="1"/>
+              <a:t>Modeling</a:t>
+            </a:r>
+            <a:r>
+              <a:rPr lang="en-GB" dirty="0"/>
+              <a:t> - </a:t>
+            </a:r>
+            <a:r>
+              <a:rPr lang="en-US" altLang="zh-CN" dirty="0"/>
+              <a:t>Introducing</a:t>
+            </a:r>
+            <a:r>
+              <a:rPr lang="zh-CN" altLang="en-US" dirty="0"/>
+              <a:t> </a:t>
+            </a:r>
+            <a:r>
+              <a:rPr lang="en-US" altLang="zh-CN" dirty="0"/>
+              <a:t>that</a:t>
+            </a:r>
+            <a:r>
+              <a:rPr lang="zh-CN" altLang="en-US" dirty="0"/>
+              <a:t> </a:t>
+            </a:r>
+            <a:r>
+              <a:rPr lang="en-US" altLang="zh-CN" dirty="0"/>
+              <a:t>e</a:t>
+            </a:r>
+            <a:r>
+              <a:rPr lang="en-GB" dirty="0" err="1"/>
+              <a:t>mbedded</a:t>
+            </a:r>
+            <a:r>
+              <a:rPr lang="en-GB" dirty="0"/>
+              <a:t> devices face several security and performance limitations</a:t>
+            </a:r>
+            <a:r>
+              <a:rPr lang="en-US" altLang="zh-CN" dirty="0"/>
+              <a:t>.</a:t>
+            </a:r>
+            <a:r>
+              <a:rPr lang="zh-CN" altLang="en-US" dirty="0"/>
+              <a:t>  </a:t>
+            </a:r>
+            <a:r>
+              <a:rPr lang="en-US" altLang="zh-CN" dirty="0"/>
+              <a:t>(embedded</a:t>
+            </a:r>
+            <a:r>
+              <a:rPr lang="zh-CN" altLang="en-US" dirty="0"/>
+              <a:t> </a:t>
+            </a:r>
+            <a:r>
+              <a:rPr lang="en-US" altLang="zh-CN" dirty="0"/>
+              <a:t>encryption)</a:t>
+            </a:r>
+          </a:p>
+          <a:p>
+            <a:pPr lvl="1"/>
+            <a:r>
+              <a:rPr lang="en-GB" dirty="0"/>
+              <a:t>ChaCha20-Poly1305 authenticated encryption for high-speed embedded IoT applications (related to MQTT protocol)</a:t>
+            </a:r>
+          </a:p>
+          <a:p>
+            <a:pPr lvl="1"/>
+            <a:r>
+              <a:rPr lang="en-GB" dirty="0"/>
+              <a:t>Lightweight Internet of Things Device Authentication, Encryption, and Key Distribution Using End-to-End Neural Cryptosystems</a:t>
+            </a:r>
+          </a:p>
+          <a:p>
+            <a:pPr lvl="1"/>
+            <a:endParaRPr lang="en-GB" dirty="0"/>
+          </a:p>
+          <a:p>
+            <a:r>
+              <a:rPr lang="en-GB" b="1" dirty="0"/>
+              <a:t>Image Encryption: </a:t>
+            </a:r>
+          </a:p>
+          <a:p>
+            <a:pPr lvl="1"/>
+            <a:r>
+              <a:rPr lang="en-GB" dirty="0"/>
+              <a:t>A Lightweight Image Encryption Algorithm Based on Secure Key Generation </a:t>
+            </a:r>
+            <a:r>
+              <a:rPr lang="zh-CN" altLang="en-US" dirty="0"/>
+              <a:t> </a:t>
+            </a:r>
+            <a:r>
+              <a:rPr lang="en-US" altLang="zh-CN" dirty="0"/>
+              <a:t>(based</a:t>
+            </a:r>
+            <a:r>
+              <a:rPr lang="zh-CN" altLang="en-US" dirty="0"/>
+              <a:t> </a:t>
+            </a:r>
+            <a:r>
+              <a:rPr lang="en-US" altLang="zh-CN" dirty="0"/>
+              <a:t>on</a:t>
+            </a:r>
+            <a:r>
+              <a:rPr lang="zh-CN" altLang="en-US" dirty="0"/>
+              <a:t> </a:t>
+            </a:r>
+            <a:r>
+              <a:rPr lang="en-US" altLang="zh-CN" dirty="0"/>
+              <a:t>AES)</a:t>
+            </a:r>
+            <a:endParaRPr lang="en-GB" dirty="0"/>
+          </a:p>
+          <a:p>
+            <a:pPr lvl="1"/>
+            <a:endParaRPr lang="en-GB" dirty="0"/>
+          </a:p>
+          <a:p>
+            <a:r>
+              <a:rPr lang="en-GB" b="1" dirty="0"/>
+              <a:t>Transmission protocol</a:t>
+            </a:r>
+            <a:r>
+              <a:rPr lang="en-US" altLang="zh-CN" b="1" dirty="0"/>
+              <a:t>:</a:t>
             </a:r>
             <a:r>
               <a:rPr lang="zh-CN" altLang="en-US" b="1" dirty="0"/>
-              <a:t>  </a:t>
-            </a:r>
-            <a:r>
-              <a:rPr lang="en-US" altLang="zh-CN" dirty="0"/>
-              <a:t>--</a:t>
+              <a:t> </a:t>
+            </a:r>
+            <a:r>
+              <a:rPr lang="en-GB" dirty="0"/>
+              <a:t>MQTT</a:t>
             </a:r>
             <a:r>
               <a:rPr lang="zh-CN" altLang="en-US" dirty="0"/>
               <a:t> </a:t>
             </a:r>
             <a:r>
-              <a:rPr lang="en-GB" dirty="0"/>
-              <a:t>Split Learning, Gaussian noise-based DP, pruning, quantization, TensorFlow Lite, and adaptive model selection.</a:t>
-            </a:r>
-          </a:p>
-          <a:p>
-            <a:r>
-              <a:rPr lang="en-GB" b="1" dirty="0"/>
-              <a:t>A privacy-preserving multi-user retrieval system for multimodal artificial intelligence</a:t>
-            </a:r>
-          </a:p>
-          <a:p>
-            <a:pPr lvl="1"/>
-            <a:r>
-              <a:rPr lang="en-GB" dirty="0"/>
-              <a:t>This paper shows that embedding transmission alone is not enough for privacy protection, so the authors combine embedding obfuscation, encryption, and secure key management for multimodal retrieval.</a:t>
-            </a:r>
-          </a:p>
-          <a:p>
+              <a:rPr lang="en-US" altLang="zh-CN" dirty="0"/>
+              <a:t>(classic protocol), what else?</a:t>
+            </a:r>
             <a:endParaRPr lang="en-GB" dirty="0"/>
           </a:p>
           <a:p>
-            <a:br>
-              <a:rPr lang="en-GB" dirty="0"/>
-            </a:br>
+            <a:pPr marL="457200" lvl="1" indent="0">
+              <a:buNone/>
+            </a:pPr>
             <a:endParaRPr lang="en-US" dirty="0"/>
           </a:p>
         </p:txBody>
@@ -7258,7 +11860,7 @@
     </p:spTree>
     <p:extLst>
       <p:ext uri="{BB962C8B-B14F-4D97-AF65-F5344CB8AC3E}">
-        <p14:creationId xmlns:p14="http://schemas.microsoft.com/office/powerpoint/2010/main" val="1853872987"/>
+        <p14:creationId xmlns:p14="http://schemas.microsoft.com/office/powerpoint/2010/main" val="3554619603"/>
       </p:ext>
     </p:extLst>
   </p:cSld>
